--- a/docs/lectures/10-Log-Odds.pptx
+++ b/docs/lectures/10-Log-Odds.pptx
@@ -5,7 +5,7 @@
     <p:sldMasterId id="2147483660" r:id="rId1"/>
   </p:sldMasterIdLst>
   <p:handoutMasterIdLst>
-    <p:handoutMasterId r:id="rId57"/>
+    <p:handoutMasterId r:id="rId58"/>
   </p:handoutMasterIdLst>
   <p:sldIdLst>
     <p:sldId id="256" r:id="rId2"/>
@@ -22,47 +22,48 @@
     <p:sldId id="266" r:id="rId13"/>
     <p:sldId id="267" r:id="rId14"/>
     <p:sldId id="268" r:id="rId15"/>
-    <p:sldId id="269" r:id="rId16"/>
-    <p:sldId id="270" r:id="rId17"/>
-    <p:sldId id="259" r:id="rId18"/>
-    <p:sldId id="271" r:id="rId19"/>
-    <p:sldId id="272" r:id="rId20"/>
-    <p:sldId id="276" r:id="rId21"/>
-    <p:sldId id="274" r:id="rId22"/>
-    <p:sldId id="275" r:id="rId23"/>
-    <p:sldId id="278" r:id="rId24"/>
-    <p:sldId id="279" r:id="rId25"/>
-    <p:sldId id="280" r:id="rId26"/>
-    <p:sldId id="282" r:id="rId27"/>
-    <p:sldId id="281" r:id="rId28"/>
-    <p:sldId id="283" r:id="rId29"/>
-    <p:sldId id="284" r:id="rId30"/>
-    <p:sldId id="285" r:id="rId31"/>
-    <p:sldId id="286" r:id="rId32"/>
-    <p:sldId id="287" r:id="rId33"/>
-    <p:sldId id="288" r:id="rId34"/>
-    <p:sldId id="289" r:id="rId35"/>
-    <p:sldId id="290" r:id="rId36"/>
-    <p:sldId id="291" r:id="rId37"/>
-    <p:sldId id="292" r:id="rId38"/>
-    <p:sldId id="293" r:id="rId39"/>
-    <p:sldId id="294" r:id="rId40"/>
-    <p:sldId id="295" r:id="rId41"/>
-    <p:sldId id="306" r:id="rId42"/>
-    <p:sldId id="296" r:id="rId43"/>
-    <p:sldId id="297" r:id="rId44"/>
-    <p:sldId id="298" r:id="rId45"/>
-    <p:sldId id="307" r:id="rId46"/>
-    <p:sldId id="308" r:id="rId47"/>
-    <p:sldId id="309" r:id="rId48"/>
-    <p:sldId id="311" r:id="rId49"/>
-    <p:sldId id="299" r:id="rId50"/>
-    <p:sldId id="300" r:id="rId51"/>
-    <p:sldId id="301" r:id="rId52"/>
-    <p:sldId id="302" r:id="rId53"/>
-    <p:sldId id="303" r:id="rId54"/>
-    <p:sldId id="304" r:id="rId55"/>
-    <p:sldId id="310" r:id="rId56"/>
+    <p:sldId id="313" r:id="rId16"/>
+    <p:sldId id="269" r:id="rId17"/>
+    <p:sldId id="270" r:id="rId18"/>
+    <p:sldId id="259" r:id="rId19"/>
+    <p:sldId id="271" r:id="rId20"/>
+    <p:sldId id="272" r:id="rId21"/>
+    <p:sldId id="276" r:id="rId22"/>
+    <p:sldId id="274" r:id="rId23"/>
+    <p:sldId id="275" r:id="rId24"/>
+    <p:sldId id="278" r:id="rId25"/>
+    <p:sldId id="279" r:id="rId26"/>
+    <p:sldId id="280" r:id="rId27"/>
+    <p:sldId id="282" r:id="rId28"/>
+    <p:sldId id="281" r:id="rId29"/>
+    <p:sldId id="283" r:id="rId30"/>
+    <p:sldId id="284" r:id="rId31"/>
+    <p:sldId id="285" r:id="rId32"/>
+    <p:sldId id="286" r:id="rId33"/>
+    <p:sldId id="287" r:id="rId34"/>
+    <p:sldId id="288" r:id="rId35"/>
+    <p:sldId id="289" r:id="rId36"/>
+    <p:sldId id="290" r:id="rId37"/>
+    <p:sldId id="291" r:id="rId38"/>
+    <p:sldId id="292" r:id="rId39"/>
+    <p:sldId id="293" r:id="rId40"/>
+    <p:sldId id="294" r:id="rId41"/>
+    <p:sldId id="295" r:id="rId42"/>
+    <p:sldId id="306" r:id="rId43"/>
+    <p:sldId id="296" r:id="rId44"/>
+    <p:sldId id="297" r:id="rId45"/>
+    <p:sldId id="298" r:id="rId46"/>
+    <p:sldId id="307" r:id="rId47"/>
+    <p:sldId id="308" r:id="rId48"/>
+    <p:sldId id="309" r:id="rId49"/>
+    <p:sldId id="311" r:id="rId50"/>
+    <p:sldId id="299" r:id="rId51"/>
+    <p:sldId id="300" r:id="rId52"/>
+    <p:sldId id="301" r:id="rId53"/>
+    <p:sldId id="302" r:id="rId54"/>
+    <p:sldId id="303" r:id="rId55"/>
+    <p:sldId id="304" r:id="rId56"/>
+    <p:sldId id="310" r:id="rId57"/>
   </p:sldIdLst>
   <p:sldSz cx="9144000" cy="6858000" type="screen4x3"/>
   <p:notesSz cx="6858000" cy="9144000"/>
@@ -184,6 +185,7 @@
             <p14:sldId id="266"/>
             <p14:sldId id="267"/>
             <p14:sldId id="268"/>
+            <p14:sldId id="313"/>
           </p14:sldIdLst>
         </p14:section>
         <p14:section name="3-way" id="{9A0C7C62-EB06-433A-833C-AE13DF325E24}">
@@ -359,7 +361,7 @@
           <a:p>
             <a:fld id="{08BD4FA9-F3CE-45B3-A980-C331C6F1EF65}" type="datetimeFigureOut">
               <a:rPr lang="en-US" smtClean="0"/>
-              <a:t>4/4/2023</a:t>
+              <a:t>3/23/2026</a:t>
             </a:fld>
             <a:endParaRPr lang="en-US"/>
           </a:p>
@@ -632,7 +634,7 @@
           <a:p>
             <a:fld id="{EAAD3657-2200-4D14-82C0-10C39B0F0F06}" type="datetime1">
               <a:rPr lang="en-US" smtClean="0"/>
-              <a:t>4/4/2023</a:t>
+              <a:t>3/23/2026</a:t>
             </a:fld>
             <a:endParaRPr lang="en-US"/>
           </a:p>
@@ -800,7 +802,7 @@
           <a:p>
             <a:fld id="{11BBAF55-A85E-4993-914E-FC1E5AA7DF24}" type="datetime1">
               <a:rPr lang="en-US" smtClean="0"/>
-              <a:t>4/4/2023</a:t>
+              <a:t>3/23/2026</a:t>
             </a:fld>
             <a:endParaRPr lang="en-US"/>
           </a:p>
@@ -978,7 +980,7 @@
           <a:p>
             <a:fld id="{39816E07-E1DB-44A4-A5E5-9F4B54E8C933}" type="datetime1">
               <a:rPr lang="en-US" smtClean="0"/>
-              <a:t>4/4/2023</a:t>
+              <a:t>3/23/2026</a:t>
             </a:fld>
             <a:endParaRPr lang="en-US"/>
           </a:p>
@@ -1163,7 +1165,7 @@
           <a:p>
             <a:fld id="{C2B1AD17-B813-4477-8AFE-B1860CC59113}" type="datetime1">
               <a:rPr lang="en-US" smtClean="0"/>
-              <a:t>4/4/2023</a:t>
+              <a:t>3/23/2026</a:t>
             </a:fld>
             <a:endParaRPr lang="en-US"/>
           </a:p>
@@ -1408,7 +1410,7 @@
           <a:p>
             <a:fld id="{D0975C0D-5C9E-48CC-8D31-F42D19FA8F7A}" type="datetime1">
               <a:rPr lang="en-US" smtClean="0"/>
-              <a:t>4/4/2023</a:t>
+              <a:t>3/23/2026</a:t>
             </a:fld>
             <a:endParaRPr lang="en-US"/>
           </a:p>
@@ -1693,7 +1695,7 @@
           <a:p>
             <a:fld id="{28657551-0F2B-4F09-86FD-F7994CE83DC5}" type="datetime1">
               <a:rPr lang="en-US" smtClean="0"/>
-              <a:t>4/4/2023</a:t>
+              <a:t>3/23/2026</a:t>
             </a:fld>
             <a:endParaRPr lang="en-US"/>
           </a:p>
@@ -2112,7 +2114,7 @@
           <a:p>
             <a:fld id="{3929D2B2-4200-46B9-96C3-02A55D5FAA00}" type="datetime1">
               <a:rPr lang="en-US" smtClean="0"/>
-              <a:t>4/4/2023</a:t>
+              <a:t>3/23/2026</a:t>
             </a:fld>
             <a:endParaRPr lang="en-US"/>
           </a:p>
@@ -2229,7 +2231,7 @@
           <a:p>
             <a:fld id="{41FF7722-74E8-497F-A072-89677A2C2373}" type="datetime1">
               <a:rPr lang="en-US" smtClean="0"/>
-              <a:t>4/4/2023</a:t>
+              <a:t>3/23/2026</a:t>
             </a:fld>
             <a:endParaRPr lang="en-US"/>
           </a:p>
@@ -2324,7 +2326,7 @@
           <a:p>
             <a:fld id="{BD26212E-B46B-426F-AE59-AA326827D9E0}" type="datetime1">
               <a:rPr lang="en-US" smtClean="0"/>
-              <a:t>4/4/2023</a:t>
+              <a:t>3/23/2026</a:t>
             </a:fld>
             <a:endParaRPr lang="en-US"/>
           </a:p>
@@ -2599,7 +2601,7 @@
           <a:p>
             <a:fld id="{FB9B81E8-09EA-4684-A39F-38DE1E49D20C}" type="datetime1">
               <a:rPr lang="en-US" smtClean="0"/>
-              <a:t>4/4/2023</a:t>
+              <a:t>3/23/2026</a:t>
             </a:fld>
             <a:endParaRPr lang="en-US"/>
           </a:p>
@@ -2851,7 +2853,7 @@
           <a:p>
             <a:fld id="{35C5CC5F-056C-4047-9A5C-9F5B4BED129B}" type="datetime1">
               <a:rPr lang="en-US" smtClean="0"/>
-              <a:t>4/4/2023</a:t>
+              <a:t>3/23/2026</a:t>
             </a:fld>
             <a:endParaRPr lang="en-US"/>
           </a:p>
@@ -3065,7 +3067,7 @@
           <a:p>
             <a:fld id="{E8171053-07BD-4A17-AC24-0A22EAA36098}" type="datetime1">
               <a:rPr lang="en-US" smtClean="0"/>
-              <a:t>4/4/2023</a:t>
+              <a:t>3/23/2026</a:t>
             </a:fld>
             <a:endParaRPr lang="en-US"/>
           </a:p>
@@ -3552,9 +3554,17 @@
                     <a:tint val="75000"/>
                   </a:prstClr>
                 </a:solidFill>
-              </a:rPr>
-              <a:t>http://friendly.github.io/6136 </a:t>
-            </a:r>
+                <a:hlinkClick r:id="rId2"/>
+              </a:rPr>
+              <a:t>https://friendly.github.io/6136 </a:t>
+            </a:r>
+            <a:endParaRPr lang="en-US" sz="2200" dirty="0">
+              <a:solidFill>
+                <a:prstClr val="black">
+                  <a:tint val="75000"/>
+                </a:prstClr>
+              </a:solidFill>
+            </a:endParaRPr>
           </a:p>
           <a:p>
             <a:endParaRPr lang="en-US" dirty="0"/>
@@ -3576,7 +3586,7 @@
           <p:nvPr/>
         </p:nvPicPr>
         <p:blipFill>
-          <a:blip r:embed="rId2">
+          <a:blip r:embed="rId3">
             <a:extLst>
               <a:ext uri="{28A0092B-C50C-407E-A947-70E740481C1C}">
                 <a14:useLocalDpi xmlns:a14="http://schemas.microsoft.com/office/drawing/2010/main" val="0"/>
@@ -3612,7 +3622,7 @@
           <p:nvPr/>
         </p:nvPicPr>
         <p:blipFill>
-          <a:blip r:embed="rId2">
+          <a:blip r:embed="rId3">
             <a:extLst>
               <a:ext uri="{28A0092B-C50C-407E-A947-70E740481C1C}">
                 <a14:useLocalDpi xmlns:a14="http://schemas.microsoft.com/office/drawing/2010/main" val="0"/>
@@ -3648,7 +3658,7 @@
           <p:nvPr/>
         </p:nvPicPr>
         <p:blipFill>
-          <a:blip r:embed="rId3"/>
+          <a:blip r:embed="rId4"/>
           <a:stretch>
             <a:fillRect/>
           </a:stretch>
@@ -3678,7 +3688,7 @@
           <p:nvPr/>
         </p:nvPicPr>
         <p:blipFill>
-          <a:blip r:embed="rId4"/>
+          <a:blip r:embed="rId5"/>
           <a:stretch>
             <a:fillRect/>
           </a:stretch>
@@ -3708,7 +3718,7 @@
           <p:nvPr/>
         </p:nvPicPr>
         <p:blipFill>
-          <a:blip r:embed="rId5"/>
+          <a:blip r:embed="rId6"/>
           <a:stretch>
             <a:fillRect/>
           </a:stretch>
@@ -5316,7 +5326,7 @@
           <p:cNvPr id="2" name="Title 1">
             <a:extLst>
               <a:ext uri="{FF2B5EF4-FFF2-40B4-BE49-F238E27FC236}">
-                <a16:creationId xmlns:a16="http://schemas.microsoft.com/office/drawing/2014/main" id="{4A5D96DF-5FD7-F7D2-1243-49CEA25E89EA}"/>
+                <a16:creationId xmlns:a16="http://schemas.microsoft.com/office/drawing/2014/main" id="{E30A032E-3609-8B9F-E44A-7180CA4141A5}"/>
               </a:ext>
             </a:extLst>
           </p:cNvPr>
@@ -5336,7 +5346,7 @@
           <a:p>
             <a:r>
               <a:rPr lang="en-CA" dirty="0"/>
-              <a:t>Three-way+ tables: Log odds</a:t>
+              <a:t>Graph-craft: Error bars, direct labels</a:t>
             </a:r>
           </a:p>
         </p:txBody>
@@ -5346,7 +5356,7 @@
           <p:cNvPr id="3" name="Slide Number Placeholder 2">
             <a:extLst>
               <a:ext uri="{FF2B5EF4-FFF2-40B4-BE49-F238E27FC236}">
-                <a16:creationId xmlns:a16="http://schemas.microsoft.com/office/drawing/2014/main" id="{13DB6E3E-7824-AF3E-E738-2F3EF2C130F7}"/>
+                <a16:creationId xmlns:a16="http://schemas.microsoft.com/office/drawing/2014/main" id="{0E8B0F12-75F9-EFEC-A5D5-C3E018ADB4B9}"/>
               </a:ext>
             </a:extLst>
           </p:cNvPr>
@@ -5365,6 +5375,186 @@
             <a:fld id="{621225AB-15B9-4C79-A121-04D1DC7E2307}" type="slidenum">
               <a:rPr lang="en-US" smtClean="0"/>
               <a:t>15</a:t>
+            </a:fld>
+            <a:endParaRPr lang="en-US"/>
+          </a:p>
+        </p:txBody>
+      </p:sp>
+      <p:pic>
+        <p:nvPicPr>
+          <p:cNvPr id="5" name="Picture 4">
+            <a:extLst>
+              <a:ext uri="{FF2B5EF4-FFF2-40B4-BE49-F238E27FC236}">
+                <a16:creationId xmlns:a16="http://schemas.microsoft.com/office/drawing/2014/main" id="{2D65A258-318D-84F5-DCA2-2ECD3EAFCB0D}"/>
+              </a:ext>
+            </a:extLst>
+          </p:cNvPr>
+          <p:cNvPicPr>
+            <a:picLocks noChangeAspect="1"/>
+          </p:cNvPicPr>
+          <p:nvPr/>
+        </p:nvPicPr>
+        <p:blipFill>
+          <a:blip r:embed="rId2">
+            <a:extLst>
+              <a:ext uri="{28A0092B-C50C-407E-A947-70E740481C1C}">
+                <a14:useLocalDpi xmlns:a14="http://schemas.microsoft.com/office/drawing/2010/main" val="0"/>
+              </a:ext>
+            </a:extLst>
+          </a:blip>
+          <a:stretch>
+            <a:fillRect/>
+          </a:stretch>
+        </p:blipFill>
+        <p:spPr>
+          <a:xfrm>
+            <a:off x="457200" y="2276047"/>
+            <a:ext cx="4924846" cy="4124753"/>
+          </a:xfrm>
+          <a:prstGeom prst="rect">
+            <a:avLst/>
+          </a:prstGeom>
+        </p:spPr>
+      </p:pic>
+      <p:sp>
+        <p:nvSpPr>
+          <p:cNvPr id="6" name="TextBox 5">
+            <a:extLst>
+              <a:ext uri="{FF2B5EF4-FFF2-40B4-BE49-F238E27FC236}">
+                <a16:creationId xmlns:a16="http://schemas.microsoft.com/office/drawing/2014/main" id="{BC2681D4-78EE-D94E-3A2A-B311C679C24C}"/>
+              </a:ext>
+            </a:extLst>
+          </p:cNvPr>
+          <p:cNvSpPr txBox="1"/>
+          <p:nvPr/>
+        </p:nvSpPr>
+        <p:spPr>
+          <a:xfrm>
+            <a:off x="459658" y="1219200"/>
+            <a:ext cx="8227142" cy="923330"/>
+          </a:xfrm>
+          <a:prstGeom prst="rect">
+            <a:avLst/>
+          </a:prstGeom>
+          <a:noFill/>
+        </p:spPr>
+        <p:txBody>
+          <a:bodyPr wrap="square" rtlCol="0">
+            <a:spAutoFit/>
+          </a:bodyPr>
+          <a:lstStyle/>
+          <a:p>
+            <a:r>
+              <a:rPr lang="en-CA" dirty="0"/>
+              <a:t>The initial graphs I showed could be improved by:</a:t>
+            </a:r>
+          </a:p>
+          <a:p>
+            <a:pPr marL="285750" indent="-285750">
+              <a:buFont typeface="Arial" panose="020B0604020202020204" pitchFamily="34" charset="0"/>
+              <a:buChar char="•"/>
+            </a:pPr>
+            <a:r>
+              <a:rPr lang="en-CA" dirty="0"/>
+              <a:t>Adding error bars for observed log odds</a:t>
+            </a:r>
+          </a:p>
+          <a:p>
+            <a:pPr marL="285750" indent="-285750">
+              <a:buFont typeface="Arial" panose="020B0604020202020204" pitchFamily="34" charset="0"/>
+              <a:buChar char="•"/>
+            </a:pPr>
+            <a:r>
+              <a:rPr lang="en-CA" dirty="0"/>
+              <a:t>Using direct labels rather than a legend</a:t>
+            </a:r>
+          </a:p>
+        </p:txBody>
+      </p:sp>
+    </p:spTree>
+    <p:extLst>
+      <p:ext uri="{BB962C8B-B14F-4D97-AF65-F5344CB8AC3E}">
+        <p14:creationId xmlns:p14="http://schemas.microsoft.com/office/powerpoint/2010/main" val="2931048860"/>
+      </p:ext>
+    </p:extLst>
+  </p:cSld>
+  <p:clrMapOvr>
+    <a:masterClrMapping/>
+  </p:clrMapOvr>
+</p:sld>
+</file>
+
+<file path=ppt/slides/slide16.xml><?xml version="1.0" encoding="utf-8"?>
+<p:sld xmlns:a="http://schemas.openxmlformats.org/drawingml/2006/main" xmlns:r="http://schemas.openxmlformats.org/officeDocument/2006/relationships" xmlns:p="http://schemas.openxmlformats.org/presentationml/2006/main">
+  <p:cSld>
+    <p:spTree>
+      <p:nvGrpSpPr>
+        <p:cNvPr id="1" name=""/>
+        <p:cNvGrpSpPr/>
+        <p:nvPr/>
+      </p:nvGrpSpPr>
+      <p:grpSpPr>
+        <a:xfrm>
+          <a:off x="0" y="0"/>
+          <a:ext cx="0" cy="0"/>
+          <a:chOff x="0" y="0"/>
+          <a:chExt cx="0" cy="0"/>
+        </a:xfrm>
+      </p:grpSpPr>
+      <p:sp>
+        <p:nvSpPr>
+          <p:cNvPr id="2" name="Title 1">
+            <a:extLst>
+              <a:ext uri="{FF2B5EF4-FFF2-40B4-BE49-F238E27FC236}">
+                <a16:creationId xmlns:a16="http://schemas.microsoft.com/office/drawing/2014/main" id="{4A5D96DF-5FD7-F7D2-1243-49CEA25E89EA}"/>
+              </a:ext>
+            </a:extLst>
+          </p:cNvPr>
+          <p:cNvSpPr>
+            <a:spLocks noGrp="1"/>
+          </p:cNvSpPr>
+          <p:nvPr>
+            <p:ph type="title"/>
+          </p:nvPr>
+        </p:nvSpPr>
+        <p:spPr/>
+        <p:txBody>
+          <a:bodyPr>
+            <a:normAutofit fontScale="90000"/>
+          </a:bodyPr>
+          <a:lstStyle/>
+          <a:p>
+            <a:r>
+              <a:rPr lang="en-CA" dirty="0"/>
+              <a:t>Three-way+ tables: Log odds</a:t>
+            </a:r>
+          </a:p>
+        </p:txBody>
+      </p:sp>
+      <p:sp>
+        <p:nvSpPr>
+          <p:cNvPr id="3" name="Slide Number Placeholder 2">
+            <a:extLst>
+              <a:ext uri="{FF2B5EF4-FFF2-40B4-BE49-F238E27FC236}">
+                <a16:creationId xmlns:a16="http://schemas.microsoft.com/office/drawing/2014/main" id="{13DB6E3E-7824-AF3E-E738-2F3EF2C130F7}"/>
+              </a:ext>
+            </a:extLst>
+          </p:cNvPr>
+          <p:cNvSpPr>
+            <a:spLocks noGrp="1"/>
+          </p:cNvSpPr>
+          <p:nvPr>
+            <p:ph type="sldNum" sz="quarter" idx="12"/>
+          </p:nvPr>
+        </p:nvSpPr>
+        <p:spPr/>
+        <p:txBody>
+          <a:bodyPr/>
+          <a:lstStyle/>
+          <a:p>
+            <a:fld id="{621225AB-15B9-4C79-A121-04D1DC7E2307}" type="slidenum">
+              <a:rPr lang="en-US" smtClean="0"/>
+              <a:t>16</a:t>
             </a:fld>
             <a:endParaRPr lang="en-US"/>
           </a:p>
@@ -5425,7 +5615,7 @@
 </p:sld>
 </file>
 
-<file path=ppt/slides/slide16.xml><?xml version="1.0" encoding="utf-8"?>
+<file path=ppt/slides/slide17.xml><?xml version="1.0" encoding="utf-8"?>
 <p:sld xmlns:a="http://schemas.openxmlformats.org/drawingml/2006/main" xmlns:r="http://schemas.openxmlformats.org/officeDocument/2006/relationships" xmlns:p="http://schemas.openxmlformats.org/presentationml/2006/main">
   <p:cSld>
     <p:spTree>
@@ -5495,7 +5685,7 @@
           <a:p>
             <a:fld id="{621225AB-15B9-4C79-A121-04D1DC7E2307}" type="slidenum">
               <a:rPr lang="en-US" smtClean="0"/>
-              <a:t>16</a:t>
+              <a:t>17</a:t>
             </a:fld>
             <a:endParaRPr lang="en-US"/>
           </a:p>
@@ -5586,7 +5776,7 @@
 </p:sld>
 </file>
 
-<file path=ppt/slides/slide17.xml><?xml version="1.0" encoding="utf-8"?>
+<file path=ppt/slides/slide18.xml><?xml version="1.0" encoding="utf-8"?>
 <p:sld xmlns:a="http://schemas.openxmlformats.org/drawingml/2006/main" xmlns:r="http://schemas.openxmlformats.org/officeDocument/2006/relationships" xmlns:p="http://schemas.openxmlformats.org/presentationml/2006/main">
   <p:cSld>
     <p:spTree>
@@ -5656,7 +5846,7 @@
           <a:p>
             <a:fld id="{621225AB-15B9-4C79-A121-04D1DC7E2307}" type="slidenum">
               <a:rPr lang="en-US" smtClean="0"/>
-              <a:t>17</a:t>
+              <a:t>18</a:t>
             </a:fld>
             <a:endParaRPr lang="en-US"/>
           </a:p>
@@ -5796,137 +5986,6 @@
     <p:extLst>
       <p:ext uri="{BB962C8B-B14F-4D97-AF65-F5344CB8AC3E}">
         <p14:creationId xmlns:p14="http://schemas.microsoft.com/office/powerpoint/2010/main" val="973313277"/>
-      </p:ext>
-    </p:extLst>
-  </p:cSld>
-  <p:clrMapOvr>
-    <a:masterClrMapping/>
-  </p:clrMapOvr>
-  <mc:AlternateContent xmlns:mc="http://schemas.openxmlformats.org/markup-compatibility/2006" xmlns:p14="http://schemas.microsoft.com/office/powerpoint/2010/main">
-    <mc:Choice Requires="p14">
-      <p:transition spd="slow" p14:dur="2000">
-        <p14:prism isContent="1"/>
-      </p:transition>
-    </mc:Choice>
-    <mc:Fallback xmlns="">
-      <p:transition spd="slow">
-        <p:fade/>
-      </p:transition>
-    </mc:Fallback>
-  </mc:AlternateContent>
-</p:sld>
-</file>
-
-<file path=ppt/slides/slide18.xml><?xml version="1.0" encoding="utf-8"?>
-<p:sld xmlns:a="http://schemas.openxmlformats.org/drawingml/2006/main" xmlns:r="http://schemas.openxmlformats.org/officeDocument/2006/relationships" xmlns:p="http://schemas.openxmlformats.org/presentationml/2006/main">
-  <p:cSld>
-    <p:spTree>
-      <p:nvGrpSpPr>
-        <p:cNvPr id="1" name=""/>
-        <p:cNvGrpSpPr/>
-        <p:nvPr/>
-      </p:nvGrpSpPr>
-      <p:grpSpPr>
-        <a:xfrm>
-          <a:off x="0" y="0"/>
-          <a:ext cx="0" cy="0"/>
-          <a:chOff x="0" y="0"/>
-          <a:chExt cx="0" cy="0"/>
-        </a:xfrm>
-      </p:grpSpPr>
-      <p:sp>
-        <p:nvSpPr>
-          <p:cNvPr id="2" name="Title 1">
-            <a:extLst>
-              <a:ext uri="{FF2B5EF4-FFF2-40B4-BE49-F238E27FC236}">
-                <a16:creationId xmlns:a16="http://schemas.microsoft.com/office/drawing/2014/main" id="{A83AF3C4-C1C4-E26C-033C-B51BA2A6D832}"/>
-              </a:ext>
-            </a:extLst>
-          </p:cNvPr>
-          <p:cNvSpPr>
-            <a:spLocks noGrp="1"/>
-          </p:cNvSpPr>
-          <p:nvPr>
-            <p:ph type="title"/>
-          </p:nvPr>
-        </p:nvSpPr>
-        <p:spPr/>
-        <p:txBody>
-          <a:bodyPr>
-            <a:normAutofit fontScale="90000"/>
-          </a:bodyPr>
-          <a:lstStyle/>
-          <a:p>
-            <a:r>
-              <a:rPr lang="en-CA" dirty="0"/>
-              <a:t>Mice data: mosaic plot</a:t>
-            </a:r>
-          </a:p>
-        </p:txBody>
-      </p:sp>
-      <p:sp>
-        <p:nvSpPr>
-          <p:cNvPr id="3" name="Slide Number Placeholder 2">
-            <a:extLst>
-              <a:ext uri="{FF2B5EF4-FFF2-40B4-BE49-F238E27FC236}">
-                <a16:creationId xmlns:a16="http://schemas.microsoft.com/office/drawing/2014/main" id="{449360EC-2122-9147-3435-DED8741D33EB}"/>
-              </a:ext>
-            </a:extLst>
-          </p:cNvPr>
-          <p:cNvSpPr>
-            <a:spLocks noGrp="1"/>
-          </p:cNvSpPr>
-          <p:nvPr>
-            <p:ph type="sldNum" sz="quarter" idx="12"/>
-          </p:nvPr>
-        </p:nvSpPr>
-        <p:spPr/>
-        <p:txBody>
-          <a:bodyPr/>
-          <a:lstStyle/>
-          <a:p>
-            <a:fld id="{621225AB-15B9-4C79-A121-04D1DC7E2307}" type="slidenum">
-              <a:rPr lang="en-US" smtClean="0"/>
-              <a:t>18</a:t>
-            </a:fld>
-            <a:endParaRPr lang="en-US"/>
-          </a:p>
-        </p:txBody>
-      </p:sp>
-      <p:pic>
-        <p:nvPicPr>
-          <p:cNvPr id="5" name="Picture 4">
-            <a:extLst>
-              <a:ext uri="{FF2B5EF4-FFF2-40B4-BE49-F238E27FC236}">
-                <a16:creationId xmlns:a16="http://schemas.microsoft.com/office/drawing/2014/main" id="{AFBE0F80-CB88-CCA5-11AA-067230547AA1}"/>
-              </a:ext>
-            </a:extLst>
-          </p:cNvPr>
-          <p:cNvPicPr>
-            <a:picLocks noChangeAspect="1"/>
-          </p:cNvPicPr>
-          <p:nvPr/>
-        </p:nvPicPr>
-        <p:blipFill>
-          <a:blip r:embed="rId2"/>
-          <a:stretch>
-            <a:fillRect/>
-          </a:stretch>
-        </p:blipFill>
-        <p:spPr>
-          <a:xfrm>
-            <a:off x="486286" y="1362676"/>
-            <a:ext cx="8171428" cy="4809524"/>
-          </a:xfrm>
-          <a:prstGeom prst="rect">
-            <a:avLst/>
-          </a:prstGeom>
-        </p:spPr>
-      </p:pic>
-    </p:spTree>
-    <p:extLst>
-      <p:ext uri="{BB962C8B-B14F-4D97-AF65-F5344CB8AC3E}">
-        <p14:creationId xmlns:p14="http://schemas.microsoft.com/office/powerpoint/2010/main" val="2308835792"/>
       </p:ext>
     </p:extLst>
   </p:cSld>
@@ -5970,7 +6029,7 @@
           <p:cNvPr id="2" name="Title 1">
             <a:extLst>
               <a:ext uri="{FF2B5EF4-FFF2-40B4-BE49-F238E27FC236}">
-                <a16:creationId xmlns:a16="http://schemas.microsoft.com/office/drawing/2014/main" id="{EA522720-9825-560A-4D86-3FD158DE0AE9}"/>
+                <a16:creationId xmlns:a16="http://schemas.microsoft.com/office/drawing/2014/main" id="{A83AF3C4-C1C4-E26C-033C-B51BA2A6D832}"/>
               </a:ext>
             </a:extLst>
           </p:cNvPr>
@@ -5990,7 +6049,7 @@
           <a:p>
             <a:r>
               <a:rPr lang="en-CA" dirty="0"/>
-              <a:t>Mice data: MCA</a:t>
+              <a:t>Mice data: mosaic plot</a:t>
             </a:r>
           </a:p>
         </p:txBody>
@@ -6000,7 +6059,7 @@
           <p:cNvPr id="3" name="Slide Number Placeholder 2">
             <a:extLst>
               <a:ext uri="{FF2B5EF4-FFF2-40B4-BE49-F238E27FC236}">
-                <a16:creationId xmlns:a16="http://schemas.microsoft.com/office/drawing/2014/main" id="{D5955FB6-F942-1C88-396C-BB4163C0A0A4}"/>
+                <a16:creationId xmlns:a16="http://schemas.microsoft.com/office/drawing/2014/main" id="{449360EC-2122-9147-3435-DED8741D33EB}"/>
               </a:ext>
             </a:extLst>
           </p:cNvPr>
@@ -6029,7 +6088,7 @@
           <p:cNvPr id="5" name="Picture 4">
             <a:extLst>
               <a:ext uri="{FF2B5EF4-FFF2-40B4-BE49-F238E27FC236}">
-                <a16:creationId xmlns:a16="http://schemas.microsoft.com/office/drawing/2014/main" id="{CC5F84FE-F04C-6BC1-4223-31B0E60AAECA}"/>
+                <a16:creationId xmlns:a16="http://schemas.microsoft.com/office/drawing/2014/main" id="{AFBE0F80-CB88-CCA5-11AA-067230547AA1}"/>
               </a:ext>
             </a:extLst>
           </p:cNvPr>
@@ -6046,8 +6105,8 @@
         </p:blipFill>
         <p:spPr>
           <a:xfrm>
-            <a:off x="486286" y="1324524"/>
-            <a:ext cx="8171428" cy="4390476"/>
+            <a:off x="486286" y="1362676"/>
+            <a:ext cx="8171428" cy="4809524"/>
           </a:xfrm>
           <a:prstGeom prst="rect">
             <a:avLst/>
@@ -6057,7 +6116,7 @@
     </p:spTree>
     <p:extLst>
       <p:ext uri="{BB962C8B-B14F-4D97-AF65-F5344CB8AC3E}">
-        <p14:creationId xmlns:p14="http://schemas.microsoft.com/office/powerpoint/2010/main" val="3523908340"/>
+        <p14:creationId xmlns:p14="http://schemas.microsoft.com/office/powerpoint/2010/main" val="2308835792"/>
       </p:ext>
     </p:extLst>
   </p:cSld>
@@ -6442,7 +6501,7 @@
           <p:cNvPr id="2" name="Title 1">
             <a:extLst>
               <a:ext uri="{FF2B5EF4-FFF2-40B4-BE49-F238E27FC236}">
-                <a16:creationId xmlns:a16="http://schemas.microsoft.com/office/drawing/2014/main" id="{9265C679-6719-B98A-60FE-EB00185EDF13}"/>
+                <a16:creationId xmlns:a16="http://schemas.microsoft.com/office/drawing/2014/main" id="{EA522720-9825-560A-4D86-3FD158DE0AE9}"/>
               </a:ext>
             </a:extLst>
           </p:cNvPr>
@@ -6462,7 +6521,7 @@
           <a:p>
             <a:r>
               <a:rPr lang="en-CA" dirty="0"/>
-              <a:t>Calculating log odds</a:t>
+              <a:t>Mice data: MCA</a:t>
             </a:r>
           </a:p>
         </p:txBody>
@@ -6472,7 +6531,7 @@
           <p:cNvPr id="3" name="Slide Number Placeholder 2">
             <a:extLst>
               <a:ext uri="{FF2B5EF4-FFF2-40B4-BE49-F238E27FC236}">
-                <a16:creationId xmlns:a16="http://schemas.microsoft.com/office/drawing/2014/main" id="{95066BB1-8C4B-FFFC-EEB3-A53B1748C62C}"/>
+                <a16:creationId xmlns:a16="http://schemas.microsoft.com/office/drawing/2014/main" id="{D5955FB6-F942-1C88-396C-BB4163C0A0A4}"/>
               </a:ext>
             </a:extLst>
           </p:cNvPr>
@@ -6491,6 +6550,137 @@
             <a:fld id="{621225AB-15B9-4C79-A121-04D1DC7E2307}" type="slidenum">
               <a:rPr lang="en-US" smtClean="0"/>
               <a:t>20</a:t>
+            </a:fld>
+            <a:endParaRPr lang="en-US"/>
+          </a:p>
+        </p:txBody>
+      </p:sp>
+      <p:pic>
+        <p:nvPicPr>
+          <p:cNvPr id="5" name="Picture 4">
+            <a:extLst>
+              <a:ext uri="{FF2B5EF4-FFF2-40B4-BE49-F238E27FC236}">
+                <a16:creationId xmlns:a16="http://schemas.microsoft.com/office/drawing/2014/main" id="{CC5F84FE-F04C-6BC1-4223-31B0E60AAECA}"/>
+              </a:ext>
+            </a:extLst>
+          </p:cNvPr>
+          <p:cNvPicPr>
+            <a:picLocks noChangeAspect="1"/>
+          </p:cNvPicPr>
+          <p:nvPr/>
+        </p:nvPicPr>
+        <p:blipFill>
+          <a:blip r:embed="rId2"/>
+          <a:stretch>
+            <a:fillRect/>
+          </a:stretch>
+        </p:blipFill>
+        <p:spPr>
+          <a:xfrm>
+            <a:off x="486286" y="1324524"/>
+            <a:ext cx="8171428" cy="4390476"/>
+          </a:xfrm>
+          <a:prstGeom prst="rect">
+            <a:avLst/>
+          </a:prstGeom>
+        </p:spPr>
+      </p:pic>
+    </p:spTree>
+    <p:extLst>
+      <p:ext uri="{BB962C8B-B14F-4D97-AF65-F5344CB8AC3E}">
+        <p14:creationId xmlns:p14="http://schemas.microsoft.com/office/powerpoint/2010/main" val="3523908340"/>
+      </p:ext>
+    </p:extLst>
+  </p:cSld>
+  <p:clrMapOvr>
+    <a:masterClrMapping/>
+  </p:clrMapOvr>
+  <mc:AlternateContent xmlns:mc="http://schemas.openxmlformats.org/markup-compatibility/2006" xmlns:p14="http://schemas.microsoft.com/office/powerpoint/2010/main">
+    <mc:Choice Requires="p14">
+      <p:transition spd="slow" p14:dur="2000">
+        <p14:prism isContent="1"/>
+      </p:transition>
+    </mc:Choice>
+    <mc:Fallback xmlns="">
+      <p:transition spd="slow">
+        <p:fade/>
+      </p:transition>
+    </mc:Fallback>
+  </mc:AlternateContent>
+</p:sld>
+</file>
+
+<file path=ppt/slides/slide21.xml><?xml version="1.0" encoding="utf-8"?>
+<p:sld xmlns:a="http://schemas.openxmlformats.org/drawingml/2006/main" xmlns:r="http://schemas.openxmlformats.org/officeDocument/2006/relationships" xmlns:p="http://schemas.openxmlformats.org/presentationml/2006/main">
+  <p:cSld>
+    <p:spTree>
+      <p:nvGrpSpPr>
+        <p:cNvPr id="1" name=""/>
+        <p:cNvGrpSpPr/>
+        <p:nvPr/>
+      </p:nvGrpSpPr>
+      <p:grpSpPr>
+        <a:xfrm>
+          <a:off x="0" y="0"/>
+          <a:ext cx="0" cy="0"/>
+          <a:chOff x="0" y="0"/>
+          <a:chExt cx="0" cy="0"/>
+        </a:xfrm>
+      </p:grpSpPr>
+      <p:sp>
+        <p:nvSpPr>
+          <p:cNvPr id="2" name="Title 1">
+            <a:extLst>
+              <a:ext uri="{FF2B5EF4-FFF2-40B4-BE49-F238E27FC236}">
+                <a16:creationId xmlns:a16="http://schemas.microsoft.com/office/drawing/2014/main" id="{9265C679-6719-B98A-60FE-EB00185EDF13}"/>
+              </a:ext>
+            </a:extLst>
+          </p:cNvPr>
+          <p:cNvSpPr>
+            <a:spLocks noGrp="1"/>
+          </p:cNvSpPr>
+          <p:nvPr>
+            <p:ph type="title"/>
+          </p:nvPr>
+        </p:nvSpPr>
+        <p:spPr/>
+        <p:txBody>
+          <a:bodyPr>
+            <a:normAutofit fontScale="90000"/>
+          </a:bodyPr>
+          <a:lstStyle/>
+          <a:p>
+            <a:r>
+              <a:rPr lang="en-CA" dirty="0"/>
+              <a:t>Calculating log odds</a:t>
+            </a:r>
+          </a:p>
+        </p:txBody>
+      </p:sp>
+      <p:sp>
+        <p:nvSpPr>
+          <p:cNvPr id="3" name="Slide Number Placeholder 2">
+            <a:extLst>
+              <a:ext uri="{FF2B5EF4-FFF2-40B4-BE49-F238E27FC236}">
+                <a16:creationId xmlns:a16="http://schemas.microsoft.com/office/drawing/2014/main" id="{95066BB1-8C4B-FFFC-EEB3-A53B1748C62C}"/>
+              </a:ext>
+            </a:extLst>
+          </p:cNvPr>
+          <p:cNvSpPr>
+            <a:spLocks noGrp="1"/>
+          </p:cNvSpPr>
+          <p:nvPr>
+            <p:ph type="sldNum" sz="quarter" idx="12"/>
+          </p:nvPr>
+        </p:nvSpPr>
+        <p:spPr/>
+        <p:txBody>
+          <a:bodyPr/>
+          <a:lstStyle/>
+          <a:p>
+            <a:fld id="{621225AB-15B9-4C79-A121-04D1DC7E2307}" type="slidenum">
+              <a:rPr lang="en-US" smtClean="0"/>
+              <a:t>21</a:t>
             </a:fld>
             <a:endParaRPr lang="en-US"/>
           </a:p>
@@ -7134,7 +7324,7 @@
 </p:sld>
 </file>
 
-<file path=ppt/slides/slide21.xml><?xml version="1.0" encoding="utf-8"?>
+<file path=ppt/slides/slide22.xml><?xml version="1.0" encoding="utf-8"?>
 <p:sld xmlns:a="http://schemas.openxmlformats.org/drawingml/2006/main" xmlns:r="http://schemas.openxmlformats.org/officeDocument/2006/relationships" xmlns:p="http://schemas.openxmlformats.org/presentationml/2006/main">
   <p:cSld>
     <p:spTree>
@@ -7204,7 +7394,7 @@
           <a:p>
             <a:fld id="{621225AB-15B9-4C79-A121-04D1DC7E2307}" type="slidenum">
               <a:rPr lang="en-US" smtClean="0"/>
-              <a:t>21</a:t>
+              <a:t>22</a:t>
             </a:fld>
             <a:endParaRPr lang="en-US"/>
           </a:p>
@@ -7814,7 +8004,7 @@
 </p:sld>
 </file>
 
-<file path=ppt/slides/slide22.xml><?xml version="1.0" encoding="utf-8"?>
+<file path=ppt/slides/slide23.xml><?xml version="1.0" encoding="utf-8"?>
 <p:sld xmlns:a="http://schemas.openxmlformats.org/drawingml/2006/main" xmlns:r="http://schemas.openxmlformats.org/officeDocument/2006/relationships" xmlns:p="http://schemas.openxmlformats.org/presentationml/2006/main">
   <p:cSld>
     <p:spTree>
@@ -7884,7 +8074,7 @@
           <a:p>
             <a:fld id="{621225AB-15B9-4C79-A121-04D1DC7E2307}" type="slidenum">
               <a:rPr lang="en-US" smtClean="0"/>
-              <a:t>22</a:t>
+              <a:t>23</a:t>
             </a:fld>
             <a:endParaRPr lang="en-US"/>
           </a:p>
@@ -7945,7 +8135,7 @@
 </p:sld>
 </file>
 
-<file path=ppt/slides/slide23.xml><?xml version="1.0" encoding="utf-8"?>
+<file path=ppt/slides/slide24.xml><?xml version="1.0" encoding="utf-8"?>
 <p:sld xmlns:a="http://schemas.openxmlformats.org/drawingml/2006/main" xmlns:r="http://schemas.openxmlformats.org/officeDocument/2006/relationships" xmlns:p="http://schemas.openxmlformats.org/presentationml/2006/main">
   <p:cSld>
     <p:spTree>
@@ -8015,7 +8205,7 @@
           <a:p>
             <a:fld id="{621225AB-15B9-4C79-A121-04D1DC7E2307}" type="slidenum">
               <a:rPr lang="en-US" smtClean="0"/>
-              <a:t>23</a:t>
+              <a:t>24</a:t>
             </a:fld>
             <a:endParaRPr lang="en-US"/>
           </a:p>
@@ -8415,7 +8605,7 @@
 </p:sld>
 </file>
 
-<file path=ppt/slides/slide24.xml><?xml version="1.0" encoding="utf-8"?>
+<file path=ppt/slides/slide25.xml><?xml version="1.0" encoding="utf-8"?>
 <p:sld xmlns:a="http://schemas.openxmlformats.org/drawingml/2006/main" xmlns:r="http://schemas.openxmlformats.org/officeDocument/2006/relationships" xmlns:p="http://schemas.openxmlformats.org/presentationml/2006/main">
   <p:cSld>
     <p:spTree>
@@ -8485,7 +8675,7 @@
           <a:p>
             <a:fld id="{621225AB-15B9-4C79-A121-04D1DC7E2307}" type="slidenum">
               <a:rPr lang="en-US" smtClean="0"/>
-              <a:t>24</a:t>
+              <a:t>25</a:t>
             </a:fld>
             <a:endParaRPr lang="en-US"/>
           </a:p>
@@ -8546,7 +8736,7 @@
 </p:sld>
 </file>
 
-<file path=ppt/slides/slide25.xml><?xml version="1.0" encoding="utf-8"?>
+<file path=ppt/slides/slide26.xml><?xml version="1.0" encoding="utf-8"?>
 <p:sld xmlns:a="http://schemas.openxmlformats.org/drawingml/2006/main" xmlns:r="http://schemas.openxmlformats.org/officeDocument/2006/relationships" xmlns:p="http://schemas.openxmlformats.org/presentationml/2006/main">
   <p:cSld>
     <p:spTree>
@@ -8616,7 +8806,7 @@
           <a:p>
             <a:fld id="{621225AB-15B9-4C79-A121-04D1DC7E2307}" type="slidenum">
               <a:rPr lang="en-US" smtClean="0"/>
-              <a:t>25</a:t>
+              <a:t>26</a:t>
             </a:fld>
             <a:endParaRPr lang="en-US"/>
           </a:p>
@@ -8677,7 +8867,7 @@
 </p:sld>
 </file>
 
-<file path=ppt/slides/slide26.xml><?xml version="1.0" encoding="utf-8"?>
+<file path=ppt/slides/slide27.xml><?xml version="1.0" encoding="utf-8"?>
 <p:sld xmlns:a="http://schemas.openxmlformats.org/drawingml/2006/main" xmlns:r="http://schemas.openxmlformats.org/officeDocument/2006/relationships" xmlns:p="http://schemas.openxmlformats.org/presentationml/2006/main">
   <p:cSld>
     <p:spTree>
@@ -8717,7 +8907,7 @@
           <a:p>
             <a:fld id="{621225AB-15B9-4C79-A121-04D1DC7E2307}" type="slidenum">
               <a:rPr lang="en-US" smtClean="0"/>
-              <a:t>26</a:t>
+              <a:t>27</a:t>
             </a:fld>
             <a:endParaRPr lang="en-US"/>
           </a:p>
@@ -9483,7 +9673,7 @@
 </p:sld>
 </file>
 
-<file path=ppt/slides/slide27.xml><?xml version="1.0" encoding="utf-8"?>
+<file path=ppt/slides/slide28.xml><?xml version="1.0" encoding="utf-8"?>
 <p:sld xmlns:a="http://schemas.openxmlformats.org/drawingml/2006/main" xmlns:r="http://schemas.openxmlformats.org/officeDocument/2006/relationships" xmlns:p="http://schemas.openxmlformats.org/presentationml/2006/main">
   <p:cSld>
     <p:spTree>
@@ -9553,7 +9743,7 @@
           <a:p>
             <a:fld id="{621225AB-15B9-4C79-A121-04D1DC7E2307}" type="slidenum">
               <a:rPr lang="en-US" smtClean="0"/>
-              <a:t>27</a:t>
+              <a:t>28</a:t>
             </a:fld>
             <a:endParaRPr lang="en-US"/>
           </a:p>
@@ -9614,7 +9804,7 @@
 </p:sld>
 </file>
 
-<file path=ppt/slides/slide28.xml><?xml version="1.0" encoding="utf-8"?>
+<file path=ppt/slides/slide29.xml><?xml version="1.0" encoding="utf-8"?>
 <p:sld xmlns:a="http://schemas.openxmlformats.org/drawingml/2006/main" xmlns:r="http://schemas.openxmlformats.org/officeDocument/2006/relationships" xmlns:p="http://schemas.openxmlformats.org/presentationml/2006/main">
   <p:cSld>
     <p:spTree>
@@ -9684,7 +9874,7 @@
           <a:p>
             <a:fld id="{621225AB-15B9-4C79-A121-04D1DC7E2307}" type="slidenum">
               <a:rPr lang="en-US" smtClean="0"/>
-              <a:t>28</a:t>
+              <a:t>29</a:t>
             </a:fld>
             <a:endParaRPr lang="en-US"/>
           </a:p>
@@ -9804,173 +9994,6 @@
     <p:extLst>
       <p:ext uri="{BB962C8B-B14F-4D97-AF65-F5344CB8AC3E}">
         <p14:creationId xmlns:p14="http://schemas.microsoft.com/office/powerpoint/2010/main" val="4080335016"/>
-      </p:ext>
-    </p:extLst>
-  </p:cSld>
-  <p:clrMapOvr>
-    <a:masterClrMapping/>
-  </p:clrMapOvr>
-  <mc:AlternateContent xmlns:mc="http://schemas.openxmlformats.org/markup-compatibility/2006" xmlns:p14="http://schemas.microsoft.com/office/powerpoint/2010/main">
-    <mc:Choice Requires="p14">
-      <p:transition spd="slow" p14:dur="2000">
-        <p14:prism isContent="1"/>
-      </p:transition>
-    </mc:Choice>
-    <mc:Fallback xmlns="">
-      <p:transition spd="slow">
-        <p:fade/>
-      </p:transition>
-    </mc:Fallback>
-  </mc:AlternateContent>
-</p:sld>
-</file>
-
-<file path=ppt/slides/slide29.xml><?xml version="1.0" encoding="utf-8"?>
-<p:sld xmlns:a="http://schemas.openxmlformats.org/drawingml/2006/main" xmlns:r="http://schemas.openxmlformats.org/officeDocument/2006/relationships" xmlns:p="http://schemas.openxmlformats.org/presentationml/2006/main">
-  <p:cSld>
-    <p:spTree>
-      <p:nvGrpSpPr>
-        <p:cNvPr id="1" name=""/>
-        <p:cNvGrpSpPr/>
-        <p:nvPr/>
-      </p:nvGrpSpPr>
-      <p:grpSpPr>
-        <a:xfrm>
-          <a:off x="0" y="0"/>
-          <a:ext cx="0" cy="0"/>
-          <a:chOff x="0" y="0"/>
-          <a:chExt cx="0" cy="0"/>
-        </a:xfrm>
-      </p:grpSpPr>
-      <p:sp>
-        <p:nvSpPr>
-          <p:cNvPr id="2" name="Title 1">
-            <a:extLst>
-              <a:ext uri="{FF2B5EF4-FFF2-40B4-BE49-F238E27FC236}">
-                <a16:creationId xmlns:a16="http://schemas.microsoft.com/office/drawing/2014/main" id="{DFBB4D6A-899A-94F5-409B-7221D02C43D9}"/>
-              </a:ext>
-            </a:extLst>
-          </p:cNvPr>
-          <p:cNvSpPr>
-            <a:spLocks noGrp="1"/>
-          </p:cNvSpPr>
-          <p:nvPr>
-            <p:ph type="title"/>
-          </p:nvPr>
-        </p:nvSpPr>
-        <p:spPr/>
-        <p:txBody>
-          <a:bodyPr>
-            <a:normAutofit/>
-          </a:bodyPr>
-          <a:lstStyle/>
-          <a:p>
-            <a:r>
-              <a:rPr lang="en-CA" sz="3600" dirty="0"/>
-              <a:t>Visualize log odds &amp; models: Data + Model</a:t>
-            </a:r>
-          </a:p>
-        </p:txBody>
-      </p:sp>
-      <p:sp>
-        <p:nvSpPr>
-          <p:cNvPr id="3" name="Slide Number Placeholder 2">
-            <a:extLst>
-              <a:ext uri="{FF2B5EF4-FFF2-40B4-BE49-F238E27FC236}">
-                <a16:creationId xmlns:a16="http://schemas.microsoft.com/office/drawing/2014/main" id="{1D68BA2F-15DC-D82F-3726-91A64A599539}"/>
-              </a:ext>
-            </a:extLst>
-          </p:cNvPr>
-          <p:cNvSpPr>
-            <a:spLocks noGrp="1"/>
-          </p:cNvSpPr>
-          <p:nvPr>
-            <p:ph type="sldNum" sz="quarter" idx="12"/>
-          </p:nvPr>
-        </p:nvSpPr>
-        <p:spPr/>
-        <p:txBody>
-          <a:bodyPr/>
-          <a:lstStyle/>
-          <a:p>
-            <a:fld id="{621225AB-15B9-4C79-A121-04D1DC7E2307}" type="slidenum">
-              <a:rPr lang="en-US" smtClean="0"/>
-              <a:t>29</a:t>
-            </a:fld>
-            <a:endParaRPr lang="en-US"/>
-          </a:p>
-        </p:txBody>
-      </p:sp>
-      <p:pic>
-        <p:nvPicPr>
-          <p:cNvPr id="6" name="Picture 5">
-            <a:extLst>
-              <a:ext uri="{FF2B5EF4-FFF2-40B4-BE49-F238E27FC236}">
-                <a16:creationId xmlns:a16="http://schemas.microsoft.com/office/drawing/2014/main" id="{C3868D82-115B-6271-2FA6-3DA37D1C741F}"/>
-              </a:ext>
-            </a:extLst>
-          </p:cNvPr>
-          <p:cNvPicPr>
-            <a:picLocks noChangeAspect="1"/>
-          </p:cNvPicPr>
-          <p:nvPr/>
-        </p:nvPicPr>
-        <p:blipFill>
-          <a:blip r:embed="rId2"/>
-          <a:stretch>
-            <a:fillRect/>
-          </a:stretch>
-        </p:blipFill>
-        <p:spPr>
-          <a:xfrm>
-            <a:off x="457200" y="1371600"/>
-            <a:ext cx="8171428" cy="5076190"/>
-          </a:xfrm>
-          <a:prstGeom prst="rect">
-            <a:avLst/>
-          </a:prstGeom>
-        </p:spPr>
-      </p:pic>
-      <p:sp>
-        <p:nvSpPr>
-          <p:cNvPr id="4" name="TextBox 3">
-            <a:extLst>
-              <a:ext uri="{FF2B5EF4-FFF2-40B4-BE49-F238E27FC236}">
-                <a16:creationId xmlns:a16="http://schemas.microsoft.com/office/drawing/2014/main" id="{1A9902BF-CA42-C7E8-930C-07D2676F18AD}"/>
-              </a:ext>
-            </a:extLst>
-          </p:cNvPr>
-          <p:cNvSpPr txBox="1"/>
-          <p:nvPr/>
-        </p:nvSpPr>
-        <p:spPr>
-          <a:xfrm>
-            <a:off x="2438400" y="1600200"/>
-            <a:ext cx="381000" cy="461665"/>
-          </a:xfrm>
-          <a:prstGeom prst="rect">
-            <a:avLst/>
-          </a:prstGeom>
-          <a:noFill/>
-        </p:spPr>
-        <p:txBody>
-          <a:bodyPr wrap="square" rtlCol="0">
-            <a:spAutoFit/>
-          </a:bodyPr>
-          <a:lstStyle/>
-          <a:p>
-            <a:pPr algn="ctr"/>
-            <a:r>
-              <a:rPr lang="en-CA" sz="2400" dirty="0"/>
-              <a:t>~</a:t>
-            </a:r>
-          </a:p>
-        </p:txBody>
-      </p:sp>
-    </p:spTree>
-    <p:extLst>
-      <p:ext uri="{BB962C8B-B14F-4D97-AF65-F5344CB8AC3E}">
-        <p14:creationId xmlns:p14="http://schemas.microsoft.com/office/powerpoint/2010/main" val="1637496947"/>
       </p:ext>
     </p:extLst>
   </p:cSld>
@@ -10466,7 +10489,7 @@
           <p:cNvPr id="2" name="Title 1">
             <a:extLst>
               <a:ext uri="{FF2B5EF4-FFF2-40B4-BE49-F238E27FC236}">
-                <a16:creationId xmlns:a16="http://schemas.microsoft.com/office/drawing/2014/main" id="{88E823BF-2630-8AE8-C195-B5B9CE7CC25B}"/>
+                <a16:creationId xmlns:a16="http://schemas.microsoft.com/office/drawing/2014/main" id="{DFBB4D6A-899A-94F5-409B-7221D02C43D9}"/>
               </a:ext>
             </a:extLst>
           </p:cNvPr>
@@ -10480,13 +10503,13 @@
         <p:spPr/>
         <p:txBody>
           <a:bodyPr>
-            <a:normAutofit fontScale="90000"/>
+            <a:normAutofit/>
           </a:bodyPr>
           <a:lstStyle/>
           <a:p>
             <a:r>
-              <a:rPr lang="en-CA" dirty="0"/>
-              <a:t>Generalized log odds ratios</a:t>
+              <a:rPr lang="en-CA" sz="3600" dirty="0"/>
+              <a:t>Visualize log odds &amp; models: Data + Model</a:t>
             </a:r>
           </a:p>
         </p:txBody>
@@ -10496,7 +10519,7 @@
           <p:cNvPr id="3" name="Slide Number Placeholder 2">
             <a:extLst>
               <a:ext uri="{FF2B5EF4-FFF2-40B4-BE49-F238E27FC236}">
-                <a16:creationId xmlns:a16="http://schemas.microsoft.com/office/drawing/2014/main" id="{001C6545-182D-BA3B-7BE7-F6D9D4242CE4}"/>
+                <a16:creationId xmlns:a16="http://schemas.microsoft.com/office/drawing/2014/main" id="{1D68BA2F-15DC-D82F-3726-91A64A599539}"/>
               </a:ext>
             </a:extLst>
           </p:cNvPr>
@@ -10515,6 +10538,173 @@
             <a:fld id="{621225AB-15B9-4C79-A121-04D1DC7E2307}" type="slidenum">
               <a:rPr lang="en-US" smtClean="0"/>
               <a:t>30</a:t>
+            </a:fld>
+            <a:endParaRPr lang="en-US"/>
+          </a:p>
+        </p:txBody>
+      </p:sp>
+      <p:pic>
+        <p:nvPicPr>
+          <p:cNvPr id="6" name="Picture 5">
+            <a:extLst>
+              <a:ext uri="{FF2B5EF4-FFF2-40B4-BE49-F238E27FC236}">
+                <a16:creationId xmlns:a16="http://schemas.microsoft.com/office/drawing/2014/main" id="{C3868D82-115B-6271-2FA6-3DA37D1C741F}"/>
+              </a:ext>
+            </a:extLst>
+          </p:cNvPr>
+          <p:cNvPicPr>
+            <a:picLocks noChangeAspect="1"/>
+          </p:cNvPicPr>
+          <p:nvPr/>
+        </p:nvPicPr>
+        <p:blipFill>
+          <a:blip r:embed="rId2"/>
+          <a:stretch>
+            <a:fillRect/>
+          </a:stretch>
+        </p:blipFill>
+        <p:spPr>
+          <a:xfrm>
+            <a:off x="457200" y="1371600"/>
+            <a:ext cx="8171428" cy="5076190"/>
+          </a:xfrm>
+          <a:prstGeom prst="rect">
+            <a:avLst/>
+          </a:prstGeom>
+        </p:spPr>
+      </p:pic>
+      <p:sp>
+        <p:nvSpPr>
+          <p:cNvPr id="4" name="TextBox 3">
+            <a:extLst>
+              <a:ext uri="{FF2B5EF4-FFF2-40B4-BE49-F238E27FC236}">
+                <a16:creationId xmlns:a16="http://schemas.microsoft.com/office/drawing/2014/main" id="{1A9902BF-CA42-C7E8-930C-07D2676F18AD}"/>
+              </a:ext>
+            </a:extLst>
+          </p:cNvPr>
+          <p:cNvSpPr txBox="1"/>
+          <p:nvPr/>
+        </p:nvSpPr>
+        <p:spPr>
+          <a:xfrm>
+            <a:off x="2438400" y="1600200"/>
+            <a:ext cx="381000" cy="461665"/>
+          </a:xfrm>
+          <a:prstGeom prst="rect">
+            <a:avLst/>
+          </a:prstGeom>
+          <a:noFill/>
+        </p:spPr>
+        <p:txBody>
+          <a:bodyPr wrap="square" rtlCol="0">
+            <a:spAutoFit/>
+          </a:bodyPr>
+          <a:lstStyle/>
+          <a:p>
+            <a:pPr algn="ctr"/>
+            <a:r>
+              <a:rPr lang="en-CA" sz="2400" dirty="0"/>
+              <a:t>~</a:t>
+            </a:r>
+          </a:p>
+        </p:txBody>
+      </p:sp>
+    </p:spTree>
+    <p:extLst>
+      <p:ext uri="{BB962C8B-B14F-4D97-AF65-F5344CB8AC3E}">
+        <p14:creationId xmlns:p14="http://schemas.microsoft.com/office/powerpoint/2010/main" val="1637496947"/>
+      </p:ext>
+    </p:extLst>
+  </p:cSld>
+  <p:clrMapOvr>
+    <a:masterClrMapping/>
+  </p:clrMapOvr>
+  <mc:AlternateContent xmlns:mc="http://schemas.openxmlformats.org/markup-compatibility/2006" xmlns:p14="http://schemas.microsoft.com/office/powerpoint/2010/main">
+    <mc:Choice Requires="p14">
+      <p:transition spd="slow" p14:dur="2000">
+        <p14:prism isContent="1"/>
+      </p:transition>
+    </mc:Choice>
+    <mc:Fallback xmlns="">
+      <p:transition spd="slow">
+        <p:fade/>
+      </p:transition>
+    </mc:Fallback>
+  </mc:AlternateContent>
+</p:sld>
+</file>
+
+<file path=ppt/slides/slide31.xml><?xml version="1.0" encoding="utf-8"?>
+<p:sld xmlns:a="http://schemas.openxmlformats.org/drawingml/2006/main" xmlns:r="http://schemas.openxmlformats.org/officeDocument/2006/relationships" xmlns:p="http://schemas.openxmlformats.org/presentationml/2006/main">
+  <p:cSld>
+    <p:spTree>
+      <p:nvGrpSpPr>
+        <p:cNvPr id="1" name=""/>
+        <p:cNvGrpSpPr/>
+        <p:nvPr/>
+      </p:nvGrpSpPr>
+      <p:grpSpPr>
+        <a:xfrm>
+          <a:off x="0" y="0"/>
+          <a:ext cx="0" cy="0"/>
+          <a:chOff x="0" y="0"/>
+          <a:chExt cx="0" cy="0"/>
+        </a:xfrm>
+      </p:grpSpPr>
+      <p:sp>
+        <p:nvSpPr>
+          <p:cNvPr id="2" name="Title 1">
+            <a:extLst>
+              <a:ext uri="{FF2B5EF4-FFF2-40B4-BE49-F238E27FC236}">
+                <a16:creationId xmlns:a16="http://schemas.microsoft.com/office/drawing/2014/main" id="{88E823BF-2630-8AE8-C195-B5B9CE7CC25B}"/>
+              </a:ext>
+            </a:extLst>
+          </p:cNvPr>
+          <p:cNvSpPr>
+            <a:spLocks noGrp="1"/>
+          </p:cNvSpPr>
+          <p:nvPr>
+            <p:ph type="title"/>
+          </p:nvPr>
+        </p:nvSpPr>
+        <p:spPr/>
+        <p:txBody>
+          <a:bodyPr>
+            <a:normAutofit fontScale="90000"/>
+          </a:bodyPr>
+          <a:lstStyle/>
+          <a:p>
+            <a:r>
+              <a:rPr lang="en-CA" dirty="0"/>
+              <a:t>Generalized log odds ratios</a:t>
+            </a:r>
+          </a:p>
+        </p:txBody>
+      </p:sp>
+      <p:sp>
+        <p:nvSpPr>
+          <p:cNvPr id="3" name="Slide Number Placeholder 2">
+            <a:extLst>
+              <a:ext uri="{FF2B5EF4-FFF2-40B4-BE49-F238E27FC236}">
+                <a16:creationId xmlns:a16="http://schemas.microsoft.com/office/drawing/2014/main" id="{001C6545-182D-BA3B-7BE7-F6D9D4242CE4}"/>
+              </a:ext>
+            </a:extLst>
+          </p:cNvPr>
+          <p:cNvSpPr>
+            <a:spLocks noGrp="1"/>
+          </p:cNvSpPr>
+          <p:nvPr>
+            <p:ph type="sldNum" sz="quarter" idx="12"/>
+          </p:nvPr>
+        </p:nvSpPr>
+        <p:spPr/>
+        <p:txBody>
+          <a:bodyPr/>
+          <a:lstStyle/>
+          <a:p>
+            <a:fld id="{621225AB-15B9-4C79-A121-04D1DC7E2307}" type="slidenum">
+              <a:rPr lang="en-US" smtClean="0"/>
+              <a:t>31</a:t>
             </a:fld>
             <a:endParaRPr lang="en-US"/>
           </a:p>
@@ -10635,7 +10825,7 @@
 </p:sld>
 </file>
 
-<file path=ppt/slides/slide31.xml><?xml version="1.0" encoding="utf-8"?>
+<file path=ppt/slides/slide32.xml><?xml version="1.0" encoding="utf-8"?>
 <p:sld xmlns:a="http://schemas.openxmlformats.org/drawingml/2006/main" xmlns:r="http://schemas.openxmlformats.org/officeDocument/2006/relationships" xmlns:p="http://schemas.openxmlformats.org/presentationml/2006/main">
   <p:cSld>
     <p:spTree>
@@ -10705,7 +10895,7 @@
           <a:p>
             <a:fld id="{621225AB-15B9-4C79-A121-04D1DC7E2307}" type="slidenum">
               <a:rPr lang="en-US" smtClean="0"/>
-              <a:t>31</a:t>
+              <a:t>32</a:t>
             </a:fld>
             <a:endParaRPr lang="en-US"/>
           </a:p>
@@ -10925,7 +11115,7 @@
 </p:sld>
 </file>
 
-<file path=ppt/slides/slide32.xml><?xml version="1.0" encoding="utf-8"?>
+<file path=ppt/slides/slide33.xml><?xml version="1.0" encoding="utf-8"?>
 <p:sld xmlns:a="http://schemas.openxmlformats.org/drawingml/2006/main" xmlns:r="http://schemas.openxmlformats.org/officeDocument/2006/relationships" xmlns:p="http://schemas.openxmlformats.org/presentationml/2006/main">
   <p:cSld>
     <p:spTree>
@@ -10995,7 +11185,7 @@
           <a:p>
             <a:fld id="{621225AB-15B9-4C79-A121-04D1DC7E2307}" type="slidenum">
               <a:rPr lang="en-US" smtClean="0"/>
-              <a:t>32</a:t>
+              <a:t>33</a:t>
             </a:fld>
             <a:endParaRPr lang="en-US"/>
           </a:p>
@@ -11086,7 +11276,7 @@
 </p:sld>
 </file>
 
-<file path=ppt/slides/slide33.xml><?xml version="1.0" encoding="utf-8"?>
+<file path=ppt/slides/slide34.xml><?xml version="1.0" encoding="utf-8"?>
 <p:sld xmlns:a="http://schemas.openxmlformats.org/drawingml/2006/main" xmlns:r="http://schemas.openxmlformats.org/officeDocument/2006/relationships" xmlns:p="http://schemas.openxmlformats.org/presentationml/2006/main">
   <p:cSld>
     <p:spTree>
@@ -11156,7 +11346,7 @@
           <a:p>
             <a:fld id="{621225AB-15B9-4C79-A121-04D1DC7E2307}" type="slidenum">
               <a:rPr lang="en-US" smtClean="0"/>
-              <a:t>33</a:t>
+              <a:t>34</a:t>
             </a:fld>
             <a:endParaRPr lang="en-US"/>
           </a:p>
@@ -11659,7 +11849,7 @@
 </p:sld>
 </file>
 
-<file path=ppt/slides/slide34.xml><?xml version="1.0" encoding="utf-8"?>
+<file path=ppt/slides/slide35.xml><?xml version="1.0" encoding="utf-8"?>
 <p:sld xmlns:a="http://schemas.openxmlformats.org/drawingml/2006/main" xmlns:r="http://schemas.openxmlformats.org/officeDocument/2006/relationships" xmlns:p="http://schemas.openxmlformats.org/presentationml/2006/main">
   <p:cSld>
     <p:spTree>
@@ -11730,7 +11920,7 @@
           <a:p>
             <a:fld id="{621225AB-15B9-4C79-A121-04D1DC7E2307}" type="slidenum">
               <a:rPr lang="en-US" smtClean="0"/>
-              <a:t>34</a:t>
+              <a:t>35</a:t>
             </a:fld>
             <a:endParaRPr lang="en-US"/>
           </a:p>
@@ -11936,7 +12126,7 @@
 </p:sld>
 </file>
 
-<file path=ppt/slides/slide35.xml><?xml version="1.0" encoding="utf-8"?>
+<file path=ppt/slides/slide36.xml><?xml version="1.0" encoding="utf-8"?>
 <p:sld xmlns:a="http://schemas.openxmlformats.org/drawingml/2006/main" xmlns:r="http://schemas.openxmlformats.org/officeDocument/2006/relationships" xmlns:p="http://schemas.openxmlformats.org/presentationml/2006/main">
   <p:cSld>
     <p:spTree>
@@ -12006,7 +12196,7 @@
           <a:p>
             <a:fld id="{621225AB-15B9-4C79-A121-04D1DC7E2307}" type="slidenum">
               <a:rPr lang="en-US" smtClean="0"/>
-              <a:t>35</a:t>
+              <a:t>36</a:t>
             </a:fld>
             <a:endParaRPr lang="en-US"/>
           </a:p>
@@ -12067,7 +12257,7 @@
 </p:sld>
 </file>
 
-<file path=ppt/slides/slide36.xml><?xml version="1.0" encoding="utf-8"?>
+<file path=ppt/slides/slide37.xml><?xml version="1.0" encoding="utf-8"?>
 <p:sld xmlns:a="http://schemas.openxmlformats.org/drawingml/2006/main" xmlns:r="http://schemas.openxmlformats.org/officeDocument/2006/relationships" xmlns:p="http://schemas.openxmlformats.org/presentationml/2006/main">
   <p:cSld>
     <p:spTree>
@@ -12137,7 +12327,7 @@
           <a:p>
             <a:fld id="{621225AB-15B9-4C79-A121-04D1DC7E2307}" type="slidenum">
               <a:rPr lang="en-US" smtClean="0"/>
-              <a:t>36</a:t>
+              <a:t>37</a:t>
             </a:fld>
             <a:endParaRPr lang="en-US"/>
           </a:p>
@@ -12198,7 +12388,7 @@
 </p:sld>
 </file>
 
-<file path=ppt/slides/slide37.xml><?xml version="1.0" encoding="utf-8"?>
+<file path=ppt/slides/slide38.xml><?xml version="1.0" encoding="utf-8"?>
 <p:sld xmlns:a="http://schemas.openxmlformats.org/drawingml/2006/main" xmlns:r="http://schemas.openxmlformats.org/officeDocument/2006/relationships" xmlns:p="http://schemas.openxmlformats.org/presentationml/2006/main">
   <p:cSld>
     <p:spTree>
@@ -12268,7 +12458,7 @@
           <a:p>
             <a:fld id="{621225AB-15B9-4C79-A121-04D1DC7E2307}" type="slidenum">
               <a:rPr lang="en-US" smtClean="0"/>
-              <a:t>37</a:t>
+              <a:t>38</a:t>
             </a:fld>
             <a:endParaRPr lang="en-US"/>
           </a:p>
@@ -12509,7 +12699,7 @@
 </p:sld>
 </file>
 
-<file path=ppt/slides/slide38.xml><?xml version="1.0" encoding="utf-8"?>
+<file path=ppt/slides/slide39.xml><?xml version="1.0" encoding="utf-8"?>
 <p:sld xmlns:a="http://schemas.openxmlformats.org/drawingml/2006/main" xmlns:r="http://schemas.openxmlformats.org/officeDocument/2006/relationships" xmlns:p="http://schemas.openxmlformats.org/presentationml/2006/main">
   <p:cSld>
     <p:spTree>
@@ -12579,7 +12769,7 @@
           <a:p>
             <a:fld id="{621225AB-15B9-4C79-A121-04D1DC7E2307}" type="slidenum">
               <a:rPr lang="en-US" smtClean="0"/>
-              <a:t>38</a:t>
+              <a:t>39</a:t>
             </a:fld>
             <a:endParaRPr lang="en-US"/>
           </a:p>
@@ -12619,137 +12809,6 @@
     <p:extLst>
       <p:ext uri="{BB962C8B-B14F-4D97-AF65-F5344CB8AC3E}">
         <p14:creationId xmlns:p14="http://schemas.microsoft.com/office/powerpoint/2010/main" val="106767346"/>
-      </p:ext>
-    </p:extLst>
-  </p:cSld>
-  <p:clrMapOvr>
-    <a:masterClrMapping/>
-  </p:clrMapOvr>
-  <mc:AlternateContent xmlns:mc="http://schemas.openxmlformats.org/markup-compatibility/2006" xmlns:p14="http://schemas.microsoft.com/office/powerpoint/2010/main">
-    <mc:Choice Requires="p14">
-      <p:transition spd="slow" p14:dur="2000">
-        <p14:prism isContent="1"/>
-      </p:transition>
-    </mc:Choice>
-    <mc:Fallback xmlns="">
-      <p:transition spd="slow">
-        <p:fade/>
-      </p:transition>
-    </mc:Fallback>
-  </mc:AlternateContent>
-</p:sld>
-</file>
-
-<file path=ppt/slides/slide39.xml><?xml version="1.0" encoding="utf-8"?>
-<p:sld xmlns:a="http://schemas.openxmlformats.org/drawingml/2006/main" xmlns:r="http://schemas.openxmlformats.org/officeDocument/2006/relationships" xmlns:p="http://schemas.openxmlformats.org/presentationml/2006/main">
-  <p:cSld>
-    <p:spTree>
-      <p:nvGrpSpPr>
-        <p:cNvPr id="1" name=""/>
-        <p:cNvGrpSpPr/>
-        <p:nvPr/>
-      </p:nvGrpSpPr>
-      <p:grpSpPr>
-        <a:xfrm>
-          <a:off x="0" y="0"/>
-          <a:ext cx="0" cy="0"/>
-          <a:chOff x="0" y="0"/>
-          <a:chExt cx="0" cy="0"/>
-        </a:xfrm>
-      </p:grpSpPr>
-      <p:sp>
-        <p:nvSpPr>
-          <p:cNvPr id="2" name="Title 1">
-            <a:extLst>
-              <a:ext uri="{FF2B5EF4-FFF2-40B4-BE49-F238E27FC236}">
-                <a16:creationId xmlns:a16="http://schemas.microsoft.com/office/drawing/2014/main" id="{3E4FABD1-E12D-DC2B-1427-055D5AF4BBAF}"/>
-              </a:ext>
-            </a:extLst>
-          </p:cNvPr>
-          <p:cNvSpPr>
-            <a:spLocks noGrp="1"/>
-          </p:cNvSpPr>
-          <p:nvPr>
-            <p:ph type="title"/>
-          </p:nvPr>
-        </p:nvSpPr>
-        <p:spPr/>
-        <p:txBody>
-          <a:bodyPr>
-            <a:normAutofit fontScale="90000"/>
-          </a:bodyPr>
-          <a:lstStyle/>
-          <a:p>
-            <a:r>
-              <a:rPr lang="en-CA" dirty="0"/>
-              <a:t>Coal miners: Model comparisons</a:t>
-            </a:r>
-          </a:p>
-        </p:txBody>
-      </p:sp>
-      <p:sp>
-        <p:nvSpPr>
-          <p:cNvPr id="3" name="Slide Number Placeholder 2">
-            <a:extLst>
-              <a:ext uri="{FF2B5EF4-FFF2-40B4-BE49-F238E27FC236}">
-                <a16:creationId xmlns:a16="http://schemas.microsoft.com/office/drawing/2014/main" id="{BABA3F91-3635-FE44-51C6-18C78C820140}"/>
-              </a:ext>
-            </a:extLst>
-          </p:cNvPr>
-          <p:cNvSpPr>
-            <a:spLocks noGrp="1"/>
-          </p:cNvSpPr>
-          <p:nvPr>
-            <p:ph type="sldNum" sz="quarter" idx="12"/>
-          </p:nvPr>
-        </p:nvSpPr>
-        <p:spPr/>
-        <p:txBody>
-          <a:bodyPr/>
-          <a:lstStyle/>
-          <a:p>
-            <a:fld id="{621225AB-15B9-4C79-A121-04D1DC7E2307}" type="slidenum">
-              <a:rPr lang="en-US" smtClean="0"/>
-              <a:t>39</a:t>
-            </a:fld>
-            <a:endParaRPr lang="en-US"/>
-          </a:p>
-        </p:txBody>
-      </p:sp>
-      <p:pic>
-        <p:nvPicPr>
-          <p:cNvPr id="6" name="Picture 5">
-            <a:extLst>
-              <a:ext uri="{FF2B5EF4-FFF2-40B4-BE49-F238E27FC236}">
-                <a16:creationId xmlns:a16="http://schemas.microsoft.com/office/drawing/2014/main" id="{71EB824F-7856-5D7A-2700-AE3723F9ED59}"/>
-              </a:ext>
-            </a:extLst>
-          </p:cNvPr>
-          <p:cNvPicPr>
-            <a:picLocks noChangeAspect="1"/>
-          </p:cNvPicPr>
-          <p:nvPr/>
-        </p:nvPicPr>
-        <p:blipFill>
-          <a:blip r:embed="rId2"/>
-          <a:stretch>
-            <a:fillRect/>
-          </a:stretch>
-        </p:blipFill>
-        <p:spPr>
-          <a:xfrm>
-            <a:off x="486286" y="1371857"/>
-            <a:ext cx="8171428" cy="4114286"/>
-          </a:xfrm>
-          <a:prstGeom prst="rect">
-            <a:avLst/>
-          </a:prstGeom>
-        </p:spPr>
-      </p:pic>
-    </p:spTree>
-    <p:extLst>
-      <p:ext uri="{BB962C8B-B14F-4D97-AF65-F5344CB8AC3E}">
-        <p14:creationId xmlns:p14="http://schemas.microsoft.com/office/powerpoint/2010/main" val="2257295080"/>
       </p:ext>
     </p:extLst>
   </p:cSld>
@@ -13385,7 +13444,7 @@
           <p:cNvPr id="2" name="Title 1">
             <a:extLst>
               <a:ext uri="{FF2B5EF4-FFF2-40B4-BE49-F238E27FC236}">
-                <a16:creationId xmlns:a16="http://schemas.microsoft.com/office/drawing/2014/main" id="{1B975282-4007-ABFB-EFFF-FEBF317B759E}"/>
+                <a16:creationId xmlns:a16="http://schemas.microsoft.com/office/drawing/2014/main" id="{3E4FABD1-E12D-DC2B-1427-055D5AF4BBAF}"/>
               </a:ext>
             </a:extLst>
           </p:cNvPr>
@@ -13399,13 +13458,13 @@
         <p:spPr/>
         <p:txBody>
           <a:bodyPr>
-            <a:normAutofit/>
+            <a:normAutofit fontScale="90000"/>
           </a:bodyPr>
           <a:lstStyle/>
           <a:p>
             <a:r>
-              <a:rPr lang="en-CA" sz="3600" dirty="0"/>
-              <a:t>Going further: Bivariate response models</a:t>
+              <a:rPr lang="en-CA" dirty="0"/>
+              <a:t>Coal miners: Model comparisons</a:t>
             </a:r>
           </a:p>
         </p:txBody>
@@ -13415,7 +13474,7 @@
           <p:cNvPr id="3" name="Slide Number Placeholder 2">
             <a:extLst>
               <a:ext uri="{FF2B5EF4-FFF2-40B4-BE49-F238E27FC236}">
-                <a16:creationId xmlns:a16="http://schemas.microsoft.com/office/drawing/2014/main" id="{EAAB3895-B6A8-0CC3-C852-5D9C9C0B782E}"/>
+                <a16:creationId xmlns:a16="http://schemas.microsoft.com/office/drawing/2014/main" id="{BABA3F91-3635-FE44-51C6-18C78C820140}"/>
               </a:ext>
             </a:extLst>
           </p:cNvPr>
@@ -13434,6 +13493,137 @@
             <a:fld id="{621225AB-15B9-4C79-A121-04D1DC7E2307}" type="slidenum">
               <a:rPr lang="en-US" smtClean="0"/>
               <a:t>40</a:t>
+            </a:fld>
+            <a:endParaRPr lang="en-US"/>
+          </a:p>
+        </p:txBody>
+      </p:sp>
+      <p:pic>
+        <p:nvPicPr>
+          <p:cNvPr id="6" name="Picture 5">
+            <a:extLst>
+              <a:ext uri="{FF2B5EF4-FFF2-40B4-BE49-F238E27FC236}">
+                <a16:creationId xmlns:a16="http://schemas.microsoft.com/office/drawing/2014/main" id="{71EB824F-7856-5D7A-2700-AE3723F9ED59}"/>
+              </a:ext>
+            </a:extLst>
+          </p:cNvPr>
+          <p:cNvPicPr>
+            <a:picLocks noChangeAspect="1"/>
+          </p:cNvPicPr>
+          <p:nvPr/>
+        </p:nvPicPr>
+        <p:blipFill>
+          <a:blip r:embed="rId2"/>
+          <a:stretch>
+            <a:fillRect/>
+          </a:stretch>
+        </p:blipFill>
+        <p:spPr>
+          <a:xfrm>
+            <a:off x="486286" y="1371857"/>
+            <a:ext cx="8171428" cy="4114286"/>
+          </a:xfrm>
+          <a:prstGeom prst="rect">
+            <a:avLst/>
+          </a:prstGeom>
+        </p:spPr>
+      </p:pic>
+    </p:spTree>
+    <p:extLst>
+      <p:ext uri="{BB962C8B-B14F-4D97-AF65-F5344CB8AC3E}">
+        <p14:creationId xmlns:p14="http://schemas.microsoft.com/office/powerpoint/2010/main" val="2257295080"/>
+      </p:ext>
+    </p:extLst>
+  </p:cSld>
+  <p:clrMapOvr>
+    <a:masterClrMapping/>
+  </p:clrMapOvr>
+  <mc:AlternateContent xmlns:mc="http://schemas.openxmlformats.org/markup-compatibility/2006" xmlns:p14="http://schemas.microsoft.com/office/powerpoint/2010/main">
+    <mc:Choice Requires="p14">
+      <p:transition spd="slow" p14:dur="2000">
+        <p14:prism isContent="1"/>
+      </p:transition>
+    </mc:Choice>
+    <mc:Fallback xmlns="">
+      <p:transition spd="slow">
+        <p:fade/>
+      </p:transition>
+    </mc:Fallback>
+  </mc:AlternateContent>
+</p:sld>
+</file>
+
+<file path=ppt/slides/slide41.xml><?xml version="1.0" encoding="utf-8"?>
+<p:sld xmlns:a="http://schemas.openxmlformats.org/drawingml/2006/main" xmlns:r="http://schemas.openxmlformats.org/officeDocument/2006/relationships" xmlns:p="http://schemas.openxmlformats.org/presentationml/2006/main">
+  <p:cSld>
+    <p:spTree>
+      <p:nvGrpSpPr>
+        <p:cNvPr id="1" name=""/>
+        <p:cNvGrpSpPr/>
+        <p:nvPr/>
+      </p:nvGrpSpPr>
+      <p:grpSpPr>
+        <a:xfrm>
+          <a:off x="0" y="0"/>
+          <a:ext cx="0" cy="0"/>
+          <a:chOff x="0" y="0"/>
+          <a:chExt cx="0" cy="0"/>
+        </a:xfrm>
+      </p:grpSpPr>
+      <p:sp>
+        <p:nvSpPr>
+          <p:cNvPr id="2" name="Title 1">
+            <a:extLst>
+              <a:ext uri="{FF2B5EF4-FFF2-40B4-BE49-F238E27FC236}">
+                <a16:creationId xmlns:a16="http://schemas.microsoft.com/office/drawing/2014/main" id="{1B975282-4007-ABFB-EFFF-FEBF317B759E}"/>
+              </a:ext>
+            </a:extLst>
+          </p:cNvPr>
+          <p:cNvSpPr>
+            <a:spLocks noGrp="1"/>
+          </p:cNvSpPr>
+          <p:nvPr>
+            <p:ph type="title"/>
+          </p:nvPr>
+        </p:nvSpPr>
+        <p:spPr/>
+        <p:txBody>
+          <a:bodyPr>
+            <a:normAutofit/>
+          </a:bodyPr>
+          <a:lstStyle/>
+          <a:p>
+            <a:r>
+              <a:rPr lang="en-CA" sz="3600" dirty="0"/>
+              <a:t>Going further: Bivariate response models</a:t>
+            </a:r>
+          </a:p>
+        </p:txBody>
+      </p:sp>
+      <p:sp>
+        <p:nvSpPr>
+          <p:cNvPr id="3" name="Slide Number Placeholder 2">
+            <a:extLst>
+              <a:ext uri="{FF2B5EF4-FFF2-40B4-BE49-F238E27FC236}">
+                <a16:creationId xmlns:a16="http://schemas.microsoft.com/office/drawing/2014/main" id="{EAAB3895-B6A8-0CC3-C852-5D9C9C0B782E}"/>
+              </a:ext>
+            </a:extLst>
+          </p:cNvPr>
+          <p:cNvSpPr>
+            <a:spLocks noGrp="1"/>
+          </p:cNvSpPr>
+          <p:nvPr>
+            <p:ph type="sldNum" sz="quarter" idx="12"/>
+          </p:nvPr>
+        </p:nvSpPr>
+        <p:spPr/>
+        <p:txBody>
+          <a:bodyPr/>
+          <a:lstStyle/>
+          <a:p>
+            <a:fld id="{621225AB-15B9-4C79-A121-04D1DC7E2307}" type="slidenum">
+              <a:rPr lang="en-US" smtClean="0"/>
+              <a:t>41</a:t>
             </a:fld>
             <a:endParaRPr lang="en-US"/>
           </a:p>
@@ -13494,563 +13684,6 @@
 </p:sld>
 </file>
 
-<file path=ppt/slides/slide41.xml><?xml version="1.0" encoding="utf-8"?>
-<p:sld xmlns:a="http://schemas.openxmlformats.org/drawingml/2006/main" xmlns:r="http://schemas.openxmlformats.org/officeDocument/2006/relationships" xmlns:p="http://schemas.openxmlformats.org/presentationml/2006/main">
-  <p:cSld>
-    <p:spTree>
-      <p:nvGrpSpPr>
-        <p:cNvPr id="1" name=""/>
-        <p:cNvGrpSpPr/>
-        <p:nvPr/>
-      </p:nvGrpSpPr>
-      <p:grpSpPr>
-        <a:xfrm>
-          <a:off x="0" y="0"/>
-          <a:ext cx="0" cy="0"/>
-          <a:chOff x="0" y="0"/>
-          <a:chExt cx="0" cy="0"/>
-        </a:xfrm>
-      </p:grpSpPr>
-      <p:sp>
-        <p:nvSpPr>
-          <p:cNvPr id="2" name="Title 1">
-            <a:extLst>
-              <a:ext uri="{FF2B5EF4-FFF2-40B4-BE49-F238E27FC236}">
-                <a16:creationId xmlns:a16="http://schemas.microsoft.com/office/drawing/2014/main" id="{D139FA0C-F38F-576E-483D-FA47E1EBB8E7}"/>
-              </a:ext>
-            </a:extLst>
-          </p:cNvPr>
-          <p:cNvSpPr>
-            <a:spLocks noGrp="1"/>
-          </p:cNvSpPr>
-          <p:nvPr>
-            <p:ph type="title"/>
-          </p:nvPr>
-        </p:nvSpPr>
-        <p:spPr/>
-        <p:txBody>
-          <a:bodyPr>
-            <a:normAutofit fontScale="90000"/>
-          </a:bodyPr>
-          <a:lstStyle/>
-          <a:p>
-            <a:r>
-              <a:rPr lang="en-CA" dirty="0"/>
-              <a:t>Calculating…</a:t>
-            </a:r>
-          </a:p>
-        </p:txBody>
-      </p:sp>
-      <p:sp>
-        <p:nvSpPr>
-          <p:cNvPr id="3" name="Slide Number Placeholder 2">
-            <a:extLst>
-              <a:ext uri="{FF2B5EF4-FFF2-40B4-BE49-F238E27FC236}">
-                <a16:creationId xmlns:a16="http://schemas.microsoft.com/office/drawing/2014/main" id="{A832CDFA-313D-A62E-0204-D5BA7FEA5D14}"/>
-              </a:ext>
-            </a:extLst>
-          </p:cNvPr>
-          <p:cNvSpPr>
-            <a:spLocks noGrp="1"/>
-          </p:cNvSpPr>
-          <p:nvPr>
-            <p:ph type="sldNum" sz="quarter" idx="12"/>
-          </p:nvPr>
-        </p:nvSpPr>
-        <p:spPr/>
-        <p:txBody>
-          <a:bodyPr/>
-          <a:lstStyle/>
-          <a:p>
-            <a:fld id="{621225AB-15B9-4C79-A121-04D1DC7E2307}" type="slidenum">
-              <a:rPr lang="en-US" smtClean="0"/>
-              <a:t>41</a:t>
-            </a:fld>
-            <a:endParaRPr lang="en-US"/>
-          </a:p>
-        </p:txBody>
-      </p:sp>
-      <p:sp>
-        <p:nvSpPr>
-          <p:cNvPr id="4" name="TextBox 3">
-            <a:extLst>
-              <a:ext uri="{FF2B5EF4-FFF2-40B4-BE49-F238E27FC236}">
-                <a16:creationId xmlns:a16="http://schemas.microsoft.com/office/drawing/2014/main" id="{7C0E9332-31E1-7D1B-C75D-4049297B597D}"/>
-              </a:ext>
-            </a:extLst>
-          </p:cNvPr>
-          <p:cNvSpPr txBox="1"/>
-          <p:nvPr/>
-        </p:nvSpPr>
-        <p:spPr>
-          <a:xfrm>
-            <a:off x="457200" y="1577876"/>
-            <a:ext cx="8229600" cy="1815882"/>
-          </a:xfrm>
-          <a:prstGeom prst="rect">
-            <a:avLst/>
-          </a:prstGeom>
-          <a:solidFill>
-            <a:schemeClr val="accent6">
-              <a:lumMod val="20000"/>
-              <a:lumOff val="80000"/>
-              <a:alpha val="60000"/>
-            </a:schemeClr>
-          </a:solidFill>
-        </p:spPr>
-        <p:txBody>
-          <a:bodyPr wrap="square" rtlCol="0">
-            <a:spAutoFit/>
-          </a:bodyPr>
-          <a:lstStyle/>
-          <a:p>
-            <a:r>
-              <a:rPr lang="en-CA" sz="1400" dirty="0">
-                <a:latin typeface="Courier New" panose="02070309020205020404" pitchFamily="49" charset="0"/>
-                <a:cs typeface="Courier New" panose="02070309020205020404" pitchFamily="49" charset="0"/>
-              </a:rPr>
-              <a:t>data(coalminers, package = "VGAM")</a:t>
-            </a:r>
-          </a:p>
-          <a:p>
-            <a:r>
-              <a:rPr lang="en-CA" sz="1400" dirty="0">
-                <a:latin typeface="Courier New" panose="02070309020205020404" pitchFamily="49" charset="0"/>
-                <a:cs typeface="Courier New" panose="02070309020205020404" pitchFamily="49" charset="0"/>
-              </a:rPr>
-              <a:t>coalminers &lt;- transform(coalminers, Age = (age - 42) / 5)</a:t>
-            </a:r>
-          </a:p>
-          <a:p>
-            <a:endParaRPr lang="en-CA" sz="1400" dirty="0">
-              <a:latin typeface="Courier New" panose="02070309020205020404" pitchFamily="49" charset="0"/>
-              <a:cs typeface="Courier New" panose="02070309020205020404" pitchFamily="49" charset="0"/>
-            </a:endParaRPr>
-          </a:p>
-          <a:p>
-            <a:r>
-              <a:rPr lang="en-CA" sz="1400" dirty="0" err="1">
-                <a:latin typeface="Courier New" panose="02070309020205020404" pitchFamily="49" charset="0"/>
-                <a:cs typeface="Courier New" panose="02070309020205020404" pitchFamily="49" charset="0"/>
-              </a:rPr>
-              <a:t>logitsCM</a:t>
-            </a:r>
-            <a:r>
-              <a:rPr lang="en-CA" sz="1400" dirty="0">
-                <a:latin typeface="Courier New" panose="02070309020205020404" pitchFamily="49" charset="0"/>
-                <a:cs typeface="Courier New" panose="02070309020205020404" pitchFamily="49" charset="0"/>
-              </a:rPr>
-              <a:t> &lt;- </a:t>
-            </a:r>
-            <a:r>
-              <a:rPr lang="en-CA" sz="1400" dirty="0" err="1">
-                <a:latin typeface="Courier New" panose="02070309020205020404" pitchFamily="49" charset="0"/>
-                <a:cs typeface="Courier New" panose="02070309020205020404" pitchFamily="49" charset="0"/>
-              </a:rPr>
-              <a:t>vcdExtra</a:t>
-            </a:r>
-            <a:r>
-              <a:rPr lang="en-CA" sz="1400" dirty="0">
-                <a:latin typeface="Courier New" panose="02070309020205020404" pitchFamily="49" charset="0"/>
-                <a:cs typeface="Courier New" panose="02070309020205020404" pitchFamily="49" charset="0"/>
-              </a:rPr>
-              <a:t>::</a:t>
-            </a:r>
-            <a:r>
-              <a:rPr lang="en-CA" sz="1400" dirty="0" err="1">
-                <a:latin typeface="Courier New" panose="02070309020205020404" pitchFamily="49" charset="0"/>
-                <a:cs typeface="Courier New" panose="02070309020205020404" pitchFamily="49" charset="0"/>
-              </a:rPr>
-              <a:t>blogits</a:t>
-            </a:r>
-            <a:r>
-              <a:rPr lang="en-CA" sz="1400" dirty="0">
-                <a:latin typeface="Courier New" panose="02070309020205020404" pitchFamily="49" charset="0"/>
-                <a:cs typeface="Courier New" panose="02070309020205020404" pitchFamily="49" charset="0"/>
-              </a:rPr>
-              <a:t>(coalminers[, 1:4], add = 0.5)</a:t>
-            </a:r>
-          </a:p>
-          <a:p>
-            <a:r>
-              <a:rPr lang="en-CA" sz="1400" dirty="0" err="1">
-                <a:latin typeface="Courier New" panose="02070309020205020404" pitchFamily="49" charset="0"/>
-                <a:cs typeface="Courier New" panose="02070309020205020404" pitchFamily="49" charset="0"/>
-              </a:rPr>
-              <a:t>colnames</a:t>
-            </a:r>
-            <a:r>
-              <a:rPr lang="en-CA" sz="1400" dirty="0">
-                <a:latin typeface="Courier New" panose="02070309020205020404" pitchFamily="49" charset="0"/>
-                <a:cs typeface="Courier New" panose="02070309020205020404" pitchFamily="49" charset="0"/>
-              </a:rPr>
-              <a:t>(</a:t>
-            </a:r>
-            <a:r>
-              <a:rPr lang="en-CA" sz="1400" dirty="0" err="1">
-                <a:latin typeface="Courier New" panose="02070309020205020404" pitchFamily="49" charset="0"/>
-                <a:cs typeface="Courier New" panose="02070309020205020404" pitchFamily="49" charset="0"/>
-              </a:rPr>
-              <a:t>logitsCM</a:t>
-            </a:r>
-            <a:r>
-              <a:rPr lang="en-CA" sz="1400" dirty="0">
-                <a:latin typeface="Courier New" panose="02070309020205020404" pitchFamily="49" charset="0"/>
-                <a:cs typeface="Courier New" panose="02070309020205020404" pitchFamily="49" charset="0"/>
-              </a:rPr>
-              <a:t>)[1:2] &lt;- c("</a:t>
-            </a:r>
-            <a:r>
-              <a:rPr lang="en-CA" sz="1400" dirty="0" err="1">
-                <a:latin typeface="Courier New" panose="02070309020205020404" pitchFamily="49" charset="0"/>
-                <a:cs typeface="Courier New" panose="02070309020205020404" pitchFamily="49" charset="0"/>
-              </a:rPr>
-              <a:t>logitB</a:t>
-            </a:r>
-            <a:r>
-              <a:rPr lang="en-CA" sz="1400" dirty="0">
-                <a:latin typeface="Courier New" panose="02070309020205020404" pitchFamily="49" charset="0"/>
-                <a:cs typeface="Courier New" panose="02070309020205020404" pitchFamily="49" charset="0"/>
-              </a:rPr>
-              <a:t>", "</a:t>
-            </a:r>
-            <a:r>
-              <a:rPr lang="en-CA" sz="1400" dirty="0" err="1">
-                <a:latin typeface="Courier New" panose="02070309020205020404" pitchFamily="49" charset="0"/>
-                <a:cs typeface="Courier New" panose="02070309020205020404" pitchFamily="49" charset="0"/>
-              </a:rPr>
-              <a:t>logitW</a:t>
-            </a:r>
-            <a:r>
-              <a:rPr lang="en-CA" sz="1400" dirty="0">
-                <a:latin typeface="Courier New" panose="02070309020205020404" pitchFamily="49" charset="0"/>
-                <a:cs typeface="Courier New" panose="02070309020205020404" pitchFamily="49" charset="0"/>
-              </a:rPr>
-              <a:t>")</a:t>
-            </a:r>
-          </a:p>
-          <a:p>
-            <a:r>
-              <a:rPr lang="en-CA" sz="1400" dirty="0" err="1">
-                <a:latin typeface="Courier New" panose="02070309020205020404" pitchFamily="49" charset="0"/>
-                <a:cs typeface="Courier New" panose="02070309020205020404" pitchFamily="49" charset="0"/>
-              </a:rPr>
-              <a:t>logitsCM</a:t>
-            </a:r>
-            <a:r>
-              <a:rPr lang="en-CA" sz="1400" dirty="0">
-                <a:latin typeface="Courier New" panose="02070309020205020404" pitchFamily="49" charset="0"/>
-                <a:cs typeface="Courier New" panose="02070309020205020404" pitchFamily="49" charset="0"/>
-              </a:rPr>
-              <a:t> &lt;- </a:t>
-            </a:r>
-            <a:r>
-              <a:rPr lang="en-CA" sz="1400" dirty="0" err="1">
-                <a:latin typeface="Courier New" panose="02070309020205020404" pitchFamily="49" charset="0"/>
-                <a:cs typeface="Courier New" panose="02070309020205020404" pitchFamily="49" charset="0"/>
-              </a:rPr>
-              <a:t>cbind</a:t>
-            </a:r>
-            <a:r>
-              <a:rPr lang="en-CA" sz="1400" dirty="0">
-                <a:latin typeface="Courier New" panose="02070309020205020404" pitchFamily="49" charset="0"/>
-                <a:cs typeface="Courier New" panose="02070309020205020404" pitchFamily="49" charset="0"/>
-              </a:rPr>
-              <a:t>(</a:t>
-            </a:r>
-            <a:r>
-              <a:rPr lang="en-CA" sz="1400" dirty="0" err="1">
-                <a:latin typeface="Courier New" panose="02070309020205020404" pitchFamily="49" charset="0"/>
-                <a:cs typeface="Courier New" panose="02070309020205020404" pitchFamily="49" charset="0"/>
-              </a:rPr>
-              <a:t>logitsCM</a:t>
-            </a:r>
-            <a:r>
-              <a:rPr lang="en-CA" sz="1400" dirty="0">
-                <a:latin typeface="Courier New" panose="02070309020205020404" pitchFamily="49" charset="0"/>
-                <a:cs typeface="Courier New" panose="02070309020205020404" pitchFamily="49" charset="0"/>
-              </a:rPr>
-              <a:t>,</a:t>
-            </a:r>
-          </a:p>
-          <a:p>
-            <a:r>
-              <a:rPr lang="en-CA" sz="1400" dirty="0">
-                <a:latin typeface="Courier New" panose="02070309020205020404" pitchFamily="49" charset="0"/>
-                <a:cs typeface="Courier New" panose="02070309020205020404" pitchFamily="49" charset="0"/>
-              </a:rPr>
-              <a:t>                  coalminers[, c("age", "Age")])</a:t>
-            </a:r>
-          </a:p>
-          <a:p>
-            <a:r>
-              <a:rPr lang="en-CA" sz="1400" dirty="0" err="1">
-                <a:latin typeface="Courier New" panose="02070309020205020404" pitchFamily="49" charset="0"/>
-                <a:cs typeface="Courier New" panose="02070309020205020404" pitchFamily="49" charset="0"/>
-              </a:rPr>
-              <a:t>logitsCM</a:t>
-            </a:r>
-            <a:endParaRPr lang="en-CA" sz="1400" dirty="0">
-              <a:latin typeface="Courier New" panose="02070309020205020404" pitchFamily="49" charset="0"/>
-              <a:cs typeface="Courier New" panose="02070309020205020404" pitchFamily="49" charset="0"/>
-            </a:endParaRPr>
-          </a:p>
-        </p:txBody>
-      </p:sp>
-      <p:sp>
-        <p:nvSpPr>
-          <p:cNvPr id="5" name="TextBox 4">
-            <a:extLst>
-              <a:ext uri="{FF2B5EF4-FFF2-40B4-BE49-F238E27FC236}">
-                <a16:creationId xmlns:a16="http://schemas.microsoft.com/office/drawing/2014/main" id="{7B5225C8-CEBC-29A5-B961-9954BD763DBC}"/>
-              </a:ext>
-            </a:extLst>
-          </p:cNvPr>
-          <p:cNvSpPr txBox="1"/>
-          <p:nvPr/>
-        </p:nvSpPr>
-        <p:spPr>
-          <a:xfrm>
-            <a:off x="457200" y="1143000"/>
-            <a:ext cx="8229600" cy="381000"/>
-          </a:xfrm>
-          <a:prstGeom prst="rect">
-            <a:avLst/>
-          </a:prstGeom>
-          <a:noFill/>
-        </p:spPr>
-        <p:txBody>
-          <a:bodyPr wrap="square" rtlCol="0">
-            <a:spAutoFit/>
-          </a:bodyPr>
-          <a:lstStyle/>
-          <a:p>
-            <a:r>
-              <a:rPr lang="en-CA" dirty="0"/>
-              <a:t>Logits and log odds for a bivariate response can be calculated with </a:t>
-            </a:r>
-            <a:r>
-              <a:rPr lang="en-CA" dirty="0" err="1"/>
-              <a:t>vcdExtra</a:t>
-            </a:r>
-            <a:r>
-              <a:rPr lang="en-CA" dirty="0"/>
-              <a:t>::</a:t>
-            </a:r>
-            <a:r>
-              <a:rPr lang="en-CA" dirty="0" err="1"/>
-              <a:t>blogits</a:t>
-            </a:r>
-            <a:r>
-              <a:rPr lang="en-CA" dirty="0"/>
-              <a:t>()</a:t>
-            </a:r>
-          </a:p>
-        </p:txBody>
-      </p:sp>
-      <p:sp>
-        <p:nvSpPr>
-          <p:cNvPr id="6" name="TextBox 5">
-            <a:extLst>
-              <a:ext uri="{FF2B5EF4-FFF2-40B4-BE49-F238E27FC236}">
-                <a16:creationId xmlns:a16="http://schemas.microsoft.com/office/drawing/2014/main" id="{E96240DA-3D70-85C1-6C32-466F7ED30D61}"/>
-              </a:ext>
-            </a:extLst>
-          </p:cNvPr>
-          <p:cNvSpPr txBox="1"/>
-          <p:nvPr/>
-        </p:nvSpPr>
-        <p:spPr>
-          <a:xfrm>
-            <a:off x="533400" y="3733800"/>
-            <a:ext cx="8153400" cy="2554545"/>
-          </a:xfrm>
-          <a:prstGeom prst="rect">
-            <a:avLst/>
-          </a:prstGeom>
-          <a:solidFill>
-            <a:schemeClr val="accent6">
-              <a:lumMod val="20000"/>
-              <a:lumOff val="80000"/>
-              <a:alpha val="60000"/>
-            </a:schemeClr>
-          </a:solidFill>
-        </p:spPr>
-        <p:txBody>
-          <a:bodyPr wrap="square" rtlCol="0">
-            <a:spAutoFit/>
-          </a:bodyPr>
-          <a:lstStyle/>
-          <a:p>
-            <a:r>
-              <a:rPr lang="en-CA" sz="1600" dirty="0">
-                <a:latin typeface="Courier New" panose="02070309020205020404" pitchFamily="49" charset="0"/>
-                <a:cs typeface="Courier New" panose="02070309020205020404" pitchFamily="49" charset="0"/>
-              </a:rPr>
-              <a:t> </a:t>
-            </a:r>
-            <a:r>
-              <a:rPr lang="en-CA" sz="1600" dirty="0" err="1">
-                <a:latin typeface="Courier New" panose="02070309020205020404" pitchFamily="49" charset="0"/>
-                <a:cs typeface="Courier New" panose="02070309020205020404" pitchFamily="49" charset="0"/>
-              </a:rPr>
-              <a:t>logitB</a:t>
-            </a:r>
-            <a:r>
-              <a:rPr lang="en-CA" sz="1600" dirty="0">
-                <a:latin typeface="Courier New" panose="02070309020205020404" pitchFamily="49" charset="0"/>
-                <a:cs typeface="Courier New" panose="02070309020205020404" pitchFamily="49" charset="0"/>
-              </a:rPr>
-              <a:t> </a:t>
-            </a:r>
-            <a:r>
-              <a:rPr lang="en-CA" sz="1600" dirty="0" err="1">
-                <a:latin typeface="Courier New" panose="02070309020205020404" pitchFamily="49" charset="0"/>
-                <a:cs typeface="Courier New" panose="02070309020205020404" pitchFamily="49" charset="0"/>
-              </a:rPr>
-              <a:t>logitW</a:t>
-            </a:r>
-            <a:r>
-              <a:rPr lang="en-CA" sz="1600" dirty="0">
-                <a:latin typeface="Courier New" panose="02070309020205020404" pitchFamily="49" charset="0"/>
-                <a:cs typeface="Courier New" panose="02070309020205020404" pitchFamily="49" charset="0"/>
-              </a:rPr>
-              <a:t> </a:t>
-            </a:r>
-            <a:r>
-              <a:rPr lang="en-CA" sz="1600" dirty="0" err="1">
-                <a:latin typeface="Courier New" panose="02070309020205020404" pitchFamily="49" charset="0"/>
-                <a:cs typeface="Courier New" panose="02070309020205020404" pitchFamily="49" charset="0"/>
-              </a:rPr>
-              <a:t>logOR</a:t>
-            </a:r>
-            <a:r>
-              <a:rPr lang="en-CA" sz="1600" dirty="0">
-                <a:latin typeface="Courier New" panose="02070309020205020404" pitchFamily="49" charset="0"/>
-                <a:cs typeface="Courier New" panose="02070309020205020404" pitchFamily="49" charset="0"/>
-              </a:rPr>
-              <a:t> age </a:t>
-            </a:r>
-            <a:r>
-              <a:rPr lang="en-CA" sz="1600" dirty="0" err="1">
-                <a:latin typeface="Courier New" panose="02070309020205020404" pitchFamily="49" charset="0"/>
-                <a:cs typeface="Courier New" panose="02070309020205020404" pitchFamily="49" charset="0"/>
-              </a:rPr>
-              <a:t>Age</a:t>
-            </a:r>
-            <a:endParaRPr lang="en-CA" sz="1600" dirty="0">
-              <a:latin typeface="Courier New" panose="02070309020205020404" pitchFamily="49" charset="0"/>
-              <a:cs typeface="Courier New" panose="02070309020205020404" pitchFamily="49" charset="0"/>
-            </a:endParaRPr>
-          </a:p>
-          <a:p>
-            <a:r>
-              <a:rPr lang="en-CA" sz="1600" dirty="0">
-                <a:latin typeface="Courier New" panose="02070309020205020404" pitchFamily="49" charset="0"/>
-                <a:cs typeface="Courier New" panose="02070309020205020404" pitchFamily="49" charset="0"/>
-              </a:rPr>
-              <a:t>1 -4.736 -2.868  3.20  22  -4</a:t>
-            </a:r>
-          </a:p>
-          <a:p>
-            <a:r>
-              <a:rPr lang="en-CA" sz="1600" dirty="0">
-                <a:latin typeface="Courier New" panose="02070309020205020404" pitchFamily="49" charset="0"/>
-                <a:cs typeface="Courier New" panose="02070309020205020404" pitchFamily="49" charset="0"/>
-              </a:rPr>
-              <a:t>2 -3.977 -2.557  3.66  27  -3</a:t>
-            </a:r>
-          </a:p>
-          <a:p>
-            <a:r>
-              <a:rPr lang="en-CA" sz="1600" dirty="0">
-                <a:latin typeface="Courier New" panose="02070309020205020404" pitchFamily="49" charset="0"/>
-                <a:cs typeface="Courier New" panose="02070309020205020404" pitchFamily="49" charset="0"/>
-              </a:rPr>
-              <a:t>3 -3.317 -2.094  3.38  32  -2</a:t>
-            </a:r>
-          </a:p>
-          <a:p>
-            <a:r>
-              <a:rPr lang="en-CA" sz="1600" dirty="0">
-                <a:latin typeface="Courier New" panose="02070309020205020404" pitchFamily="49" charset="0"/>
-                <a:cs typeface="Courier New" panose="02070309020205020404" pitchFamily="49" charset="0"/>
-              </a:rPr>
-              <a:t>4 -2.733 -1.848  3.13  37  -1</a:t>
-            </a:r>
-          </a:p>
-          <a:p>
-            <a:r>
-              <a:rPr lang="en-CA" sz="1600" dirty="0">
-                <a:latin typeface="Courier New" panose="02070309020205020404" pitchFamily="49" charset="0"/>
-                <a:cs typeface="Courier New" panose="02070309020205020404" pitchFamily="49" charset="0"/>
-              </a:rPr>
-              <a:t>5 -2.215 -1.420  3.01  42   0</a:t>
-            </a:r>
-          </a:p>
-          <a:p>
-            <a:r>
-              <a:rPr lang="en-CA" sz="1600" dirty="0">
-                <a:latin typeface="Courier New" panose="02070309020205020404" pitchFamily="49" charset="0"/>
-                <a:cs typeface="Courier New" panose="02070309020205020404" pitchFamily="49" charset="0"/>
-              </a:rPr>
-              <a:t>6 -1.739 -1.109  2.78  47   1</a:t>
-            </a:r>
-          </a:p>
-          <a:p>
-            <a:r>
-              <a:rPr lang="en-CA" sz="1600" dirty="0">
-                <a:latin typeface="Courier New" panose="02070309020205020404" pitchFamily="49" charset="0"/>
-                <a:cs typeface="Courier New" panose="02070309020205020404" pitchFamily="49" charset="0"/>
-              </a:rPr>
-              <a:t>7 -1.101 -0.797  2.92  52   2</a:t>
-            </a:r>
-          </a:p>
-          <a:p>
-            <a:r>
-              <a:rPr lang="en-CA" sz="1600" dirty="0">
-                <a:latin typeface="Courier New" panose="02070309020205020404" pitchFamily="49" charset="0"/>
-                <a:cs typeface="Courier New" panose="02070309020205020404" pitchFamily="49" charset="0"/>
-              </a:rPr>
-              <a:t>8 -0.758 -0.572  2.44  57   3</a:t>
-            </a:r>
-          </a:p>
-          <a:p>
-            <a:r>
-              <a:rPr lang="en-CA" sz="1600" dirty="0">
-                <a:latin typeface="Courier New" panose="02070309020205020404" pitchFamily="49" charset="0"/>
-                <a:cs typeface="Courier New" panose="02070309020205020404" pitchFamily="49" charset="0"/>
-              </a:rPr>
-              <a:t>9 -0.319 -0.226  2.63  62   4</a:t>
-            </a:r>
-          </a:p>
-        </p:txBody>
-      </p:sp>
-    </p:spTree>
-    <p:extLst>
-      <p:ext uri="{BB962C8B-B14F-4D97-AF65-F5344CB8AC3E}">
-        <p14:creationId xmlns:p14="http://schemas.microsoft.com/office/powerpoint/2010/main" val="3842136123"/>
-      </p:ext>
-    </p:extLst>
-  </p:cSld>
-  <p:clrMapOvr>
-    <a:masterClrMapping/>
-  </p:clrMapOvr>
-  <mc:AlternateContent xmlns:mc="http://schemas.openxmlformats.org/markup-compatibility/2006" xmlns:p14="http://schemas.microsoft.com/office/powerpoint/2010/main">
-    <mc:Choice Requires="p14">
-      <p:transition spd="slow" p14:dur="2000">
-        <p14:prism isContent="1"/>
-      </p:transition>
-    </mc:Choice>
-    <mc:Fallback xmlns="">
-      <p:transition spd="slow">
-        <p:fade/>
-      </p:transition>
-    </mc:Fallback>
-  </mc:AlternateContent>
-</p:sld>
-</file>
-
 <file path=ppt/slides/slide42.xml><?xml version="1.0" encoding="utf-8"?>
 <p:sld xmlns:a="http://schemas.openxmlformats.org/drawingml/2006/main" xmlns:r="http://schemas.openxmlformats.org/officeDocument/2006/relationships" xmlns:p="http://schemas.openxmlformats.org/presentationml/2006/main">
   <p:cSld>
@@ -14073,7 +13706,7 @@
           <p:cNvPr id="2" name="Title 1">
             <a:extLst>
               <a:ext uri="{FF2B5EF4-FFF2-40B4-BE49-F238E27FC236}">
-                <a16:creationId xmlns:a16="http://schemas.microsoft.com/office/drawing/2014/main" id="{09D72CF6-1A4E-1ACE-0A8F-90CD70F06062}"/>
+                <a16:creationId xmlns:a16="http://schemas.microsoft.com/office/drawing/2014/main" id="{D139FA0C-F38F-576E-483D-FA47E1EBB8E7}"/>
               </a:ext>
             </a:extLst>
           </p:cNvPr>
@@ -14087,13 +13720,13 @@
         <p:spPr/>
         <p:txBody>
           <a:bodyPr>
-            <a:normAutofit/>
+            <a:normAutofit fontScale="90000"/>
           </a:bodyPr>
           <a:lstStyle/>
           <a:p>
             <a:r>
-              <a:rPr lang="en-CA" sz="3200" dirty="0"/>
-              <a:t>Linear model for log odds and log odds ratios</a:t>
+              <a:rPr lang="en-CA" dirty="0"/>
+              <a:t>Calculating…</a:t>
             </a:r>
           </a:p>
         </p:txBody>
@@ -14103,7 +13736,7 @@
           <p:cNvPr id="3" name="Slide Number Placeholder 2">
             <a:extLst>
               <a:ext uri="{FF2B5EF4-FFF2-40B4-BE49-F238E27FC236}">
-                <a16:creationId xmlns:a16="http://schemas.microsoft.com/office/drawing/2014/main" id="{03342D3D-5E22-FBB3-FC53-2E485B19119D}"/>
+                <a16:creationId xmlns:a16="http://schemas.microsoft.com/office/drawing/2014/main" id="{A832CDFA-313D-A62E-0204-D5BA7FEA5D14}"/>
               </a:ext>
             </a:extLst>
           </p:cNvPr>
@@ -14127,42 +13760,239 @@
           </a:p>
         </p:txBody>
       </p:sp>
-      <p:pic>
-        <p:nvPicPr>
-          <p:cNvPr id="5" name="Picture 4">
-            <a:extLst>
-              <a:ext uri="{FF2B5EF4-FFF2-40B4-BE49-F238E27FC236}">
-                <a16:creationId xmlns:a16="http://schemas.microsoft.com/office/drawing/2014/main" id="{BB72F882-678B-F214-250C-5CFEABBEC268}"/>
-              </a:ext>
-            </a:extLst>
-          </p:cNvPr>
-          <p:cNvPicPr>
-            <a:picLocks noChangeAspect="1"/>
-          </p:cNvPicPr>
+      <p:sp>
+        <p:nvSpPr>
+          <p:cNvPr id="4" name="TextBox 3">
+            <a:extLst>
+              <a:ext uri="{FF2B5EF4-FFF2-40B4-BE49-F238E27FC236}">
+                <a16:creationId xmlns:a16="http://schemas.microsoft.com/office/drawing/2014/main" id="{7C0E9332-31E1-7D1B-C75D-4049297B597D}"/>
+              </a:ext>
+            </a:extLst>
+          </p:cNvPr>
+          <p:cNvSpPr txBox="1"/>
           <p:nvPr/>
-        </p:nvPicPr>
-        <p:blipFill>
-          <a:blip r:embed="rId2"/>
-          <a:stretch>
-            <a:fillRect/>
-          </a:stretch>
-        </p:blipFill>
+        </p:nvSpPr>
         <p:spPr>
           <a:xfrm>
-            <a:off x="486286" y="1562695"/>
-            <a:ext cx="8171428" cy="4761905"/>
+            <a:off x="457200" y="1577876"/>
+            <a:ext cx="8229600" cy="1815882"/>
           </a:xfrm>
           <a:prstGeom prst="rect">
             <a:avLst/>
           </a:prstGeom>
+          <a:solidFill>
+            <a:schemeClr val="accent6">
+              <a:lumMod val="20000"/>
+              <a:lumOff val="80000"/>
+              <a:alpha val="60000"/>
+            </a:schemeClr>
+          </a:solidFill>
         </p:spPr>
-      </p:pic>
-      <p:sp>
-        <p:nvSpPr>
-          <p:cNvPr id="6" name="TextBox 5">
-            <a:extLst>
-              <a:ext uri="{FF2B5EF4-FFF2-40B4-BE49-F238E27FC236}">
-                <a16:creationId xmlns:a16="http://schemas.microsoft.com/office/drawing/2014/main" id="{A4530166-87A4-1D76-5DD6-9E048BECFD15}"/>
+        <p:txBody>
+          <a:bodyPr wrap="square" rtlCol="0">
+            <a:spAutoFit/>
+          </a:bodyPr>
+          <a:lstStyle/>
+          <a:p>
+            <a:r>
+              <a:rPr lang="en-CA" sz="1400" dirty="0">
+                <a:latin typeface="Courier New" panose="02070309020205020404" pitchFamily="49" charset="0"/>
+                <a:cs typeface="Courier New" panose="02070309020205020404" pitchFamily="49" charset="0"/>
+              </a:rPr>
+              <a:t>data(coalminers, package = "VGAM")</a:t>
+            </a:r>
+          </a:p>
+          <a:p>
+            <a:r>
+              <a:rPr lang="en-CA" sz="1400" dirty="0">
+                <a:latin typeface="Courier New" panose="02070309020205020404" pitchFamily="49" charset="0"/>
+                <a:cs typeface="Courier New" panose="02070309020205020404" pitchFamily="49" charset="0"/>
+              </a:rPr>
+              <a:t>coalminers &lt;- transform(coalminers, Age = (age - 42) / 5)</a:t>
+            </a:r>
+          </a:p>
+          <a:p>
+            <a:endParaRPr lang="en-CA" sz="1400" dirty="0">
+              <a:latin typeface="Courier New" panose="02070309020205020404" pitchFamily="49" charset="0"/>
+              <a:cs typeface="Courier New" panose="02070309020205020404" pitchFamily="49" charset="0"/>
+            </a:endParaRPr>
+          </a:p>
+          <a:p>
+            <a:r>
+              <a:rPr lang="en-CA" sz="1400" dirty="0" err="1">
+                <a:latin typeface="Courier New" panose="02070309020205020404" pitchFamily="49" charset="0"/>
+                <a:cs typeface="Courier New" panose="02070309020205020404" pitchFamily="49" charset="0"/>
+              </a:rPr>
+              <a:t>logitsCM</a:t>
+            </a:r>
+            <a:r>
+              <a:rPr lang="en-CA" sz="1400" dirty="0">
+                <a:latin typeface="Courier New" panose="02070309020205020404" pitchFamily="49" charset="0"/>
+                <a:cs typeface="Courier New" panose="02070309020205020404" pitchFamily="49" charset="0"/>
+              </a:rPr>
+              <a:t> &lt;- </a:t>
+            </a:r>
+            <a:r>
+              <a:rPr lang="en-CA" sz="1400" dirty="0" err="1">
+                <a:latin typeface="Courier New" panose="02070309020205020404" pitchFamily="49" charset="0"/>
+                <a:cs typeface="Courier New" panose="02070309020205020404" pitchFamily="49" charset="0"/>
+              </a:rPr>
+              <a:t>vcdExtra</a:t>
+            </a:r>
+            <a:r>
+              <a:rPr lang="en-CA" sz="1400" dirty="0">
+                <a:latin typeface="Courier New" panose="02070309020205020404" pitchFamily="49" charset="0"/>
+                <a:cs typeface="Courier New" panose="02070309020205020404" pitchFamily="49" charset="0"/>
+              </a:rPr>
+              <a:t>::</a:t>
+            </a:r>
+            <a:r>
+              <a:rPr lang="en-CA" sz="1400" dirty="0" err="1">
+                <a:latin typeface="Courier New" panose="02070309020205020404" pitchFamily="49" charset="0"/>
+                <a:cs typeface="Courier New" panose="02070309020205020404" pitchFamily="49" charset="0"/>
+              </a:rPr>
+              <a:t>blogits</a:t>
+            </a:r>
+            <a:r>
+              <a:rPr lang="en-CA" sz="1400" dirty="0">
+                <a:latin typeface="Courier New" panose="02070309020205020404" pitchFamily="49" charset="0"/>
+                <a:cs typeface="Courier New" panose="02070309020205020404" pitchFamily="49" charset="0"/>
+              </a:rPr>
+              <a:t>(coalminers[, 1:4], add = 0.5)</a:t>
+            </a:r>
+          </a:p>
+          <a:p>
+            <a:r>
+              <a:rPr lang="en-CA" sz="1400" dirty="0" err="1">
+                <a:latin typeface="Courier New" panose="02070309020205020404" pitchFamily="49" charset="0"/>
+                <a:cs typeface="Courier New" panose="02070309020205020404" pitchFamily="49" charset="0"/>
+              </a:rPr>
+              <a:t>colnames</a:t>
+            </a:r>
+            <a:r>
+              <a:rPr lang="en-CA" sz="1400" dirty="0">
+                <a:latin typeface="Courier New" panose="02070309020205020404" pitchFamily="49" charset="0"/>
+                <a:cs typeface="Courier New" panose="02070309020205020404" pitchFamily="49" charset="0"/>
+              </a:rPr>
+              <a:t>(</a:t>
+            </a:r>
+            <a:r>
+              <a:rPr lang="en-CA" sz="1400" dirty="0" err="1">
+                <a:latin typeface="Courier New" panose="02070309020205020404" pitchFamily="49" charset="0"/>
+                <a:cs typeface="Courier New" panose="02070309020205020404" pitchFamily="49" charset="0"/>
+              </a:rPr>
+              <a:t>logitsCM</a:t>
+            </a:r>
+            <a:r>
+              <a:rPr lang="en-CA" sz="1400" dirty="0">
+                <a:latin typeface="Courier New" panose="02070309020205020404" pitchFamily="49" charset="0"/>
+                <a:cs typeface="Courier New" panose="02070309020205020404" pitchFamily="49" charset="0"/>
+              </a:rPr>
+              <a:t>)[1:2] &lt;- c("</a:t>
+            </a:r>
+            <a:r>
+              <a:rPr lang="en-CA" sz="1400" dirty="0" err="1">
+                <a:latin typeface="Courier New" panose="02070309020205020404" pitchFamily="49" charset="0"/>
+                <a:cs typeface="Courier New" panose="02070309020205020404" pitchFamily="49" charset="0"/>
+              </a:rPr>
+              <a:t>logitB</a:t>
+            </a:r>
+            <a:r>
+              <a:rPr lang="en-CA" sz="1400" dirty="0">
+                <a:latin typeface="Courier New" panose="02070309020205020404" pitchFamily="49" charset="0"/>
+                <a:cs typeface="Courier New" panose="02070309020205020404" pitchFamily="49" charset="0"/>
+              </a:rPr>
+              <a:t>", "</a:t>
+            </a:r>
+            <a:r>
+              <a:rPr lang="en-CA" sz="1400" dirty="0" err="1">
+                <a:latin typeface="Courier New" panose="02070309020205020404" pitchFamily="49" charset="0"/>
+                <a:cs typeface="Courier New" panose="02070309020205020404" pitchFamily="49" charset="0"/>
+              </a:rPr>
+              <a:t>logitW</a:t>
+            </a:r>
+            <a:r>
+              <a:rPr lang="en-CA" sz="1400" dirty="0">
+                <a:latin typeface="Courier New" panose="02070309020205020404" pitchFamily="49" charset="0"/>
+                <a:cs typeface="Courier New" panose="02070309020205020404" pitchFamily="49" charset="0"/>
+              </a:rPr>
+              <a:t>")</a:t>
+            </a:r>
+          </a:p>
+          <a:p>
+            <a:r>
+              <a:rPr lang="en-CA" sz="1400" dirty="0" err="1">
+                <a:latin typeface="Courier New" panose="02070309020205020404" pitchFamily="49" charset="0"/>
+                <a:cs typeface="Courier New" panose="02070309020205020404" pitchFamily="49" charset="0"/>
+              </a:rPr>
+              <a:t>logitsCM</a:t>
+            </a:r>
+            <a:r>
+              <a:rPr lang="en-CA" sz="1400" dirty="0">
+                <a:latin typeface="Courier New" panose="02070309020205020404" pitchFamily="49" charset="0"/>
+                <a:cs typeface="Courier New" panose="02070309020205020404" pitchFamily="49" charset="0"/>
+              </a:rPr>
+              <a:t> &lt;- </a:t>
+            </a:r>
+            <a:r>
+              <a:rPr lang="en-CA" sz="1400" dirty="0" err="1">
+                <a:latin typeface="Courier New" panose="02070309020205020404" pitchFamily="49" charset="0"/>
+                <a:cs typeface="Courier New" panose="02070309020205020404" pitchFamily="49" charset="0"/>
+              </a:rPr>
+              <a:t>cbind</a:t>
+            </a:r>
+            <a:r>
+              <a:rPr lang="en-CA" sz="1400" dirty="0">
+                <a:latin typeface="Courier New" panose="02070309020205020404" pitchFamily="49" charset="0"/>
+                <a:cs typeface="Courier New" panose="02070309020205020404" pitchFamily="49" charset="0"/>
+              </a:rPr>
+              <a:t>(</a:t>
+            </a:r>
+            <a:r>
+              <a:rPr lang="en-CA" sz="1400" dirty="0" err="1">
+                <a:latin typeface="Courier New" panose="02070309020205020404" pitchFamily="49" charset="0"/>
+                <a:cs typeface="Courier New" panose="02070309020205020404" pitchFamily="49" charset="0"/>
+              </a:rPr>
+              <a:t>logitsCM</a:t>
+            </a:r>
+            <a:r>
+              <a:rPr lang="en-CA" sz="1400" dirty="0">
+                <a:latin typeface="Courier New" panose="02070309020205020404" pitchFamily="49" charset="0"/>
+                <a:cs typeface="Courier New" panose="02070309020205020404" pitchFamily="49" charset="0"/>
+              </a:rPr>
+              <a:t>,</a:t>
+            </a:r>
+          </a:p>
+          <a:p>
+            <a:r>
+              <a:rPr lang="en-CA" sz="1400" dirty="0">
+                <a:latin typeface="Courier New" panose="02070309020205020404" pitchFamily="49" charset="0"/>
+                <a:cs typeface="Courier New" panose="02070309020205020404" pitchFamily="49" charset="0"/>
+              </a:rPr>
+              <a:t>                  coalminers[, c("age", "Age")])</a:t>
+            </a:r>
+          </a:p>
+          <a:p>
+            <a:r>
+              <a:rPr lang="en-CA" sz="1400" dirty="0" err="1">
+                <a:latin typeface="Courier New" panose="02070309020205020404" pitchFamily="49" charset="0"/>
+                <a:cs typeface="Courier New" panose="02070309020205020404" pitchFamily="49" charset="0"/>
+              </a:rPr>
+              <a:t>logitsCM</a:t>
+            </a:r>
+            <a:endParaRPr lang="en-CA" sz="1400" dirty="0">
+              <a:latin typeface="Courier New" panose="02070309020205020404" pitchFamily="49" charset="0"/>
+              <a:cs typeface="Courier New" panose="02070309020205020404" pitchFamily="49" charset="0"/>
+            </a:endParaRPr>
+          </a:p>
+        </p:txBody>
+      </p:sp>
+      <p:sp>
+        <p:nvSpPr>
+          <p:cNvPr id="5" name="TextBox 4">
+            <a:extLst>
+              <a:ext uri="{FF2B5EF4-FFF2-40B4-BE49-F238E27FC236}">
+                <a16:creationId xmlns:a16="http://schemas.microsoft.com/office/drawing/2014/main" id="{7B5225C8-CEBC-29A5-B961-9954BD763DBC}"/>
               </a:ext>
             </a:extLst>
           </p:cNvPr>
@@ -14171,8 +14001,8 @@
         </p:nvSpPr>
         <p:spPr>
           <a:xfrm>
-            <a:off x="6019800" y="1676400"/>
-            <a:ext cx="2438400" cy="1200329"/>
+            <a:off x="457200" y="1143000"/>
+            <a:ext cx="8229600" cy="381000"/>
           </a:xfrm>
           <a:prstGeom prst="rect">
             <a:avLst/>
@@ -14187,7 +14017,201 @@
           <a:p>
             <a:r>
               <a:rPr lang="en-CA" dirty="0"/>
-              <a:t>Log odds &amp; LORs have similar scales, so it is not terrible to plot them together</a:t>
+              <a:t>Logits and log odds for a bivariate response can be calculated with </a:t>
+            </a:r>
+            <a:r>
+              <a:rPr lang="en-CA" dirty="0" err="1"/>
+              <a:t>vcdExtra</a:t>
+            </a:r>
+            <a:r>
+              <a:rPr lang="en-CA" dirty="0"/>
+              <a:t>::</a:t>
+            </a:r>
+            <a:r>
+              <a:rPr lang="en-CA" dirty="0" err="1"/>
+              <a:t>blogits</a:t>
+            </a:r>
+            <a:r>
+              <a:rPr lang="en-CA" dirty="0"/>
+              <a:t>()</a:t>
+            </a:r>
+          </a:p>
+        </p:txBody>
+      </p:sp>
+      <p:sp>
+        <p:nvSpPr>
+          <p:cNvPr id="6" name="TextBox 5">
+            <a:extLst>
+              <a:ext uri="{FF2B5EF4-FFF2-40B4-BE49-F238E27FC236}">
+                <a16:creationId xmlns:a16="http://schemas.microsoft.com/office/drawing/2014/main" id="{E96240DA-3D70-85C1-6C32-466F7ED30D61}"/>
+              </a:ext>
+            </a:extLst>
+          </p:cNvPr>
+          <p:cNvSpPr txBox="1"/>
+          <p:nvPr/>
+        </p:nvSpPr>
+        <p:spPr>
+          <a:xfrm>
+            <a:off x="533400" y="3733800"/>
+            <a:ext cx="8153400" cy="2554545"/>
+          </a:xfrm>
+          <a:prstGeom prst="rect">
+            <a:avLst/>
+          </a:prstGeom>
+          <a:solidFill>
+            <a:schemeClr val="accent6">
+              <a:lumMod val="20000"/>
+              <a:lumOff val="80000"/>
+              <a:alpha val="60000"/>
+            </a:schemeClr>
+          </a:solidFill>
+        </p:spPr>
+        <p:txBody>
+          <a:bodyPr wrap="square" rtlCol="0">
+            <a:spAutoFit/>
+          </a:bodyPr>
+          <a:lstStyle/>
+          <a:p>
+            <a:r>
+              <a:rPr lang="en-CA" sz="1600" dirty="0">
+                <a:latin typeface="Courier New" panose="02070309020205020404" pitchFamily="49" charset="0"/>
+                <a:cs typeface="Courier New" panose="02070309020205020404" pitchFamily="49" charset="0"/>
+              </a:rPr>
+              <a:t> </a:t>
+            </a:r>
+            <a:r>
+              <a:rPr lang="en-CA" sz="1600" dirty="0" err="1">
+                <a:latin typeface="Courier New" panose="02070309020205020404" pitchFamily="49" charset="0"/>
+                <a:cs typeface="Courier New" panose="02070309020205020404" pitchFamily="49" charset="0"/>
+              </a:rPr>
+              <a:t>logitB</a:t>
+            </a:r>
+            <a:r>
+              <a:rPr lang="en-CA" sz="1600" dirty="0">
+                <a:latin typeface="Courier New" panose="02070309020205020404" pitchFamily="49" charset="0"/>
+                <a:cs typeface="Courier New" panose="02070309020205020404" pitchFamily="49" charset="0"/>
+              </a:rPr>
+              <a:t> </a:t>
+            </a:r>
+            <a:r>
+              <a:rPr lang="en-CA" sz="1600" dirty="0" err="1">
+                <a:latin typeface="Courier New" panose="02070309020205020404" pitchFamily="49" charset="0"/>
+                <a:cs typeface="Courier New" panose="02070309020205020404" pitchFamily="49" charset="0"/>
+              </a:rPr>
+              <a:t>logitW</a:t>
+            </a:r>
+            <a:r>
+              <a:rPr lang="en-CA" sz="1600" dirty="0">
+                <a:latin typeface="Courier New" panose="02070309020205020404" pitchFamily="49" charset="0"/>
+                <a:cs typeface="Courier New" panose="02070309020205020404" pitchFamily="49" charset="0"/>
+              </a:rPr>
+              <a:t> </a:t>
+            </a:r>
+            <a:r>
+              <a:rPr lang="en-CA" sz="1600" dirty="0" err="1">
+                <a:latin typeface="Courier New" panose="02070309020205020404" pitchFamily="49" charset="0"/>
+                <a:cs typeface="Courier New" panose="02070309020205020404" pitchFamily="49" charset="0"/>
+              </a:rPr>
+              <a:t>logOR</a:t>
+            </a:r>
+            <a:r>
+              <a:rPr lang="en-CA" sz="1600" dirty="0">
+                <a:latin typeface="Courier New" panose="02070309020205020404" pitchFamily="49" charset="0"/>
+                <a:cs typeface="Courier New" panose="02070309020205020404" pitchFamily="49" charset="0"/>
+              </a:rPr>
+              <a:t> age </a:t>
+            </a:r>
+            <a:r>
+              <a:rPr lang="en-CA" sz="1600" dirty="0" err="1">
+                <a:latin typeface="Courier New" panose="02070309020205020404" pitchFamily="49" charset="0"/>
+                <a:cs typeface="Courier New" panose="02070309020205020404" pitchFamily="49" charset="0"/>
+              </a:rPr>
+              <a:t>Age</a:t>
+            </a:r>
+            <a:endParaRPr lang="en-CA" sz="1600" dirty="0">
+              <a:latin typeface="Courier New" panose="02070309020205020404" pitchFamily="49" charset="0"/>
+              <a:cs typeface="Courier New" panose="02070309020205020404" pitchFamily="49" charset="0"/>
+            </a:endParaRPr>
+          </a:p>
+          <a:p>
+            <a:r>
+              <a:rPr lang="en-CA" sz="1600" dirty="0">
+                <a:latin typeface="Courier New" panose="02070309020205020404" pitchFamily="49" charset="0"/>
+                <a:cs typeface="Courier New" panose="02070309020205020404" pitchFamily="49" charset="0"/>
+              </a:rPr>
+              <a:t>1 -4.736 -2.868  3.20  22  -4</a:t>
+            </a:r>
+          </a:p>
+          <a:p>
+            <a:r>
+              <a:rPr lang="en-CA" sz="1600" dirty="0">
+                <a:latin typeface="Courier New" panose="02070309020205020404" pitchFamily="49" charset="0"/>
+                <a:cs typeface="Courier New" panose="02070309020205020404" pitchFamily="49" charset="0"/>
+              </a:rPr>
+              <a:t>2 -3.977 -2.557  3.66  27  -3</a:t>
+            </a:r>
+          </a:p>
+          <a:p>
+            <a:r>
+              <a:rPr lang="en-CA" sz="1600" dirty="0">
+                <a:latin typeface="Courier New" panose="02070309020205020404" pitchFamily="49" charset="0"/>
+                <a:cs typeface="Courier New" panose="02070309020205020404" pitchFamily="49" charset="0"/>
+              </a:rPr>
+              <a:t>3 -3.317 -2.094  3.38  32  -2</a:t>
+            </a:r>
+          </a:p>
+          <a:p>
+            <a:r>
+              <a:rPr lang="en-CA" sz="1600" dirty="0">
+                <a:latin typeface="Courier New" panose="02070309020205020404" pitchFamily="49" charset="0"/>
+                <a:cs typeface="Courier New" panose="02070309020205020404" pitchFamily="49" charset="0"/>
+              </a:rPr>
+              <a:t>4 -2.733 -1.848  3.13  37  -1</a:t>
+            </a:r>
+          </a:p>
+          <a:p>
+            <a:r>
+              <a:rPr lang="en-CA" sz="1600" dirty="0">
+                <a:latin typeface="Courier New" panose="02070309020205020404" pitchFamily="49" charset="0"/>
+                <a:cs typeface="Courier New" panose="02070309020205020404" pitchFamily="49" charset="0"/>
+              </a:rPr>
+              <a:t>5 -2.215 -1.420  3.01  42   0</a:t>
+            </a:r>
+          </a:p>
+          <a:p>
+            <a:r>
+              <a:rPr lang="en-CA" sz="1600" dirty="0">
+                <a:latin typeface="Courier New" panose="02070309020205020404" pitchFamily="49" charset="0"/>
+                <a:cs typeface="Courier New" panose="02070309020205020404" pitchFamily="49" charset="0"/>
+              </a:rPr>
+              <a:t>6 -1.739 -1.109  2.78  47   1</a:t>
+            </a:r>
+          </a:p>
+          <a:p>
+            <a:r>
+              <a:rPr lang="en-CA" sz="1600" dirty="0">
+                <a:latin typeface="Courier New" panose="02070309020205020404" pitchFamily="49" charset="0"/>
+                <a:cs typeface="Courier New" panose="02070309020205020404" pitchFamily="49" charset="0"/>
+              </a:rPr>
+              <a:t>7 -1.101 -0.797  2.92  52   2</a:t>
+            </a:r>
+          </a:p>
+          <a:p>
+            <a:r>
+              <a:rPr lang="en-CA" sz="1600" dirty="0">
+                <a:latin typeface="Courier New" panose="02070309020205020404" pitchFamily="49" charset="0"/>
+                <a:cs typeface="Courier New" panose="02070309020205020404" pitchFamily="49" charset="0"/>
+              </a:rPr>
+              <a:t>8 -0.758 -0.572  2.44  57   3</a:t>
+            </a:r>
+          </a:p>
+          <a:p>
+            <a:r>
+              <a:rPr lang="en-CA" sz="1600" dirty="0">
+                <a:latin typeface="Courier New" panose="02070309020205020404" pitchFamily="49" charset="0"/>
+                <a:cs typeface="Courier New" panose="02070309020205020404" pitchFamily="49" charset="0"/>
+              </a:rPr>
+              <a:t>9 -0.319 -0.226  2.63  62   4</a:t>
             </a:r>
           </a:p>
         </p:txBody>
@@ -14195,7 +14219,7 @@
     </p:spTree>
     <p:extLst>
       <p:ext uri="{BB962C8B-B14F-4D97-AF65-F5344CB8AC3E}">
-        <p14:creationId xmlns:p14="http://schemas.microsoft.com/office/powerpoint/2010/main" val="1292110824"/>
+        <p14:creationId xmlns:p14="http://schemas.microsoft.com/office/powerpoint/2010/main" val="3842136123"/>
       </p:ext>
     </p:extLst>
   </p:cSld>
@@ -14288,6 +14312,172 @@
             <a:fld id="{621225AB-15B9-4C79-A121-04D1DC7E2307}" type="slidenum">
               <a:rPr lang="en-US" smtClean="0"/>
               <a:t>43</a:t>
+            </a:fld>
+            <a:endParaRPr lang="en-US"/>
+          </a:p>
+        </p:txBody>
+      </p:sp>
+      <p:pic>
+        <p:nvPicPr>
+          <p:cNvPr id="5" name="Picture 4">
+            <a:extLst>
+              <a:ext uri="{FF2B5EF4-FFF2-40B4-BE49-F238E27FC236}">
+                <a16:creationId xmlns:a16="http://schemas.microsoft.com/office/drawing/2014/main" id="{BB72F882-678B-F214-250C-5CFEABBEC268}"/>
+              </a:ext>
+            </a:extLst>
+          </p:cNvPr>
+          <p:cNvPicPr>
+            <a:picLocks noChangeAspect="1"/>
+          </p:cNvPicPr>
+          <p:nvPr/>
+        </p:nvPicPr>
+        <p:blipFill>
+          <a:blip r:embed="rId2"/>
+          <a:stretch>
+            <a:fillRect/>
+          </a:stretch>
+        </p:blipFill>
+        <p:spPr>
+          <a:xfrm>
+            <a:off x="486286" y="1562695"/>
+            <a:ext cx="8171428" cy="4761905"/>
+          </a:xfrm>
+          <a:prstGeom prst="rect">
+            <a:avLst/>
+          </a:prstGeom>
+        </p:spPr>
+      </p:pic>
+      <p:sp>
+        <p:nvSpPr>
+          <p:cNvPr id="6" name="TextBox 5">
+            <a:extLst>
+              <a:ext uri="{FF2B5EF4-FFF2-40B4-BE49-F238E27FC236}">
+                <a16:creationId xmlns:a16="http://schemas.microsoft.com/office/drawing/2014/main" id="{A4530166-87A4-1D76-5DD6-9E048BECFD15}"/>
+              </a:ext>
+            </a:extLst>
+          </p:cNvPr>
+          <p:cNvSpPr txBox="1"/>
+          <p:nvPr/>
+        </p:nvSpPr>
+        <p:spPr>
+          <a:xfrm>
+            <a:off x="6019800" y="1676400"/>
+            <a:ext cx="2438400" cy="1200329"/>
+          </a:xfrm>
+          <a:prstGeom prst="rect">
+            <a:avLst/>
+          </a:prstGeom>
+          <a:noFill/>
+        </p:spPr>
+        <p:txBody>
+          <a:bodyPr wrap="square" rtlCol="0">
+            <a:spAutoFit/>
+          </a:bodyPr>
+          <a:lstStyle/>
+          <a:p>
+            <a:r>
+              <a:rPr lang="en-CA" dirty="0"/>
+              <a:t>Log odds &amp; LORs have similar scales, so it is not terrible to plot them together</a:t>
+            </a:r>
+          </a:p>
+        </p:txBody>
+      </p:sp>
+    </p:spTree>
+    <p:extLst>
+      <p:ext uri="{BB962C8B-B14F-4D97-AF65-F5344CB8AC3E}">
+        <p14:creationId xmlns:p14="http://schemas.microsoft.com/office/powerpoint/2010/main" val="1292110824"/>
+      </p:ext>
+    </p:extLst>
+  </p:cSld>
+  <p:clrMapOvr>
+    <a:masterClrMapping/>
+  </p:clrMapOvr>
+  <mc:AlternateContent xmlns:mc="http://schemas.openxmlformats.org/markup-compatibility/2006" xmlns:p14="http://schemas.microsoft.com/office/powerpoint/2010/main">
+    <mc:Choice Requires="p14">
+      <p:transition spd="slow" p14:dur="2000">
+        <p14:prism isContent="1"/>
+      </p:transition>
+    </mc:Choice>
+    <mc:Fallback xmlns="">
+      <p:transition spd="slow">
+        <p:fade/>
+      </p:transition>
+    </mc:Fallback>
+  </mc:AlternateContent>
+</p:sld>
+</file>
+
+<file path=ppt/slides/slide44.xml><?xml version="1.0" encoding="utf-8"?>
+<p:sld xmlns:a="http://schemas.openxmlformats.org/drawingml/2006/main" xmlns:r="http://schemas.openxmlformats.org/officeDocument/2006/relationships" xmlns:p="http://schemas.openxmlformats.org/presentationml/2006/main">
+  <p:cSld>
+    <p:spTree>
+      <p:nvGrpSpPr>
+        <p:cNvPr id="1" name=""/>
+        <p:cNvGrpSpPr/>
+        <p:nvPr/>
+      </p:nvGrpSpPr>
+      <p:grpSpPr>
+        <a:xfrm>
+          <a:off x="0" y="0"/>
+          <a:ext cx="0" cy="0"/>
+          <a:chOff x="0" y="0"/>
+          <a:chExt cx="0" cy="0"/>
+        </a:xfrm>
+      </p:grpSpPr>
+      <p:sp>
+        <p:nvSpPr>
+          <p:cNvPr id="2" name="Title 1">
+            <a:extLst>
+              <a:ext uri="{FF2B5EF4-FFF2-40B4-BE49-F238E27FC236}">
+                <a16:creationId xmlns:a16="http://schemas.microsoft.com/office/drawing/2014/main" id="{09D72CF6-1A4E-1ACE-0A8F-90CD70F06062}"/>
+              </a:ext>
+            </a:extLst>
+          </p:cNvPr>
+          <p:cNvSpPr>
+            <a:spLocks noGrp="1"/>
+          </p:cNvSpPr>
+          <p:nvPr>
+            <p:ph type="title"/>
+          </p:nvPr>
+        </p:nvSpPr>
+        <p:spPr/>
+        <p:txBody>
+          <a:bodyPr>
+            <a:normAutofit/>
+          </a:bodyPr>
+          <a:lstStyle/>
+          <a:p>
+            <a:r>
+              <a:rPr lang="en-CA" sz="3200" dirty="0"/>
+              <a:t>Linear model for log odds and log odds ratios</a:t>
+            </a:r>
+          </a:p>
+        </p:txBody>
+      </p:sp>
+      <p:sp>
+        <p:nvSpPr>
+          <p:cNvPr id="3" name="Slide Number Placeholder 2">
+            <a:extLst>
+              <a:ext uri="{FF2B5EF4-FFF2-40B4-BE49-F238E27FC236}">
+                <a16:creationId xmlns:a16="http://schemas.microsoft.com/office/drawing/2014/main" id="{03342D3D-5E22-FBB3-FC53-2E485B19119D}"/>
+              </a:ext>
+            </a:extLst>
+          </p:cNvPr>
+          <p:cNvSpPr>
+            <a:spLocks noGrp="1"/>
+          </p:cNvSpPr>
+          <p:nvPr>
+            <p:ph type="sldNum" sz="quarter" idx="12"/>
+          </p:nvPr>
+        </p:nvSpPr>
+        <p:spPr/>
+        <p:txBody>
+          <a:bodyPr/>
+          <a:lstStyle/>
+          <a:p>
+            <a:fld id="{621225AB-15B9-4C79-A121-04D1DC7E2307}" type="slidenum">
+              <a:rPr lang="en-US" smtClean="0"/>
+              <a:t>44</a:t>
             </a:fld>
             <a:endParaRPr lang="en-US"/>
           </a:p>
@@ -14348,7 +14538,7 @@
 </p:sld>
 </file>
 
-<file path=ppt/slides/slide44.xml><?xml version="1.0" encoding="utf-8"?>
+<file path=ppt/slides/slide45.xml><?xml version="1.0" encoding="utf-8"?>
 <p:sld xmlns:a="http://schemas.openxmlformats.org/drawingml/2006/main" xmlns:r="http://schemas.openxmlformats.org/officeDocument/2006/relationships" xmlns:p="http://schemas.openxmlformats.org/presentationml/2006/main">
   <p:cSld>
     <p:spTree>
@@ -14418,7 +14608,7 @@
           <a:p>
             <a:fld id="{621225AB-15B9-4C79-A121-04D1DC7E2307}" type="slidenum">
               <a:rPr lang="en-US" smtClean="0"/>
-              <a:t>44</a:t>
+              <a:t>45</a:t>
             </a:fld>
             <a:endParaRPr lang="en-US"/>
           </a:p>
@@ -14479,7 +14669,7 @@
 </p:sld>
 </file>
 
-<file path=ppt/slides/slide45.xml><?xml version="1.0" encoding="utf-8"?>
+<file path=ppt/slides/slide46.xml><?xml version="1.0" encoding="utf-8"?>
 <p:sld xmlns:a="http://schemas.openxmlformats.org/drawingml/2006/main" xmlns:r="http://schemas.openxmlformats.org/officeDocument/2006/relationships" xmlns:p="http://schemas.openxmlformats.org/presentationml/2006/main">
   <p:cSld>
     <p:spTree>
@@ -14549,7 +14739,7 @@
           <a:p>
             <a:fld id="{621225AB-15B9-4C79-A121-04D1DC7E2307}" type="slidenum">
               <a:rPr lang="en-US" smtClean="0"/>
-              <a:t>45</a:t>
+              <a:t>46</a:t>
             </a:fld>
             <a:endParaRPr lang="en-US"/>
           </a:p>
@@ -15096,564 +15286,6 @@
     <p:extLst>
       <p:ext uri="{BB962C8B-B14F-4D97-AF65-F5344CB8AC3E}">
         <p14:creationId xmlns:p14="http://schemas.microsoft.com/office/powerpoint/2010/main" val="3070909274"/>
-      </p:ext>
-    </p:extLst>
-  </p:cSld>
-  <p:clrMapOvr>
-    <a:masterClrMapping/>
-  </p:clrMapOvr>
-  <mc:AlternateContent xmlns:mc="http://schemas.openxmlformats.org/markup-compatibility/2006" xmlns:p14="http://schemas.microsoft.com/office/powerpoint/2010/main">
-    <mc:Choice Requires="p14">
-      <p:transition spd="slow" p14:dur="2000">
-        <p14:prism isContent="1"/>
-      </p:transition>
-    </mc:Choice>
-    <mc:Fallback xmlns="">
-      <p:transition spd="slow">
-        <p:fade/>
-      </p:transition>
-    </mc:Fallback>
-  </mc:AlternateContent>
-</p:sld>
-</file>
-
-<file path=ppt/slides/slide46.xml><?xml version="1.0" encoding="utf-8"?>
-<p:sld xmlns:a="http://schemas.openxmlformats.org/drawingml/2006/main" xmlns:r="http://schemas.openxmlformats.org/officeDocument/2006/relationships" xmlns:p="http://schemas.openxmlformats.org/presentationml/2006/main">
-  <p:cSld>
-    <p:spTree>
-      <p:nvGrpSpPr>
-        <p:cNvPr id="1" name=""/>
-        <p:cNvGrpSpPr/>
-        <p:nvPr/>
-      </p:nvGrpSpPr>
-      <p:grpSpPr>
-        <a:xfrm>
-          <a:off x="0" y="0"/>
-          <a:ext cx="0" cy="0"/>
-          <a:chOff x="0" y="0"/>
-          <a:chExt cx="0" cy="0"/>
-        </a:xfrm>
-      </p:grpSpPr>
-      <p:sp>
-        <p:nvSpPr>
-          <p:cNvPr id="2" name="Title 1">
-            <a:extLst>
-              <a:ext uri="{FF2B5EF4-FFF2-40B4-BE49-F238E27FC236}">
-                <a16:creationId xmlns:a16="http://schemas.microsoft.com/office/drawing/2014/main" id="{62C5BF59-30EF-F05D-E649-6BF3672F2E71}"/>
-              </a:ext>
-            </a:extLst>
-          </p:cNvPr>
-          <p:cNvSpPr>
-            <a:spLocks noGrp="1"/>
-          </p:cNvSpPr>
-          <p:nvPr>
-            <p:ph type="title"/>
-          </p:nvPr>
-        </p:nvSpPr>
-        <p:spPr/>
-        <p:txBody>
-          <a:bodyPr>
-            <a:normAutofit fontScale="90000"/>
-          </a:bodyPr>
-          <a:lstStyle/>
-          <a:p>
-            <a:r>
-              <a:rPr lang="en-CA" dirty="0"/>
-              <a:t>Fitting: VGAM::</a:t>
-            </a:r>
-            <a:r>
-              <a:rPr lang="en-CA" dirty="0" err="1"/>
-              <a:t>vglm</a:t>
-            </a:r>
-            <a:r>
-              <a:rPr lang="en-CA" dirty="0"/>
-              <a:t>()</a:t>
-            </a:r>
-          </a:p>
-        </p:txBody>
-      </p:sp>
-      <p:sp>
-        <p:nvSpPr>
-          <p:cNvPr id="3" name="Slide Number Placeholder 2">
-            <a:extLst>
-              <a:ext uri="{FF2B5EF4-FFF2-40B4-BE49-F238E27FC236}">
-                <a16:creationId xmlns:a16="http://schemas.microsoft.com/office/drawing/2014/main" id="{E0113E28-46C8-2B0A-4A8E-0346D35A7DEE}"/>
-              </a:ext>
-            </a:extLst>
-          </p:cNvPr>
-          <p:cNvSpPr>
-            <a:spLocks noGrp="1"/>
-          </p:cNvSpPr>
-          <p:nvPr>
-            <p:ph type="sldNum" sz="quarter" idx="12"/>
-          </p:nvPr>
-        </p:nvSpPr>
-        <p:spPr/>
-        <p:txBody>
-          <a:bodyPr/>
-          <a:lstStyle/>
-          <a:p>
-            <a:fld id="{621225AB-15B9-4C79-A121-04D1DC7E2307}" type="slidenum">
-              <a:rPr lang="en-US" smtClean="0"/>
-              <a:t>46</a:t>
-            </a:fld>
-            <a:endParaRPr lang="en-US"/>
-          </a:p>
-        </p:txBody>
-      </p:sp>
-      <p:sp>
-        <p:nvSpPr>
-          <p:cNvPr id="4" name="TextBox 3">
-            <a:extLst>
-              <a:ext uri="{FF2B5EF4-FFF2-40B4-BE49-F238E27FC236}">
-                <a16:creationId xmlns:a16="http://schemas.microsoft.com/office/drawing/2014/main" id="{3D3748E0-EE67-9A03-F40E-7D518997FC77}"/>
-              </a:ext>
-            </a:extLst>
-          </p:cNvPr>
-          <p:cNvSpPr txBox="1"/>
-          <p:nvPr/>
-        </p:nvSpPr>
-        <p:spPr>
-          <a:xfrm>
-            <a:off x="457200" y="1219200"/>
-            <a:ext cx="8229600" cy="1200329"/>
-          </a:xfrm>
-          <a:prstGeom prst="rect">
-            <a:avLst/>
-          </a:prstGeom>
-          <a:noFill/>
-        </p:spPr>
-        <p:txBody>
-          <a:bodyPr wrap="square" rtlCol="0">
-            <a:spAutoFit/>
-          </a:bodyPr>
-          <a:lstStyle/>
-          <a:p>
-            <a:r>
-              <a:rPr lang="en-CA" dirty="0"/>
-              <a:t>VGAM::</a:t>
-            </a:r>
-            <a:r>
-              <a:rPr lang="en-CA" dirty="0" err="1"/>
-              <a:t>vglm</a:t>
-            </a:r>
-            <a:r>
-              <a:rPr lang="en-CA" dirty="0"/>
-              <a:t>() can fit a wide class of models for a vector of multivariate responses</a:t>
-            </a:r>
-          </a:p>
-          <a:p>
-            <a:pPr marL="285750" indent="-285750">
-              <a:buFont typeface="Arial" panose="020B0604020202020204" pitchFamily="34" charset="0"/>
-              <a:buChar char="•"/>
-            </a:pPr>
-            <a:r>
-              <a:rPr lang="en-CA" dirty="0"/>
-              <a:t>The family </a:t>
-            </a:r>
-            <a:r>
-              <a:rPr lang="en-CA" dirty="0">
-                <a:latin typeface="Courier New" panose="02070309020205020404" pitchFamily="49" charset="0"/>
-                <a:cs typeface="Courier New" panose="02070309020205020404" pitchFamily="49" charset="0"/>
-              </a:rPr>
-              <a:t>binom2() </a:t>
-            </a:r>
-            <a:r>
-              <a:rPr lang="en-CA" dirty="0"/>
-              <a:t>is used for bivariate logistic models</a:t>
-            </a:r>
-          </a:p>
-          <a:p>
-            <a:pPr marL="285750" indent="-285750">
-              <a:buFont typeface="Arial" panose="020B0604020202020204" pitchFamily="34" charset="0"/>
-              <a:buChar char="•"/>
-            </a:pPr>
-            <a:r>
-              <a:rPr lang="en-CA" dirty="0"/>
-              <a:t>An argument </a:t>
-            </a:r>
-            <a:r>
-              <a:rPr lang="en-CA" dirty="0">
-                <a:latin typeface="Courier New" panose="02070309020205020404" pitchFamily="49" charset="0"/>
-                <a:cs typeface="Courier New" panose="02070309020205020404" pitchFamily="49" charset="0"/>
-              </a:rPr>
-              <a:t>zero= </a:t>
-            </a:r>
-            <a:r>
-              <a:rPr lang="en-CA" dirty="0"/>
-              <a:t>allows the logit or odds ratio </a:t>
-            </a:r>
-            <a:r>
-              <a:rPr lang="en-CA" dirty="0" err="1"/>
-              <a:t>submodels</a:t>
-            </a:r>
-            <a:r>
-              <a:rPr lang="en-CA" dirty="0"/>
-              <a:t> to be constrained to intercept-only</a:t>
-            </a:r>
-          </a:p>
-        </p:txBody>
-      </p:sp>
-      <p:sp>
-        <p:nvSpPr>
-          <p:cNvPr id="5" name="TextBox 4">
-            <a:extLst>
-              <a:ext uri="{FF2B5EF4-FFF2-40B4-BE49-F238E27FC236}">
-                <a16:creationId xmlns:a16="http://schemas.microsoft.com/office/drawing/2014/main" id="{27C1961E-F035-AF54-F03A-69F38AFB587C}"/>
-              </a:ext>
-            </a:extLst>
-          </p:cNvPr>
-          <p:cNvSpPr txBox="1"/>
-          <p:nvPr/>
-        </p:nvSpPr>
-        <p:spPr>
-          <a:xfrm>
-            <a:off x="457200" y="2514600"/>
-            <a:ext cx="8229600" cy="1077218"/>
-          </a:xfrm>
-          <a:prstGeom prst="rect">
-            <a:avLst/>
-          </a:prstGeom>
-          <a:solidFill>
-            <a:schemeClr val="accent6">
-              <a:lumMod val="20000"/>
-              <a:lumOff val="80000"/>
-              <a:alpha val="60000"/>
-            </a:schemeClr>
-          </a:solidFill>
-        </p:spPr>
-        <p:txBody>
-          <a:bodyPr wrap="square" rtlCol="0">
-            <a:spAutoFit/>
-          </a:bodyPr>
-          <a:lstStyle/>
-          <a:p>
-            <a:r>
-              <a:rPr lang="en-CA" sz="1600" dirty="0" err="1">
-                <a:latin typeface="Courier New" panose="02070309020205020404" pitchFamily="49" charset="0"/>
-                <a:cs typeface="Courier New" panose="02070309020205020404" pitchFamily="49" charset="0"/>
-              </a:rPr>
-              <a:t>cm.vglm</a:t>
-            </a:r>
-            <a:r>
-              <a:rPr lang="en-CA" sz="1600" dirty="0">
-                <a:latin typeface="Courier New" panose="02070309020205020404" pitchFamily="49" charset="0"/>
-                <a:cs typeface="Courier New" panose="02070309020205020404" pitchFamily="49" charset="0"/>
-              </a:rPr>
-              <a:t> &lt;- </a:t>
-            </a:r>
-            <a:r>
-              <a:rPr lang="en-CA" sz="1600" dirty="0" err="1">
-                <a:latin typeface="Courier New" panose="02070309020205020404" pitchFamily="49" charset="0"/>
-                <a:cs typeface="Courier New" panose="02070309020205020404" pitchFamily="49" charset="0"/>
-              </a:rPr>
-              <a:t>vglm</a:t>
-            </a:r>
-            <a:r>
-              <a:rPr lang="en-CA" sz="1600" dirty="0">
-                <a:latin typeface="Courier New" panose="02070309020205020404" pitchFamily="49" charset="0"/>
-                <a:cs typeface="Courier New" panose="02070309020205020404" pitchFamily="49" charset="0"/>
-              </a:rPr>
-              <a:t>(</a:t>
-            </a:r>
-            <a:r>
-              <a:rPr lang="en-CA" sz="1600" dirty="0" err="1">
-                <a:latin typeface="Courier New" panose="02070309020205020404" pitchFamily="49" charset="0"/>
-                <a:cs typeface="Courier New" panose="02070309020205020404" pitchFamily="49" charset="0"/>
-              </a:rPr>
-              <a:t>cbind</a:t>
-            </a:r>
-            <a:r>
-              <a:rPr lang="en-CA" sz="1600" dirty="0">
-                <a:latin typeface="Courier New" panose="02070309020205020404" pitchFamily="49" charset="0"/>
-                <a:cs typeface="Courier New" panose="02070309020205020404" pitchFamily="49" charset="0"/>
-              </a:rPr>
-              <a:t>(</a:t>
-            </a:r>
-            <a:r>
-              <a:rPr lang="en-CA" sz="1600" dirty="0" err="1">
-                <a:latin typeface="Courier New" panose="02070309020205020404" pitchFamily="49" charset="0"/>
-                <a:cs typeface="Courier New" panose="02070309020205020404" pitchFamily="49" charset="0"/>
-              </a:rPr>
-              <a:t>nBnW</a:t>
-            </a:r>
-            <a:r>
-              <a:rPr lang="en-CA" sz="1600" dirty="0">
-                <a:latin typeface="Courier New" panose="02070309020205020404" pitchFamily="49" charset="0"/>
-                <a:cs typeface="Courier New" panose="02070309020205020404" pitchFamily="49" charset="0"/>
-              </a:rPr>
-              <a:t>, </a:t>
-            </a:r>
-            <a:r>
-              <a:rPr lang="en-CA" sz="1600" dirty="0" err="1">
-                <a:latin typeface="Courier New" panose="02070309020205020404" pitchFamily="49" charset="0"/>
-                <a:cs typeface="Courier New" panose="02070309020205020404" pitchFamily="49" charset="0"/>
-              </a:rPr>
-              <a:t>nBW</a:t>
-            </a:r>
-            <a:r>
-              <a:rPr lang="en-CA" sz="1600" dirty="0">
-                <a:latin typeface="Courier New" panose="02070309020205020404" pitchFamily="49" charset="0"/>
-                <a:cs typeface="Courier New" panose="02070309020205020404" pitchFamily="49" charset="0"/>
-              </a:rPr>
-              <a:t>, </a:t>
-            </a:r>
-            <a:r>
-              <a:rPr lang="en-CA" sz="1600" dirty="0" err="1">
-                <a:latin typeface="Courier New" panose="02070309020205020404" pitchFamily="49" charset="0"/>
-                <a:cs typeface="Courier New" panose="02070309020205020404" pitchFamily="49" charset="0"/>
-              </a:rPr>
-              <a:t>BnW</a:t>
-            </a:r>
-            <a:r>
-              <a:rPr lang="en-CA" sz="1600" dirty="0">
-                <a:latin typeface="Courier New" panose="02070309020205020404" pitchFamily="49" charset="0"/>
-                <a:cs typeface="Courier New" panose="02070309020205020404" pitchFamily="49" charset="0"/>
-              </a:rPr>
-              <a:t>, BW) ~ Age,</a:t>
-            </a:r>
-          </a:p>
-          <a:p>
-            <a:r>
-              <a:rPr lang="en-CA" sz="1600" dirty="0">
-                <a:latin typeface="Courier New" panose="02070309020205020404" pitchFamily="49" charset="0"/>
-                <a:cs typeface="Courier New" panose="02070309020205020404" pitchFamily="49" charset="0"/>
-              </a:rPr>
-              <a:t>                binom2.or(zero = NULL), data = coalminers)</a:t>
-            </a:r>
-          </a:p>
-          <a:p>
-            <a:endParaRPr lang="en-CA" sz="1600" dirty="0">
-              <a:latin typeface="Courier New" panose="02070309020205020404" pitchFamily="49" charset="0"/>
-              <a:cs typeface="Courier New" panose="02070309020205020404" pitchFamily="49" charset="0"/>
-            </a:endParaRPr>
-          </a:p>
-          <a:p>
-            <a:r>
-              <a:rPr lang="en-CA" sz="1600" dirty="0">
-                <a:latin typeface="Courier New" panose="02070309020205020404" pitchFamily="49" charset="0"/>
-                <a:cs typeface="Courier New" panose="02070309020205020404" pitchFamily="49" charset="0"/>
-              </a:rPr>
-              <a:t>exp(</a:t>
-            </a:r>
-            <a:r>
-              <a:rPr lang="en-CA" sz="1600" dirty="0" err="1">
-                <a:latin typeface="Courier New" panose="02070309020205020404" pitchFamily="49" charset="0"/>
-                <a:cs typeface="Courier New" panose="02070309020205020404" pitchFamily="49" charset="0"/>
-              </a:rPr>
-              <a:t>coef</a:t>
-            </a:r>
-            <a:r>
-              <a:rPr lang="en-CA" sz="1600" dirty="0">
-                <a:latin typeface="Courier New" panose="02070309020205020404" pitchFamily="49" charset="0"/>
-                <a:cs typeface="Courier New" panose="02070309020205020404" pitchFamily="49" charset="0"/>
-              </a:rPr>
-              <a:t>(</a:t>
-            </a:r>
-            <a:r>
-              <a:rPr lang="en-CA" sz="1600" dirty="0" err="1">
-                <a:latin typeface="Courier New" panose="02070309020205020404" pitchFamily="49" charset="0"/>
-                <a:cs typeface="Courier New" panose="02070309020205020404" pitchFamily="49" charset="0"/>
-              </a:rPr>
-              <a:t>cm.vglm</a:t>
-            </a:r>
-            <a:r>
-              <a:rPr lang="en-CA" sz="1600" dirty="0">
-                <a:latin typeface="Courier New" panose="02070309020205020404" pitchFamily="49" charset="0"/>
-                <a:cs typeface="Courier New" panose="02070309020205020404" pitchFamily="49" charset="0"/>
-              </a:rPr>
-              <a:t>, matrix = TRUE))</a:t>
-            </a:r>
-          </a:p>
-        </p:txBody>
-      </p:sp>
-      <p:sp>
-        <p:nvSpPr>
-          <p:cNvPr id="6" name="TextBox 5">
-            <a:extLst>
-              <a:ext uri="{FF2B5EF4-FFF2-40B4-BE49-F238E27FC236}">
-                <a16:creationId xmlns:a16="http://schemas.microsoft.com/office/drawing/2014/main" id="{A85E70EB-5250-85F1-4F91-E8A4B01118EB}"/>
-              </a:ext>
-            </a:extLst>
-          </p:cNvPr>
-          <p:cNvSpPr txBox="1"/>
-          <p:nvPr/>
-        </p:nvSpPr>
-        <p:spPr>
-          <a:xfrm>
-            <a:off x="457200" y="3810000"/>
-            <a:ext cx="8229600" cy="738664"/>
-          </a:xfrm>
-          <a:prstGeom prst="rect">
-            <a:avLst/>
-          </a:prstGeom>
-          <a:solidFill>
-            <a:schemeClr val="accent6">
-              <a:lumMod val="20000"/>
-              <a:lumOff val="80000"/>
-              <a:alpha val="60000"/>
-            </a:schemeClr>
-          </a:solidFill>
-        </p:spPr>
-        <p:txBody>
-          <a:bodyPr wrap="square" rtlCol="0">
-            <a:spAutoFit/>
-          </a:bodyPr>
-          <a:lstStyle/>
-          <a:p>
-            <a:r>
-              <a:rPr lang="en-CA" sz="1400" dirty="0">
-                <a:latin typeface="Courier New" panose="02070309020205020404" pitchFamily="49" charset="0"/>
-                <a:cs typeface="Courier New" panose="02070309020205020404" pitchFamily="49" charset="0"/>
-              </a:rPr>
-              <a:t> </a:t>
-            </a:r>
-            <a:r>
-              <a:rPr lang="en-CA" sz="1400" dirty="0" err="1">
-                <a:latin typeface="Courier New" panose="02070309020205020404" pitchFamily="49" charset="0"/>
-                <a:cs typeface="Courier New" panose="02070309020205020404" pitchFamily="49" charset="0"/>
-              </a:rPr>
-              <a:t>logitlink</a:t>
-            </a:r>
-            <a:r>
-              <a:rPr lang="en-CA" sz="1400" dirty="0">
-                <a:latin typeface="Courier New" panose="02070309020205020404" pitchFamily="49" charset="0"/>
-                <a:cs typeface="Courier New" panose="02070309020205020404" pitchFamily="49" charset="0"/>
-              </a:rPr>
-              <a:t>(mu1) </a:t>
-            </a:r>
-            <a:r>
-              <a:rPr lang="en-CA" sz="1400" dirty="0" err="1">
-                <a:latin typeface="Courier New" panose="02070309020205020404" pitchFamily="49" charset="0"/>
-                <a:cs typeface="Courier New" panose="02070309020205020404" pitchFamily="49" charset="0"/>
-              </a:rPr>
-              <a:t>logitlink</a:t>
-            </a:r>
-            <a:r>
-              <a:rPr lang="en-CA" sz="1400" dirty="0">
-                <a:latin typeface="Courier New" panose="02070309020205020404" pitchFamily="49" charset="0"/>
-                <a:cs typeface="Courier New" panose="02070309020205020404" pitchFamily="49" charset="0"/>
-              </a:rPr>
-              <a:t>(mu2) </a:t>
-            </a:r>
-            <a:r>
-              <a:rPr lang="en-CA" sz="1400" dirty="0" err="1">
-                <a:latin typeface="Courier New" panose="02070309020205020404" pitchFamily="49" charset="0"/>
-                <a:cs typeface="Courier New" panose="02070309020205020404" pitchFamily="49" charset="0"/>
-              </a:rPr>
-              <a:t>loglink</a:t>
-            </a:r>
-            <a:r>
-              <a:rPr lang="en-CA" sz="1400" dirty="0">
-                <a:latin typeface="Courier New" panose="02070309020205020404" pitchFamily="49" charset="0"/>
-                <a:cs typeface="Courier New" panose="02070309020205020404" pitchFamily="49" charset="0"/>
-              </a:rPr>
-              <a:t>(</a:t>
-            </a:r>
-            <a:r>
-              <a:rPr lang="en-CA" sz="1400" dirty="0" err="1">
-                <a:latin typeface="Courier New" panose="02070309020205020404" pitchFamily="49" charset="0"/>
-                <a:cs typeface="Courier New" panose="02070309020205020404" pitchFamily="49" charset="0"/>
-              </a:rPr>
-              <a:t>oratio</a:t>
-            </a:r>
-            <a:r>
-              <a:rPr lang="en-CA" sz="1400" dirty="0">
-                <a:latin typeface="Courier New" panose="02070309020205020404" pitchFamily="49" charset="0"/>
-                <a:cs typeface="Courier New" panose="02070309020205020404" pitchFamily="49" charset="0"/>
-              </a:rPr>
-              <a:t>)</a:t>
-            </a:r>
-          </a:p>
-          <a:p>
-            <a:r>
-              <a:rPr lang="en-CA" sz="1400" dirty="0">
-                <a:latin typeface="Courier New" panose="02070309020205020404" pitchFamily="49" charset="0"/>
-                <a:cs typeface="Courier New" panose="02070309020205020404" pitchFamily="49" charset="0"/>
-              </a:rPr>
-              <a:t>(Intercept)          0.104          0.226          20.530</a:t>
-            </a:r>
-          </a:p>
-          <a:p>
-            <a:r>
-              <a:rPr lang="en-CA" sz="1400" dirty="0">
-                <a:latin typeface="Courier New" panose="02070309020205020404" pitchFamily="49" charset="0"/>
-                <a:cs typeface="Courier New" panose="02070309020205020404" pitchFamily="49" charset="0"/>
-              </a:rPr>
-              <a:t>Age                  1.673          1.385           0.877</a:t>
-            </a:r>
-          </a:p>
-        </p:txBody>
-      </p:sp>
-      <p:sp>
-        <p:nvSpPr>
-          <p:cNvPr id="7" name="TextBox 6">
-            <a:extLst>
-              <a:ext uri="{FF2B5EF4-FFF2-40B4-BE49-F238E27FC236}">
-                <a16:creationId xmlns:a16="http://schemas.microsoft.com/office/drawing/2014/main" id="{0829077A-9B9C-92B7-C991-07B01163CE0A}"/>
-              </a:ext>
-            </a:extLst>
-          </p:cNvPr>
-          <p:cNvSpPr txBox="1"/>
-          <p:nvPr/>
-        </p:nvSpPr>
-        <p:spPr>
-          <a:xfrm>
-            <a:off x="533400" y="4876800"/>
-            <a:ext cx="8153400" cy="1200329"/>
-          </a:xfrm>
-          <a:prstGeom prst="rect">
-            <a:avLst/>
-          </a:prstGeom>
-          <a:noFill/>
-        </p:spPr>
-        <p:txBody>
-          <a:bodyPr wrap="square" rtlCol="0">
-            <a:spAutoFit/>
-          </a:bodyPr>
-          <a:lstStyle/>
-          <a:p>
-            <a:r>
-              <a:rPr lang="en-CA" dirty="0"/>
-              <a:t>Each 5 years of age:</a:t>
-            </a:r>
-          </a:p>
-          <a:p>
-            <a:pPr marL="285750" indent="-285750">
-              <a:buFont typeface="Arial" panose="020B0604020202020204" pitchFamily="34" charset="0"/>
-              <a:buChar char="•"/>
-            </a:pPr>
-            <a:r>
-              <a:rPr lang="en-CA" dirty="0"/>
-              <a:t>Multiplies odds of breathlessness by 1.67, a 67% increase</a:t>
-            </a:r>
-          </a:p>
-          <a:p>
-            <a:pPr marL="285750" indent="-285750">
-              <a:buFont typeface="Arial" panose="020B0604020202020204" pitchFamily="34" charset="0"/>
-              <a:buChar char="•"/>
-            </a:pPr>
-            <a:r>
-              <a:rPr lang="en-CA" dirty="0"/>
-              <a:t>Multiplies odds of wheeze by 1.38, a 38% increase</a:t>
-            </a:r>
-          </a:p>
-          <a:p>
-            <a:pPr marL="285750" indent="-285750">
-              <a:buFont typeface="Arial" panose="020B0604020202020204" pitchFamily="34" charset="0"/>
-              <a:buChar char="•"/>
-            </a:pPr>
-            <a:r>
-              <a:rPr lang="en-CA" dirty="0"/>
-              <a:t>Multiplies the OR for association by 0.88, a 12 % decrease</a:t>
-            </a:r>
-          </a:p>
-        </p:txBody>
-      </p:sp>
-    </p:spTree>
-    <p:extLst>
-      <p:ext uri="{BB962C8B-B14F-4D97-AF65-F5344CB8AC3E}">
-        <p14:creationId xmlns:p14="http://schemas.microsoft.com/office/powerpoint/2010/main" val="3876420177"/>
       </p:ext>
     </p:extLst>
   </p:cSld>
@@ -15692,42 +15324,12 @@
           <a:chExt cx="0" cy="0"/>
         </a:xfrm>
       </p:grpSpPr>
-      <p:pic>
-        <p:nvPicPr>
-          <p:cNvPr id="5" name="Picture 4">
-            <a:extLst>
-              <a:ext uri="{FF2B5EF4-FFF2-40B4-BE49-F238E27FC236}">
-                <a16:creationId xmlns:a16="http://schemas.microsoft.com/office/drawing/2014/main" id="{F3218D51-51DD-E296-59D3-9D106B48F964}"/>
-              </a:ext>
-            </a:extLst>
-          </p:cNvPr>
-          <p:cNvPicPr>
-            <a:picLocks noChangeAspect="1"/>
-          </p:cNvPicPr>
-          <p:nvPr/>
-        </p:nvPicPr>
-        <p:blipFill>
-          <a:blip r:embed="rId2"/>
-          <a:stretch>
-            <a:fillRect/>
-          </a:stretch>
-        </p:blipFill>
-        <p:spPr>
-          <a:xfrm>
-            <a:off x="4419600" y="2857644"/>
-            <a:ext cx="4422058" cy="3771756"/>
-          </a:xfrm>
-          <a:prstGeom prst="rect">
-            <a:avLst/>
-          </a:prstGeom>
-        </p:spPr>
-      </p:pic>
       <p:sp>
         <p:nvSpPr>
           <p:cNvPr id="2" name="Title 1">
             <a:extLst>
               <a:ext uri="{FF2B5EF4-FFF2-40B4-BE49-F238E27FC236}">
-                <a16:creationId xmlns:a16="http://schemas.microsoft.com/office/drawing/2014/main" id="{65304E45-12DA-B363-3CB9-4DE1AE9BFC0C}"/>
+                <a16:creationId xmlns:a16="http://schemas.microsoft.com/office/drawing/2014/main" id="{62C5BF59-30EF-F05D-E649-6BF3672F2E71}"/>
               </a:ext>
             </a:extLst>
           </p:cNvPr>
@@ -15747,7 +15349,15 @@
           <a:p>
             <a:r>
               <a:rPr lang="en-CA" dirty="0"/>
-              <a:t>Plotting the model fit</a:t>
+              <a:t>Fitting: VGAM::</a:t>
+            </a:r>
+            <a:r>
+              <a:rPr lang="en-CA" dirty="0" err="1"/>
+              <a:t>vglm</a:t>
+            </a:r>
+            <a:r>
+              <a:rPr lang="en-CA" dirty="0"/>
+              <a:t>()</a:t>
             </a:r>
           </a:p>
         </p:txBody>
@@ -15757,7 +15367,7 @@
           <p:cNvPr id="3" name="Slide Number Placeholder 2">
             <a:extLst>
               <a:ext uri="{FF2B5EF4-FFF2-40B4-BE49-F238E27FC236}">
-                <a16:creationId xmlns:a16="http://schemas.microsoft.com/office/drawing/2014/main" id="{AA0EF58A-D89A-1D95-0C9C-2FCB2166C585}"/>
+                <a16:creationId xmlns:a16="http://schemas.microsoft.com/office/drawing/2014/main" id="{E0113E28-46C8-2B0A-4A8E-0346D35A7DEE}"/>
               </a:ext>
             </a:extLst>
           </p:cNvPr>
@@ -15783,10 +15393,10 @@
       </p:sp>
       <p:sp>
         <p:nvSpPr>
-          <p:cNvPr id="6" name="TextBox 5">
-            <a:extLst>
-              <a:ext uri="{FF2B5EF4-FFF2-40B4-BE49-F238E27FC236}">
-                <a16:creationId xmlns:a16="http://schemas.microsoft.com/office/drawing/2014/main" id="{7745473C-187E-0F6F-B0B3-87CC619A0A96}"/>
+          <p:cNvPr id="4" name="TextBox 3">
+            <a:extLst>
+              <a:ext uri="{FF2B5EF4-FFF2-40B4-BE49-F238E27FC236}">
+                <a16:creationId xmlns:a16="http://schemas.microsoft.com/office/drawing/2014/main" id="{3D3748E0-EE67-9A03-F40E-7D518997FC77}"/>
               </a:ext>
             </a:extLst>
           </p:cNvPr>
@@ -15795,8 +15405,8 @@
         </p:nvSpPr>
         <p:spPr>
           <a:xfrm>
-            <a:off x="457200" y="1143000"/>
-            <a:ext cx="8229600" cy="646331"/>
+            <a:off x="457200" y="1219200"/>
+            <a:ext cx="8229600" cy="1200329"/>
           </a:xfrm>
           <a:prstGeom prst="rect">
             <a:avLst/>
@@ -15811,55 +15421,75 @@
           <a:p>
             <a:r>
               <a:rPr lang="en-CA" dirty="0"/>
-              <a:t>VGAM::fitted() returns the </a:t>
+              <a:t>VGAM::</a:t>
+            </a:r>
+            <a:r>
+              <a:rPr lang="en-CA" dirty="0" err="1"/>
+              <a:t>vglm</a:t>
+            </a:r>
+            <a:r>
+              <a:rPr lang="en-CA" dirty="0"/>
+              <a:t>() can fit a wide class of models for a vector of multivariate responses</a:t>
+            </a:r>
+          </a:p>
+          <a:p>
+            <a:pPr marL="285750" indent="-285750">
+              <a:buFont typeface="Arial" panose="020B0604020202020204" pitchFamily="34" charset="0"/>
+              <a:buChar char="•"/>
+            </a:pPr>
+            <a:r>
+              <a:rPr lang="en-CA" dirty="0"/>
+              <a:t>The family </a:t>
             </a:r>
             <a:r>
               <a:rPr lang="en-CA" dirty="0">
-                <a:solidFill>
-                  <a:srgbClr val="0070C0"/>
-                </a:solidFill>
-              </a:rPr>
-              <a:t>fitted</a:t>
+                <a:latin typeface="Courier New" panose="02070309020205020404" pitchFamily="49" charset="0"/>
+                <a:cs typeface="Courier New" panose="02070309020205020404" pitchFamily="49" charset="0"/>
+              </a:rPr>
+              <a:t>binom2() </a:t>
             </a:r>
             <a:r>
               <a:rPr lang="en-CA" dirty="0"/>
-              <a:t> values on the probability scale</a:t>
-            </a:r>
-          </a:p>
-          <a:p>
+              <a:t>is used for bivariate logistic models</a:t>
+            </a:r>
+          </a:p>
+          <a:p>
+            <a:pPr marL="285750" indent="-285750">
+              <a:buFont typeface="Arial" panose="020B0604020202020204" pitchFamily="34" charset="0"/>
+              <a:buChar char="•"/>
+            </a:pPr>
             <a:r>
               <a:rPr lang="en-CA" dirty="0"/>
-              <a:t>VGAM::</a:t>
+              <a:t>An argument </a:t>
+            </a:r>
+            <a:r>
+              <a:rPr lang="en-CA" dirty="0">
+                <a:latin typeface="Courier New" panose="02070309020205020404" pitchFamily="49" charset="0"/>
+                <a:cs typeface="Courier New" panose="02070309020205020404" pitchFamily="49" charset="0"/>
+              </a:rPr>
+              <a:t>zero= </a:t>
+            </a:r>
+            <a:r>
+              <a:rPr lang="en-CA" dirty="0"/>
+              <a:t>allows the logit or odds ratio </a:t>
             </a:r>
             <a:r>
               <a:rPr lang="en-CA" dirty="0" err="1"/>
-              <a:t>depvar</a:t>
+              <a:t>submodels</a:t>
             </a:r>
             <a:r>
               <a:rPr lang="en-CA" dirty="0"/>
-              <a:t>() returns the </a:t>
-            </a:r>
-            <a:r>
-              <a:rPr lang="en-CA" dirty="0">
-                <a:solidFill>
-                  <a:srgbClr val="0070C0"/>
-                </a:solidFill>
-              </a:rPr>
-              <a:t>observed</a:t>
-            </a:r>
-            <a:r>
-              <a:rPr lang="en-CA" dirty="0"/>
-              <a:t> values on the probability scale</a:t>
-            </a:r>
-          </a:p>
-        </p:txBody>
-      </p:sp>
-      <p:sp>
-        <p:nvSpPr>
-          <p:cNvPr id="8" name="TextBox 7">
-            <a:extLst>
-              <a:ext uri="{FF2B5EF4-FFF2-40B4-BE49-F238E27FC236}">
-                <a16:creationId xmlns:a16="http://schemas.microsoft.com/office/drawing/2014/main" id="{90F7BBA9-DB09-57D5-4481-657B1C51912A}"/>
+              <a:t> to be constrained to intercept-only</a:t>
+            </a:r>
+          </a:p>
+        </p:txBody>
+      </p:sp>
+      <p:sp>
+        <p:nvSpPr>
+          <p:cNvPr id="5" name="TextBox 4">
+            <a:extLst>
+              <a:ext uri="{FF2B5EF4-FFF2-40B4-BE49-F238E27FC236}">
+                <a16:creationId xmlns:a16="http://schemas.microsoft.com/office/drawing/2014/main" id="{27C1961E-F035-AF54-F03A-69F38AFB587C}"/>
               </a:ext>
             </a:extLst>
           </p:cNvPr>
@@ -15868,8 +15498,8 @@
         </p:nvSpPr>
         <p:spPr>
           <a:xfrm>
-            <a:off x="533400" y="2133600"/>
-            <a:ext cx="3662905" cy="2462213"/>
+            <a:off x="457200" y="2514600"/>
+            <a:ext cx="8229600" cy="1077218"/>
           </a:xfrm>
           <a:prstGeom prst="rect">
             <a:avLst/>
@@ -15889,223 +15519,150 @@
           <a:lstStyle/>
           <a:p>
             <a:r>
-              <a:rPr lang="en-CA" sz="1400" dirty="0">
-                <a:latin typeface="Courier New" panose="02070309020205020404" pitchFamily="49" charset="0"/>
-                <a:cs typeface="Courier New" panose="02070309020205020404" pitchFamily="49" charset="0"/>
-              </a:rPr>
-              <a:t>&gt; P &lt;- fitted(</a:t>
-            </a:r>
-            <a:r>
-              <a:rPr lang="en-CA" sz="1400" dirty="0" err="1">
+              <a:rPr lang="en-CA" sz="1600" dirty="0" err="1">
                 <a:latin typeface="Courier New" panose="02070309020205020404" pitchFamily="49" charset="0"/>
                 <a:cs typeface="Courier New" panose="02070309020205020404" pitchFamily="49" charset="0"/>
               </a:rPr>
               <a:t>cm.vglm</a:t>
             </a:r>
             <a:r>
-              <a:rPr lang="en-CA" sz="1400" dirty="0">
-                <a:latin typeface="Courier New" panose="02070309020205020404" pitchFamily="49" charset="0"/>
-                <a:cs typeface="Courier New" panose="02070309020205020404" pitchFamily="49" charset="0"/>
-              </a:rPr>
-              <a:t>)  </a:t>
-            </a:r>
-          </a:p>
-          <a:p>
-            <a:r>
-              <a:rPr lang="en-CA" sz="1400" dirty="0">
-                <a:latin typeface="Courier New" panose="02070309020205020404" pitchFamily="49" charset="0"/>
-                <a:cs typeface="Courier New" panose="02070309020205020404" pitchFamily="49" charset="0"/>
-              </a:rPr>
-              <a:t>&gt; </a:t>
-            </a:r>
-            <a:r>
-              <a:rPr lang="en-CA" sz="1400" dirty="0" err="1">
-                <a:latin typeface="Courier New" panose="02070309020205020404" pitchFamily="49" charset="0"/>
-                <a:cs typeface="Courier New" panose="02070309020205020404" pitchFamily="49" charset="0"/>
-              </a:rPr>
-              <a:t>colnames</a:t>
-            </a:r>
-            <a:r>
-              <a:rPr lang="en-CA" sz="1400" dirty="0">
-                <a:latin typeface="Courier New" panose="02070309020205020404" pitchFamily="49" charset="0"/>
-                <a:cs typeface="Courier New" panose="02070309020205020404" pitchFamily="49" charset="0"/>
-              </a:rPr>
-              <a:t>(P) &lt;- c("</a:t>
-            </a:r>
-            <a:r>
-              <a:rPr lang="en-CA" sz="1400" dirty="0" err="1">
-                <a:latin typeface="Courier New" panose="02070309020205020404" pitchFamily="49" charset="0"/>
-                <a:cs typeface="Courier New" panose="02070309020205020404" pitchFamily="49" charset="0"/>
-              </a:rPr>
-              <a:t>bw</a:t>
-            </a:r>
-            <a:r>
-              <a:rPr lang="en-CA" sz="1400" dirty="0">
-                <a:latin typeface="Courier New" panose="02070309020205020404" pitchFamily="49" charset="0"/>
-                <a:cs typeface="Courier New" panose="02070309020205020404" pitchFamily="49" charset="0"/>
-              </a:rPr>
-              <a:t>", "</a:t>
-            </a:r>
-            <a:r>
-              <a:rPr lang="en-CA" sz="1400" dirty="0" err="1">
-                <a:latin typeface="Courier New" panose="02070309020205020404" pitchFamily="49" charset="0"/>
-                <a:cs typeface="Courier New" panose="02070309020205020404" pitchFamily="49" charset="0"/>
-              </a:rPr>
-              <a:t>bW</a:t>
-            </a:r>
-            <a:r>
-              <a:rPr lang="en-CA" sz="1400" dirty="0">
-                <a:latin typeface="Courier New" panose="02070309020205020404" pitchFamily="49" charset="0"/>
-                <a:cs typeface="Courier New" panose="02070309020205020404" pitchFamily="49" charset="0"/>
-              </a:rPr>
-              <a:t>", </a:t>
-            </a:r>
-          </a:p>
-          <a:p>
-            <a:r>
-              <a:rPr lang="en-CA" sz="1400" dirty="0">
-                <a:latin typeface="Courier New" panose="02070309020205020404" pitchFamily="49" charset="0"/>
-                <a:cs typeface="Courier New" panose="02070309020205020404" pitchFamily="49" charset="0"/>
-              </a:rPr>
-              <a:t>                   "</a:t>
-            </a:r>
-            <a:r>
-              <a:rPr lang="en-CA" sz="1400" dirty="0" err="1">
-                <a:latin typeface="Courier New" panose="02070309020205020404" pitchFamily="49" charset="0"/>
-                <a:cs typeface="Courier New" panose="02070309020205020404" pitchFamily="49" charset="0"/>
-              </a:rPr>
-              <a:t>Bw</a:t>
-            </a:r>
-            <a:r>
-              <a:rPr lang="en-CA" sz="1400" dirty="0">
-                <a:latin typeface="Courier New" panose="02070309020205020404" pitchFamily="49" charset="0"/>
-                <a:cs typeface="Courier New" panose="02070309020205020404" pitchFamily="49" charset="0"/>
-              </a:rPr>
-              <a:t>", "BW")</a:t>
-            </a:r>
-          </a:p>
-          <a:p>
-            <a:r>
-              <a:rPr lang="en-CA" sz="1400" dirty="0">
-                <a:latin typeface="Courier New" panose="02070309020205020404" pitchFamily="49" charset="0"/>
-                <a:cs typeface="Courier New" panose="02070309020205020404" pitchFamily="49" charset="0"/>
-              </a:rPr>
-              <a:t>&gt; P</a:t>
-            </a:r>
-          </a:p>
-          <a:p>
-            <a:r>
-              <a:rPr lang="en-CA" sz="1400" dirty="0">
-                <a:latin typeface="Courier New" panose="02070309020205020404" pitchFamily="49" charset="0"/>
-                <a:cs typeface="Courier New" panose="02070309020205020404" pitchFamily="49" charset="0"/>
-              </a:rPr>
-              <a:t> </a:t>
-            </a:r>
-            <a:r>
-              <a:rPr lang="en-CA" sz="1400" dirty="0" err="1">
-                <a:latin typeface="Courier New" panose="02070309020205020404" pitchFamily="49" charset="0"/>
-                <a:cs typeface="Courier New" panose="02070309020205020404" pitchFamily="49" charset="0"/>
-              </a:rPr>
-              <a:t>bw</a:t>
-            </a:r>
-            <a:r>
-              <a:rPr lang="en-CA" sz="1400" dirty="0">
-                <a:latin typeface="Courier New" panose="02070309020205020404" pitchFamily="49" charset="0"/>
-                <a:cs typeface="Courier New" panose="02070309020205020404" pitchFamily="49" charset="0"/>
-              </a:rPr>
-              <a:t>    </a:t>
-            </a:r>
-            <a:r>
-              <a:rPr lang="en-CA" sz="1400" dirty="0" err="1">
-                <a:latin typeface="Courier New" panose="02070309020205020404" pitchFamily="49" charset="0"/>
-                <a:cs typeface="Courier New" panose="02070309020205020404" pitchFamily="49" charset="0"/>
-              </a:rPr>
-              <a:t>bW</a:t>
-            </a:r>
-            <a:r>
-              <a:rPr lang="en-CA" sz="1400" dirty="0">
-                <a:latin typeface="Courier New" panose="02070309020205020404" pitchFamily="49" charset="0"/>
-                <a:cs typeface="Courier New" panose="02070309020205020404" pitchFamily="49" charset="0"/>
-              </a:rPr>
-              <a:t>     </a:t>
-            </a:r>
-            <a:r>
-              <a:rPr lang="en-CA" sz="1400" dirty="0" err="1">
-                <a:latin typeface="Courier New" panose="02070309020205020404" pitchFamily="49" charset="0"/>
-                <a:cs typeface="Courier New" panose="02070309020205020404" pitchFamily="49" charset="0"/>
-              </a:rPr>
-              <a:t>Bw</a:t>
-            </a:r>
-            <a:r>
-              <a:rPr lang="en-CA" sz="1400" dirty="0">
-                <a:latin typeface="Courier New" panose="02070309020205020404" pitchFamily="49" charset="0"/>
-                <a:cs typeface="Courier New" panose="02070309020205020404" pitchFamily="49" charset="0"/>
-              </a:rPr>
-              <a:t>     BW</a:t>
-            </a:r>
-          </a:p>
-          <a:p>
-            <a:r>
-              <a:rPr lang="en-CA" sz="1400" dirty="0">
-                <a:latin typeface="Courier New" panose="02070309020205020404" pitchFamily="49" charset="0"/>
-                <a:cs typeface="Courier New" panose="02070309020205020404" pitchFamily="49" charset="0"/>
-              </a:rPr>
-              <a:t>1 0.94 0.049 0.0046 0.0085</a:t>
-            </a:r>
-          </a:p>
-          <a:p>
-            <a:r>
-              <a:rPr lang="en-CA" sz="1400" dirty="0">
-                <a:latin typeface="Courier New" panose="02070309020205020404" pitchFamily="49" charset="0"/>
-                <a:cs typeface="Courier New" panose="02070309020205020404" pitchFamily="49" charset="0"/>
-              </a:rPr>
-              <a:t>2 0.91 0.064 0.0070 0.0148</a:t>
-            </a:r>
-          </a:p>
-          <a:p>
-            <a:r>
-              <a:rPr lang="en-CA" sz="1400" dirty="0">
-                <a:latin typeface="Courier New" panose="02070309020205020404" pitchFamily="49" charset="0"/>
-                <a:cs typeface="Courier New" panose="02070309020205020404" pitchFamily="49" charset="0"/>
-              </a:rPr>
-              <a:t>3 0.88 0.080 0.0105 0.0254</a:t>
-            </a:r>
-          </a:p>
-          <a:p>
-            <a:r>
-              <a:rPr lang="en-CA" sz="1400" dirty="0">
-                <a:latin typeface="Courier New" panose="02070309020205020404" pitchFamily="49" charset="0"/>
-                <a:cs typeface="Courier New" panose="02070309020205020404" pitchFamily="49" charset="0"/>
-              </a:rPr>
-              <a:t>4 0.84 0.097 0.0158 0.0428</a:t>
-            </a:r>
-          </a:p>
-          <a:p>
-            <a:r>
-              <a:rPr lang="en-CA" sz="1400" dirty="0">
-                <a:latin typeface="Courier New" panose="02070309020205020404" pitchFamily="49" charset="0"/>
-                <a:cs typeface="Courier New" panose="02070309020205020404" pitchFamily="49" charset="0"/>
-              </a:rPr>
-              <a:t>5 0.79 0.114 0.0239 0.0704</a:t>
-            </a:r>
-          </a:p>
-          <a:p>
-            <a:r>
-              <a:rPr lang="en-CA" sz="1400" dirty="0">
-                <a:latin typeface="Courier New" panose="02070309020205020404" pitchFamily="49" charset="0"/>
-                <a:cs typeface="Courier New" panose="02070309020205020404" pitchFamily="49" charset="0"/>
-              </a:rPr>
-              <a:t>  …</a:t>
-            </a:r>
-          </a:p>
-        </p:txBody>
-      </p:sp>
-      <p:sp>
-        <p:nvSpPr>
-          <p:cNvPr id="9" name="TextBox 8">
-            <a:extLst>
-              <a:ext uri="{FF2B5EF4-FFF2-40B4-BE49-F238E27FC236}">
-                <a16:creationId xmlns:a16="http://schemas.microsoft.com/office/drawing/2014/main" id="{5088BC33-7199-5456-A5B6-DA4F48499ABE}"/>
+              <a:rPr lang="en-CA" sz="1600" dirty="0">
+                <a:latin typeface="Courier New" panose="02070309020205020404" pitchFamily="49" charset="0"/>
+                <a:cs typeface="Courier New" panose="02070309020205020404" pitchFamily="49" charset="0"/>
+              </a:rPr>
+              <a:t> &lt;- </a:t>
+            </a:r>
+            <a:r>
+              <a:rPr lang="en-CA" sz="1600" dirty="0" err="1">
+                <a:latin typeface="Courier New" panose="02070309020205020404" pitchFamily="49" charset="0"/>
+                <a:cs typeface="Courier New" panose="02070309020205020404" pitchFamily="49" charset="0"/>
+              </a:rPr>
+              <a:t>vglm</a:t>
+            </a:r>
+            <a:r>
+              <a:rPr lang="en-CA" sz="1600" dirty="0">
+                <a:latin typeface="Courier New" panose="02070309020205020404" pitchFamily="49" charset="0"/>
+                <a:cs typeface="Courier New" panose="02070309020205020404" pitchFamily="49" charset="0"/>
+              </a:rPr>
+              <a:t>(</a:t>
+            </a:r>
+            <a:r>
+              <a:rPr lang="en-CA" sz="1600" dirty="0" err="1">
+                <a:latin typeface="Courier New" panose="02070309020205020404" pitchFamily="49" charset="0"/>
+                <a:cs typeface="Courier New" panose="02070309020205020404" pitchFamily="49" charset="0"/>
+              </a:rPr>
+              <a:t>cbind</a:t>
+            </a:r>
+            <a:r>
+              <a:rPr lang="en-CA" sz="1600" dirty="0">
+                <a:latin typeface="Courier New" panose="02070309020205020404" pitchFamily="49" charset="0"/>
+                <a:cs typeface="Courier New" panose="02070309020205020404" pitchFamily="49" charset="0"/>
+              </a:rPr>
+              <a:t>(</a:t>
+            </a:r>
+            <a:r>
+              <a:rPr lang="en-CA" sz="1600" dirty="0" err="1">
+                <a:latin typeface="Courier New" panose="02070309020205020404" pitchFamily="49" charset="0"/>
+                <a:cs typeface="Courier New" panose="02070309020205020404" pitchFamily="49" charset="0"/>
+              </a:rPr>
+              <a:t>nBnW</a:t>
+            </a:r>
+            <a:r>
+              <a:rPr lang="en-CA" sz="1600" dirty="0">
+                <a:latin typeface="Courier New" panose="02070309020205020404" pitchFamily="49" charset="0"/>
+                <a:cs typeface="Courier New" panose="02070309020205020404" pitchFamily="49" charset="0"/>
+              </a:rPr>
+              <a:t>, </a:t>
+            </a:r>
+            <a:r>
+              <a:rPr lang="en-CA" sz="1600" dirty="0" err="1">
+                <a:latin typeface="Courier New" panose="02070309020205020404" pitchFamily="49" charset="0"/>
+                <a:cs typeface="Courier New" panose="02070309020205020404" pitchFamily="49" charset="0"/>
+              </a:rPr>
+              <a:t>nBW</a:t>
+            </a:r>
+            <a:r>
+              <a:rPr lang="en-CA" sz="1600" dirty="0">
+                <a:latin typeface="Courier New" panose="02070309020205020404" pitchFamily="49" charset="0"/>
+                <a:cs typeface="Courier New" panose="02070309020205020404" pitchFamily="49" charset="0"/>
+              </a:rPr>
+              <a:t>, </a:t>
+            </a:r>
+            <a:r>
+              <a:rPr lang="en-CA" sz="1600" dirty="0" err="1">
+                <a:latin typeface="Courier New" panose="02070309020205020404" pitchFamily="49" charset="0"/>
+                <a:cs typeface="Courier New" panose="02070309020205020404" pitchFamily="49" charset="0"/>
+              </a:rPr>
+              <a:t>BnW</a:t>
+            </a:r>
+            <a:r>
+              <a:rPr lang="en-CA" sz="1600" dirty="0">
+                <a:latin typeface="Courier New" panose="02070309020205020404" pitchFamily="49" charset="0"/>
+                <a:cs typeface="Courier New" panose="02070309020205020404" pitchFamily="49" charset="0"/>
+              </a:rPr>
+              <a:t>, BW) ~ Age,</a:t>
+            </a:r>
+          </a:p>
+          <a:p>
+            <a:r>
+              <a:rPr lang="en-CA" sz="1600" dirty="0">
+                <a:latin typeface="Courier New" panose="02070309020205020404" pitchFamily="49" charset="0"/>
+                <a:cs typeface="Courier New" panose="02070309020205020404" pitchFamily="49" charset="0"/>
+              </a:rPr>
+              <a:t>                binom2.or(zero = NULL), data = coalminers)</a:t>
+            </a:r>
+          </a:p>
+          <a:p>
+            <a:endParaRPr lang="en-CA" sz="1600" dirty="0">
+              <a:latin typeface="Courier New" panose="02070309020205020404" pitchFamily="49" charset="0"/>
+              <a:cs typeface="Courier New" panose="02070309020205020404" pitchFamily="49" charset="0"/>
+            </a:endParaRPr>
+          </a:p>
+          <a:p>
+            <a:r>
+              <a:rPr lang="en-CA" sz="1600" dirty="0">
+                <a:latin typeface="Courier New" panose="02070309020205020404" pitchFamily="49" charset="0"/>
+                <a:cs typeface="Courier New" panose="02070309020205020404" pitchFamily="49" charset="0"/>
+              </a:rPr>
+              <a:t>exp(</a:t>
+            </a:r>
+            <a:r>
+              <a:rPr lang="en-CA" sz="1600" dirty="0" err="1">
+                <a:latin typeface="Courier New" panose="02070309020205020404" pitchFamily="49" charset="0"/>
+                <a:cs typeface="Courier New" panose="02070309020205020404" pitchFamily="49" charset="0"/>
+              </a:rPr>
+              <a:t>coef</a:t>
+            </a:r>
+            <a:r>
+              <a:rPr lang="en-CA" sz="1600" dirty="0">
+                <a:latin typeface="Courier New" panose="02070309020205020404" pitchFamily="49" charset="0"/>
+                <a:cs typeface="Courier New" panose="02070309020205020404" pitchFamily="49" charset="0"/>
+              </a:rPr>
+              <a:t>(</a:t>
+            </a:r>
+            <a:r>
+              <a:rPr lang="en-CA" sz="1600" dirty="0" err="1">
+                <a:latin typeface="Courier New" panose="02070309020205020404" pitchFamily="49" charset="0"/>
+                <a:cs typeface="Courier New" panose="02070309020205020404" pitchFamily="49" charset="0"/>
+              </a:rPr>
+              <a:t>cm.vglm</a:t>
+            </a:r>
+            <a:r>
+              <a:rPr lang="en-CA" sz="1600" dirty="0">
+                <a:latin typeface="Courier New" panose="02070309020205020404" pitchFamily="49" charset="0"/>
+                <a:cs typeface="Courier New" panose="02070309020205020404" pitchFamily="49" charset="0"/>
+              </a:rPr>
+              <a:t>, matrix = TRUE))</a:t>
+            </a:r>
+          </a:p>
+        </p:txBody>
+      </p:sp>
+      <p:sp>
+        <p:nvSpPr>
+          <p:cNvPr id="6" name="TextBox 5">
+            <a:extLst>
+              <a:ext uri="{FF2B5EF4-FFF2-40B4-BE49-F238E27FC236}">
+                <a16:creationId xmlns:a16="http://schemas.microsoft.com/office/drawing/2014/main" id="{A85E70EB-5250-85F1-4F91-E8A4B01118EB}"/>
               </a:ext>
             </a:extLst>
           </p:cNvPr>
@@ -16114,51 +15671,8 @@
         </p:nvSpPr>
         <p:spPr>
           <a:xfrm>
-            <a:off x="457200" y="4724400"/>
-            <a:ext cx="4114800" cy="646331"/>
-          </a:xfrm>
-          <a:prstGeom prst="rect">
-            <a:avLst/>
-          </a:prstGeom>
-          <a:noFill/>
-        </p:spPr>
-        <p:txBody>
-          <a:bodyPr wrap="square" rtlCol="0">
-            <a:spAutoFit/>
-          </a:bodyPr>
-          <a:lstStyle/>
-          <a:p>
-            <a:r>
-              <a:rPr lang="en-CA" dirty="0"/>
-              <a:t>You can get these on the logit scale using the inverse logit function, </a:t>
-            </a:r>
-            <a:r>
-              <a:rPr lang="en-CA" dirty="0" err="1"/>
-              <a:t>qlogis</a:t>
-            </a:r>
-            <a:r>
-              <a:rPr lang="en-CA" dirty="0"/>
-              <a:t>()</a:t>
-            </a:r>
-          </a:p>
-        </p:txBody>
-      </p:sp>
-      <p:sp>
-        <p:nvSpPr>
-          <p:cNvPr id="10" name="TextBox 9">
-            <a:extLst>
-              <a:ext uri="{FF2B5EF4-FFF2-40B4-BE49-F238E27FC236}">
-                <a16:creationId xmlns:a16="http://schemas.microsoft.com/office/drawing/2014/main" id="{E6CA3B73-F495-1076-CEDD-0E4642FF43FD}"/>
-              </a:ext>
-            </a:extLst>
-          </p:cNvPr>
-          <p:cNvSpPr txBox="1"/>
-          <p:nvPr/>
-        </p:nvSpPr>
-        <p:spPr>
-          <a:xfrm>
-            <a:off x="533400" y="5638800"/>
-            <a:ext cx="3662905" cy="584775"/>
+            <a:off x="457200" y="3810000"/>
+            <a:ext cx="8229600" cy="738664"/>
           </a:xfrm>
           <a:prstGeom prst="rect">
             <a:avLst/>
@@ -16178,58 +15692,95 @@
           <a:lstStyle/>
           <a:p>
             <a:r>
-              <a:rPr lang="en-CA" sz="1600" dirty="0">
-                <a:latin typeface="Courier New" panose="02070309020205020404" pitchFamily="49" charset="0"/>
-                <a:cs typeface="Courier New" panose="02070309020205020404" pitchFamily="49" charset="0"/>
-              </a:rPr>
-              <a:t>LP &lt;- </a:t>
-            </a:r>
-            <a:r>
-              <a:rPr lang="en-CA" sz="1600" dirty="0" err="1">
-                <a:latin typeface="Courier New" panose="02070309020205020404" pitchFamily="49" charset="0"/>
-                <a:cs typeface="Courier New" panose="02070309020205020404" pitchFamily="49" charset="0"/>
-              </a:rPr>
-              <a:t>qlogis</a:t>
-            </a:r>
-            <a:r>
-              <a:rPr lang="en-CA" sz="1600" dirty="0">
-                <a:latin typeface="Courier New" panose="02070309020205020404" pitchFamily="49" charset="0"/>
-                <a:cs typeface="Courier New" panose="02070309020205020404" pitchFamily="49" charset="0"/>
-              </a:rPr>
-              <a:t>(P)</a:t>
-            </a:r>
-          </a:p>
-          <a:p>
-            <a:r>
-              <a:rPr lang="en-CA" sz="1600" dirty="0">
-                <a:latin typeface="Courier New" panose="02070309020205020404" pitchFamily="49" charset="0"/>
-                <a:cs typeface="Courier New" panose="02070309020205020404" pitchFamily="49" charset="0"/>
-              </a:rPr>
-              <a:t>LY &lt;- </a:t>
-            </a:r>
-            <a:r>
-              <a:rPr lang="en-CA" sz="1600" dirty="0" err="1">
-                <a:latin typeface="Courier New" panose="02070309020205020404" pitchFamily="49" charset="0"/>
-                <a:cs typeface="Courier New" panose="02070309020205020404" pitchFamily="49" charset="0"/>
-              </a:rPr>
-              <a:t>qlogis</a:t>
-            </a:r>
-            <a:r>
-              <a:rPr lang="en-CA" sz="1600" dirty="0">
-                <a:latin typeface="Courier New" panose="02070309020205020404" pitchFamily="49" charset="0"/>
-                <a:cs typeface="Courier New" panose="02070309020205020404" pitchFamily="49" charset="0"/>
-              </a:rPr>
-              <a:t>(Y)</a:t>
-            </a:r>
-          </a:p>
-        </p:txBody>
-      </p:sp>
-      <p:sp>
-        <p:nvSpPr>
-          <p:cNvPr id="11" name="TextBox 10">
-            <a:extLst>
-              <a:ext uri="{FF2B5EF4-FFF2-40B4-BE49-F238E27FC236}">
-                <a16:creationId xmlns:a16="http://schemas.microsoft.com/office/drawing/2014/main" id="{2920B6FA-E8E8-413A-6CD8-155EF8FBCFDA}"/>
+              <a:rPr lang="en-CA" sz="1400" dirty="0">
+                <a:latin typeface="Courier New" panose="02070309020205020404" pitchFamily="49" charset="0"/>
+                <a:cs typeface="Courier New" panose="02070309020205020404" pitchFamily="49" charset="0"/>
+              </a:rPr>
+              <a:t> </a:t>
+            </a:r>
+            <a:r>
+              <a:rPr lang="en-CA" sz="1400" dirty="0" err="1">
+                <a:latin typeface="Courier New" panose="02070309020205020404" pitchFamily="49" charset="0"/>
+                <a:cs typeface="Courier New" panose="02070309020205020404" pitchFamily="49" charset="0"/>
+              </a:rPr>
+              <a:t>logitlink</a:t>
+            </a:r>
+            <a:r>
+              <a:rPr lang="en-CA" sz="1400" dirty="0">
+                <a:latin typeface="Courier New" panose="02070309020205020404" pitchFamily="49" charset="0"/>
+                <a:cs typeface="Courier New" panose="02070309020205020404" pitchFamily="49" charset="0"/>
+              </a:rPr>
+              <a:t>(mu1) </a:t>
+            </a:r>
+            <a:r>
+              <a:rPr lang="en-CA" sz="1400" dirty="0" err="1">
+                <a:latin typeface="Courier New" panose="02070309020205020404" pitchFamily="49" charset="0"/>
+                <a:cs typeface="Courier New" panose="02070309020205020404" pitchFamily="49" charset="0"/>
+              </a:rPr>
+              <a:t>logitlink</a:t>
+            </a:r>
+            <a:r>
+              <a:rPr lang="en-CA" sz="1400" dirty="0">
+                <a:latin typeface="Courier New" panose="02070309020205020404" pitchFamily="49" charset="0"/>
+                <a:cs typeface="Courier New" panose="02070309020205020404" pitchFamily="49" charset="0"/>
+              </a:rPr>
+              <a:t>(mu2) </a:t>
+            </a:r>
+            <a:r>
+              <a:rPr lang="en-CA" sz="1400" dirty="0" err="1">
+                <a:latin typeface="Courier New" panose="02070309020205020404" pitchFamily="49" charset="0"/>
+                <a:cs typeface="Courier New" panose="02070309020205020404" pitchFamily="49" charset="0"/>
+              </a:rPr>
+              <a:t>loglink</a:t>
+            </a:r>
+            <a:r>
+              <a:rPr lang="en-CA" sz="1400" dirty="0">
+                <a:latin typeface="Courier New" panose="02070309020205020404" pitchFamily="49" charset="0"/>
+                <a:cs typeface="Courier New" panose="02070309020205020404" pitchFamily="49" charset="0"/>
+              </a:rPr>
+              <a:t>(</a:t>
+            </a:r>
+            <a:r>
+              <a:rPr lang="en-CA" sz="1400" dirty="0" err="1">
+                <a:latin typeface="Courier New" panose="02070309020205020404" pitchFamily="49" charset="0"/>
+                <a:cs typeface="Courier New" panose="02070309020205020404" pitchFamily="49" charset="0"/>
+              </a:rPr>
+              <a:t>oratio</a:t>
+            </a:r>
+            <a:r>
+              <a:rPr lang="en-CA" sz="1400" dirty="0">
+                <a:latin typeface="Courier New" panose="02070309020205020404" pitchFamily="49" charset="0"/>
+                <a:cs typeface="Courier New" panose="02070309020205020404" pitchFamily="49" charset="0"/>
+              </a:rPr>
+              <a:t>)</a:t>
+            </a:r>
+          </a:p>
+          <a:p>
+            <a:r>
+              <a:rPr lang="en-CA" sz="1400" dirty="0">
+                <a:latin typeface="Courier New" panose="02070309020205020404" pitchFamily="49" charset="0"/>
+                <a:cs typeface="Courier New" panose="02070309020205020404" pitchFamily="49" charset="0"/>
+              </a:rPr>
+              <a:t>(Intercept)          0.104          0.226          20.530</a:t>
+            </a:r>
+          </a:p>
+          <a:p>
+            <a:r>
+              <a:rPr lang="en-CA" sz="1400" dirty="0">
+                <a:latin typeface="Courier New" panose="02070309020205020404" pitchFamily="49" charset="0"/>
+                <a:cs typeface="Courier New" panose="02070309020205020404" pitchFamily="49" charset="0"/>
+              </a:rPr>
+              <a:t>Age                  1.673          1.385           0.877</a:t>
+            </a:r>
+          </a:p>
+        </p:txBody>
+      </p:sp>
+      <p:sp>
+        <p:nvSpPr>
+          <p:cNvPr id="7" name="TextBox 6">
+            <a:extLst>
+              <a:ext uri="{FF2B5EF4-FFF2-40B4-BE49-F238E27FC236}">
+                <a16:creationId xmlns:a16="http://schemas.microsoft.com/office/drawing/2014/main" id="{0829077A-9B9C-92B7-C991-07B01163CE0A}"/>
               </a:ext>
             </a:extLst>
           </p:cNvPr>
@@ -16238,8 +15789,8 @@
         </p:nvSpPr>
         <p:spPr>
           <a:xfrm>
-            <a:off x="4572000" y="2123768"/>
-            <a:ext cx="3962400" cy="369332"/>
+            <a:off x="533400" y="4876800"/>
+            <a:ext cx="8153400" cy="1200329"/>
           </a:xfrm>
           <a:prstGeom prst="rect">
             <a:avLst/>
@@ -16254,15 +15805,37 @@
           <a:p>
             <a:r>
               <a:rPr lang="en-CA" dirty="0"/>
-              <a:t>The plot is made using </a:t>
-            </a:r>
-            <a:r>
-              <a:rPr lang="en-CA" dirty="0" err="1"/>
-              <a:t>matplot</a:t>
-            </a:r>
+              <a:t>Each 5 years of age:</a:t>
+            </a:r>
+          </a:p>
+          <a:p>
+            <a:pPr marL="285750" indent="-285750">
+              <a:buFont typeface="Arial" panose="020B0604020202020204" pitchFamily="34" charset="0"/>
+              <a:buChar char="•"/>
+            </a:pPr>
             <a:r>
               <a:rPr lang="en-CA" dirty="0"/>
-              <a:t>()</a:t>
+              <a:t>Multiplies odds of breathlessness by 1.67, a 67% increase</a:t>
+            </a:r>
+          </a:p>
+          <a:p>
+            <a:pPr marL="285750" indent="-285750">
+              <a:buFont typeface="Arial" panose="020B0604020202020204" pitchFamily="34" charset="0"/>
+              <a:buChar char="•"/>
+            </a:pPr>
+            <a:r>
+              <a:rPr lang="en-CA" dirty="0"/>
+              <a:t>Multiplies odds of wheeze by 1.38, a 38% increase</a:t>
+            </a:r>
+          </a:p>
+          <a:p>
+            <a:pPr marL="285750" indent="-285750">
+              <a:buFont typeface="Arial" panose="020B0604020202020204" pitchFamily="34" charset="0"/>
+              <a:buChar char="•"/>
+            </a:pPr>
+            <a:r>
+              <a:rPr lang="en-CA" dirty="0"/>
+              <a:t>Multiplies the OR for association by 0.88, a 12 % decrease</a:t>
             </a:r>
           </a:p>
         </p:txBody>
@@ -16270,7 +15843,7 @@
     </p:spTree>
     <p:extLst>
       <p:ext uri="{BB962C8B-B14F-4D97-AF65-F5344CB8AC3E}">
-        <p14:creationId xmlns:p14="http://schemas.microsoft.com/office/powerpoint/2010/main" val="590267117"/>
+        <p14:creationId xmlns:p14="http://schemas.microsoft.com/office/powerpoint/2010/main" val="3876420177"/>
       </p:ext>
     </p:extLst>
   </p:cSld>
@@ -16309,12 +15882,42 @@
           <a:chExt cx="0" cy="0"/>
         </a:xfrm>
       </p:grpSpPr>
+      <p:pic>
+        <p:nvPicPr>
+          <p:cNvPr id="5" name="Picture 4">
+            <a:extLst>
+              <a:ext uri="{FF2B5EF4-FFF2-40B4-BE49-F238E27FC236}">
+                <a16:creationId xmlns:a16="http://schemas.microsoft.com/office/drawing/2014/main" id="{F3218D51-51DD-E296-59D3-9D106B48F964}"/>
+              </a:ext>
+            </a:extLst>
+          </p:cNvPr>
+          <p:cNvPicPr>
+            <a:picLocks noChangeAspect="1"/>
+          </p:cNvPicPr>
+          <p:nvPr/>
+        </p:nvPicPr>
+        <p:blipFill>
+          <a:blip r:embed="rId2"/>
+          <a:stretch>
+            <a:fillRect/>
+          </a:stretch>
+        </p:blipFill>
+        <p:spPr>
+          <a:xfrm>
+            <a:off x="4419600" y="2857644"/>
+            <a:ext cx="4422058" cy="3771756"/>
+          </a:xfrm>
+          <a:prstGeom prst="rect">
+            <a:avLst/>
+          </a:prstGeom>
+        </p:spPr>
+      </p:pic>
       <p:sp>
         <p:nvSpPr>
           <p:cNvPr id="2" name="Title 1">
             <a:extLst>
               <a:ext uri="{FF2B5EF4-FFF2-40B4-BE49-F238E27FC236}">
-                <a16:creationId xmlns:a16="http://schemas.microsoft.com/office/drawing/2014/main" id="{6128D1C3-5B64-D13C-6C2C-BBDC0FF9CE35}"/>
+                <a16:creationId xmlns:a16="http://schemas.microsoft.com/office/drawing/2014/main" id="{65304E45-12DA-B363-3CB9-4DE1AE9BFC0C}"/>
               </a:ext>
             </a:extLst>
           </p:cNvPr>
@@ -16334,7 +15937,7 @@
           <a:p>
             <a:r>
               <a:rPr lang="en-CA" dirty="0"/>
-              <a:t>Other possibilities</a:t>
+              <a:t>Plotting the model fit</a:t>
             </a:r>
           </a:p>
         </p:txBody>
@@ -16344,7 +15947,7 @@
           <p:cNvPr id="3" name="Slide Number Placeholder 2">
             <a:extLst>
               <a:ext uri="{FF2B5EF4-FFF2-40B4-BE49-F238E27FC236}">
-                <a16:creationId xmlns:a16="http://schemas.microsoft.com/office/drawing/2014/main" id="{B5584BBA-EA5E-CE0B-6CCE-E18A3BD4F537}"/>
+                <a16:creationId xmlns:a16="http://schemas.microsoft.com/office/drawing/2014/main" id="{AA0EF58A-D89A-1D95-0C9C-2FCB2166C585}"/>
               </a:ext>
             </a:extLst>
           </p:cNvPr>
@@ -16370,10 +15973,10 @@
       </p:sp>
       <p:sp>
         <p:nvSpPr>
-          <p:cNvPr id="4" name="TextBox 3">
-            <a:extLst>
-              <a:ext uri="{FF2B5EF4-FFF2-40B4-BE49-F238E27FC236}">
-                <a16:creationId xmlns:a16="http://schemas.microsoft.com/office/drawing/2014/main" id="{CBB14D2A-09D0-1E4D-35D8-79AE1D92E442}"/>
+          <p:cNvPr id="6" name="TextBox 5">
+            <a:extLst>
+              <a:ext uri="{FF2B5EF4-FFF2-40B4-BE49-F238E27FC236}">
+                <a16:creationId xmlns:a16="http://schemas.microsoft.com/office/drawing/2014/main" id="{7745473C-187E-0F6F-B0B3-87CC619A0A96}"/>
               </a:ext>
             </a:extLst>
           </p:cNvPr>
@@ -16382,8 +15985,81 @@
         </p:nvSpPr>
         <p:spPr>
           <a:xfrm>
-            <a:off x="457200" y="1752600"/>
+            <a:off x="457200" y="1143000"/>
             <a:ext cx="8229600" cy="646331"/>
+          </a:xfrm>
+          <a:prstGeom prst="rect">
+            <a:avLst/>
+          </a:prstGeom>
+          <a:noFill/>
+        </p:spPr>
+        <p:txBody>
+          <a:bodyPr wrap="square" rtlCol="0">
+            <a:spAutoFit/>
+          </a:bodyPr>
+          <a:lstStyle/>
+          <a:p>
+            <a:r>
+              <a:rPr lang="en-CA" dirty="0"/>
+              <a:t>VGAM::fitted() returns the </a:t>
+            </a:r>
+            <a:r>
+              <a:rPr lang="en-CA" dirty="0">
+                <a:solidFill>
+                  <a:srgbClr val="0070C0"/>
+                </a:solidFill>
+              </a:rPr>
+              <a:t>fitted</a:t>
+            </a:r>
+            <a:r>
+              <a:rPr lang="en-CA" dirty="0"/>
+              <a:t> values on the probability scale</a:t>
+            </a:r>
+          </a:p>
+          <a:p>
+            <a:r>
+              <a:rPr lang="en-CA" dirty="0"/>
+              <a:t>VGAM::</a:t>
+            </a:r>
+            <a:r>
+              <a:rPr lang="en-CA" dirty="0" err="1"/>
+              <a:t>depvar</a:t>
+            </a:r>
+            <a:r>
+              <a:rPr lang="en-CA" dirty="0"/>
+              <a:t>() returns the </a:t>
+            </a:r>
+            <a:r>
+              <a:rPr lang="en-CA" dirty="0">
+                <a:solidFill>
+                  <a:srgbClr val="0070C0"/>
+                </a:solidFill>
+              </a:rPr>
+              <a:t>observed</a:t>
+            </a:r>
+            <a:r>
+              <a:rPr lang="en-CA" dirty="0"/>
+              <a:t> values on the probability scale</a:t>
+            </a:r>
+          </a:p>
+        </p:txBody>
+      </p:sp>
+      <p:sp>
+        <p:nvSpPr>
+          <p:cNvPr id="8" name="TextBox 7">
+            <a:extLst>
+              <a:ext uri="{FF2B5EF4-FFF2-40B4-BE49-F238E27FC236}">
+                <a16:creationId xmlns:a16="http://schemas.microsoft.com/office/drawing/2014/main" id="{90F7BBA9-DB09-57D5-4481-657B1C51912A}"/>
+              </a:ext>
+            </a:extLst>
+          </p:cNvPr>
+          <p:cNvSpPr txBox="1"/>
+          <p:nvPr/>
+        </p:nvSpPr>
+        <p:spPr>
+          <a:xfrm>
+            <a:off x="533400" y="2133600"/>
+            <a:ext cx="3662905" cy="2462213"/>
           </a:xfrm>
           <a:prstGeom prst="rect">
             <a:avLst/>
@@ -16403,64 +16079,223 @@
           <a:lstStyle/>
           <a:p>
             <a:r>
-              <a:rPr lang="en-CA" dirty="0"/>
-              <a:t>cm.vglm2 &lt;- </a:t>
-            </a:r>
-            <a:r>
-              <a:rPr lang="en-CA" dirty="0" err="1"/>
-              <a:t>vglm</a:t>
-            </a:r>
-            <a:r>
-              <a:rPr lang="en-CA" dirty="0"/>
-              <a:t>(</a:t>
-            </a:r>
-            <a:r>
-              <a:rPr lang="en-CA" dirty="0" err="1"/>
-              <a:t>cbind</a:t>
-            </a:r>
-            <a:r>
-              <a:rPr lang="en-CA" dirty="0"/>
-              <a:t>(</a:t>
-            </a:r>
-            <a:r>
-              <a:rPr lang="en-CA" dirty="0" err="1"/>
-              <a:t>nBnW</a:t>
-            </a:r>
-            <a:r>
-              <a:rPr lang="en-CA" dirty="0"/>
-              <a:t>, </a:t>
-            </a:r>
-            <a:r>
-              <a:rPr lang="en-CA" dirty="0" err="1"/>
-              <a:t>nBW</a:t>
-            </a:r>
-            <a:r>
-              <a:rPr lang="en-CA" dirty="0"/>
-              <a:t>, </a:t>
-            </a:r>
-            <a:r>
-              <a:rPr lang="en-CA" dirty="0" err="1"/>
-              <a:t>BnW</a:t>
-            </a:r>
-            <a:r>
-              <a:rPr lang="en-CA" dirty="0"/>
-              <a:t>, BW) ~ poly(Age,2),</a:t>
-            </a:r>
-          </a:p>
-          <a:p>
-            <a:r>
-              <a:rPr lang="en-CA" dirty="0"/>
-              <a:t>                binom2.or(zero = NULL), data = coalminers)</a:t>
-            </a:r>
-          </a:p>
-        </p:txBody>
-      </p:sp>
-      <p:sp>
-        <p:nvSpPr>
-          <p:cNvPr id="5" name="TextBox 4">
-            <a:extLst>
-              <a:ext uri="{FF2B5EF4-FFF2-40B4-BE49-F238E27FC236}">
-                <a16:creationId xmlns:a16="http://schemas.microsoft.com/office/drawing/2014/main" id="{F4610618-20DC-04A6-D903-33FF80EF0FA8}"/>
+              <a:rPr lang="en-CA" sz="1400" dirty="0">
+                <a:latin typeface="Courier New" panose="02070309020205020404" pitchFamily="49" charset="0"/>
+                <a:cs typeface="Courier New" panose="02070309020205020404" pitchFamily="49" charset="0"/>
+              </a:rPr>
+              <a:t>&gt; P &lt;- fitted(</a:t>
+            </a:r>
+            <a:r>
+              <a:rPr lang="en-CA" sz="1400" dirty="0" err="1">
+                <a:latin typeface="Courier New" panose="02070309020205020404" pitchFamily="49" charset="0"/>
+                <a:cs typeface="Courier New" panose="02070309020205020404" pitchFamily="49" charset="0"/>
+              </a:rPr>
+              <a:t>cm.vglm</a:t>
+            </a:r>
+            <a:r>
+              <a:rPr lang="en-CA" sz="1400" dirty="0">
+                <a:latin typeface="Courier New" panose="02070309020205020404" pitchFamily="49" charset="0"/>
+                <a:cs typeface="Courier New" panose="02070309020205020404" pitchFamily="49" charset="0"/>
+              </a:rPr>
+              <a:t>)  </a:t>
+            </a:r>
+          </a:p>
+          <a:p>
+            <a:r>
+              <a:rPr lang="en-CA" sz="1400" dirty="0">
+                <a:latin typeface="Courier New" panose="02070309020205020404" pitchFamily="49" charset="0"/>
+                <a:cs typeface="Courier New" panose="02070309020205020404" pitchFamily="49" charset="0"/>
+              </a:rPr>
+              <a:t>&gt; </a:t>
+            </a:r>
+            <a:r>
+              <a:rPr lang="en-CA" sz="1400" dirty="0" err="1">
+                <a:latin typeface="Courier New" panose="02070309020205020404" pitchFamily="49" charset="0"/>
+                <a:cs typeface="Courier New" panose="02070309020205020404" pitchFamily="49" charset="0"/>
+              </a:rPr>
+              <a:t>colnames</a:t>
+            </a:r>
+            <a:r>
+              <a:rPr lang="en-CA" sz="1400" dirty="0">
+                <a:latin typeface="Courier New" panose="02070309020205020404" pitchFamily="49" charset="0"/>
+                <a:cs typeface="Courier New" panose="02070309020205020404" pitchFamily="49" charset="0"/>
+              </a:rPr>
+              <a:t>(P) &lt;- c("</a:t>
+            </a:r>
+            <a:r>
+              <a:rPr lang="en-CA" sz="1400" dirty="0" err="1">
+                <a:latin typeface="Courier New" panose="02070309020205020404" pitchFamily="49" charset="0"/>
+                <a:cs typeface="Courier New" panose="02070309020205020404" pitchFamily="49" charset="0"/>
+              </a:rPr>
+              <a:t>bw</a:t>
+            </a:r>
+            <a:r>
+              <a:rPr lang="en-CA" sz="1400" dirty="0">
+                <a:latin typeface="Courier New" panose="02070309020205020404" pitchFamily="49" charset="0"/>
+                <a:cs typeface="Courier New" panose="02070309020205020404" pitchFamily="49" charset="0"/>
+              </a:rPr>
+              <a:t>", "</a:t>
+            </a:r>
+            <a:r>
+              <a:rPr lang="en-CA" sz="1400" dirty="0" err="1">
+                <a:latin typeface="Courier New" panose="02070309020205020404" pitchFamily="49" charset="0"/>
+                <a:cs typeface="Courier New" panose="02070309020205020404" pitchFamily="49" charset="0"/>
+              </a:rPr>
+              <a:t>bW</a:t>
+            </a:r>
+            <a:r>
+              <a:rPr lang="en-CA" sz="1400" dirty="0">
+                <a:latin typeface="Courier New" panose="02070309020205020404" pitchFamily="49" charset="0"/>
+                <a:cs typeface="Courier New" panose="02070309020205020404" pitchFamily="49" charset="0"/>
+              </a:rPr>
+              <a:t>", </a:t>
+            </a:r>
+          </a:p>
+          <a:p>
+            <a:r>
+              <a:rPr lang="en-CA" sz="1400" dirty="0">
+                <a:latin typeface="Courier New" panose="02070309020205020404" pitchFamily="49" charset="0"/>
+                <a:cs typeface="Courier New" panose="02070309020205020404" pitchFamily="49" charset="0"/>
+              </a:rPr>
+              <a:t>                   "</a:t>
+            </a:r>
+            <a:r>
+              <a:rPr lang="en-CA" sz="1400" dirty="0" err="1">
+                <a:latin typeface="Courier New" panose="02070309020205020404" pitchFamily="49" charset="0"/>
+                <a:cs typeface="Courier New" panose="02070309020205020404" pitchFamily="49" charset="0"/>
+              </a:rPr>
+              <a:t>Bw</a:t>
+            </a:r>
+            <a:r>
+              <a:rPr lang="en-CA" sz="1400" dirty="0">
+                <a:latin typeface="Courier New" panose="02070309020205020404" pitchFamily="49" charset="0"/>
+                <a:cs typeface="Courier New" panose="02070309020205020404" pitchFamily="49" charset="0"/>
+              </a:rPr>
+              <a:t>", "BW")</a:t>
+            </a:r>
+          </a:p>
+          <a:p>
+            <a:r>
+              <a:rPr lang="en-CA" sz="1400" dirty="0">
+                <a:latin typeface="Courier New" panose="02070309020205020404" pitchFamily="49" charset="0"/>
+                <a:cs typeface="Courier New" panose="02070309020205020404" pitchFamily="49" charset="0"/>
+              </a:rPr>
+              <a:t>&gt; P</a:t>
+            </a:r>
+          </a:p>
+          <a:p>
+            <a:r>
+              <a:rPr lang="en-CA" sz="1400" dirty="0">
+                <a:latin typeface="Courier New" panose="02070309020205020404" pitchFamily="49" charset="0"/>
+                <a:cs typeface="Courier New" panose="02070309020205020404" pitchFamily="49" charset="0"/>
+              </a:rPr>
+              <a:t> </a:t>
+            </a:r>
+            <a:r>
+              <a:rPr lang="en-CA" sz="1400" dirty="0" err="1">
+                <a:latin typeface="Courier New" panose="02070309020205020404" pitchFamily="49" charset="0"/>
+                <a:cs typeface="Courier New" panose="02070309020205020404" pitchFamily="49" charset="0"/>
+              </a:rPr>
+              <a:t>bw</a:t>
+            </a:r>
+            <a:r>
+              <a:rPr lang="en-CA" sz="1400" dirty="0">
+                <a:latin typeface="Courier New" panose="02070309020205020404" pitchFamily="49" charset="0"/>
+                <a:cs typeface="Courier New" panose="02070309020205020404" pitchFamily="49" charset="0"/>
+              </a:rPr>
+              <a:t>    </a:t>
+            </a:r>
+            <a:r>
+              <a:rPr lang="en-CA" sz="1400" dirty="0" err="1">
+                <a:latin typeface="Courier New" panose="02070309020205020404" pitchFamily="49" charset="0"/>
+                <a:cs typeface="Courier New" panose="02070309020205020404" pitchFamily="49" charset="0"/>
+              </a:rPr>
+              <a:t>bW</a:t>
+            </a:r>
+            <a:r>
+              <a:rPr lang="en-CA" sz="1400" dirty="0">
+                <a:latin typeface="Courier New" panose="02070309020205020404" pitchFamily="49" charset="0"/>
+                <a:cs typeface="Courier New" panose="02070309020205020404" pitchFamily="49" charset="0"/>
+              </a:rPr>
+              <a:t>     </a:t>
+            </a:r>
+            <a:r>
+              <a:rPr lang="en-CA" sz="1400" dirty="0" err="1">
+                <a:latin typeface="Courier New" panose="02070309020205020404" pitchFamily="49" charset="0"/>
+                <a:cs typeface="Courier New" panose="02070309020205020404" pitchFamily="49" charset="0"/>
+              </a:rPr>
+              <a:t>Bw</a:t>
+            </a:r>
+            <a:r>
+              <a:rPr lang="en-CA" sz="1400" dirty="0">
+                <a:latin typeface="Courier New" panose="02070309020205020404" pitchFamily="49" charset="0"/>
+                <a:cs typeface="Courier New" panose="02070309020205020404" pitchFamily="49" charset="0"/>
+              </a:rPr>
+              <a:t>     BW</a:t>
+            </a:r>
+          </a:p>
+          <a:p>
+            <a:r>
+              <a:rPr lang="en-CA" sz="1400" dirty="0">
+                <a:latin typeface="Courier New" panose="02070309020205020404" pitchFamily="49" charset="0"/>
+                <a:cs typeface="Courier New" panose="02070309020205020404" pitchFamily="49" charset="0"/>
+              </a:rPr>
+              <a:t>1 0.94 0.049 0.0046 0.0085</a:t>
+            </a:r>
+          </a:p>
+          <a:p>
+            <a:r>
+              <a:rPr lang="en-CA" sz="1400" dirty="0">
+                <a:latin typeface="Courier New" panose="02070309020205020404" pitchFamily="49" charset="0"/>
+                <a:cs typeface="Courier New" panose="02070309020205020404" pitchFamily="49" charset="0"/>
+              </a:rPr>
+              <a:t>2 0.91 0.064 0.0070 0.0148</a:t>
+            </a:r>
+          </a:p>
+          <a:p>
+            <a:r>
+              <a:rPr lang="en-CA" sz="1400" dirty="0">
+                <a:latin typeface="Courier New" panose="02070309020205020404" pitchFamily="49" charset="0"/>
+                <a:cs typeface="Courier New" panose="02070309020205020404" pitchFamily="49" charset="0"/>
+              </a:rPr>
+              <a:t>3 0.88 0.080 0.0105 0.0254</a:t>
+            </a:r>
+          </a:p>
+          <a:p>
+            <a:r>
+              <a:rPr lang="en-CA" sz="1400" dirty="0">
+                <a:latin typeface="Courier New" panose="02070309020205020404" pitchFamily="49" charset="0"/>
+                <a:cs typeface="Courier New" panose="02070309020205020404" pitchFamily="49" charset="0"/>
+              </a:rPr>
+              <a:t>4 0.84 0.097 0.0158 0.0428</a:t>
+            </a:r>
+          </a:p>
+          <a:p>
+            <a:r>
+              <a:rPr lang="en-CA" sz="1400" dirty="0">
+                <a:latin typeface="Courier New" panose="02070309020205020404" pitchFamily="49" charset="0"/>
+                <a:cs typeface="Courier New" panose="02070309020205020404" pitchFamily="49" charset="0"/>
+              </a:rPr>
+              <a:t>5 0.79 0.114 0.0239 0.0704</a:t>
+            </a:r>
+          </a:p>
+          <a:p>
+            <a:r>
+              <a:rPr lang="en-CA" sz="1400" dirty="0">
+                <a:latin typeface="Courier New" panose="02070309020205020404" pitchFamily="49" charset="0"/>
+                <a:cs typeface="Courier New" panose="02070309020205020404" pitchFamily="49" charset="0"/>
+              </a:rPr>
+              <a:t>  …</a:t>
+            </a:r>
+          </a:p>
+        </p:txBody>
+      </p:sp>
+      <p:sp>
+        <p:nvSpPr>
+          <p:cNvPr id="9" name="TextBox 8">
+            <a:extLst>
+              <a:ext uri="{FF2B5EF4-FFF2-40B4-BE49-F238E27FC236}">
+                <a16:creationId xmlns:a16="http://schemas.microsoft.com/office/drawing/2014/main" id="{5088BC33-7199-5456-A5B6-DA4F48499ABE}"/>
               </a:ext>
             </a:extLst>
           </p:cNvPr>
@@ -16469,8 +16304,51 @@
         </p:nvSpPr>
         <p:spPr>
           <a:xfrm>
-            <a:off x="533400" y="3316069"/>
-            <a:ext cx="8153400" cy="646331"/>
+            <a:off x="457200" y="4724400"/>
+            <a:ext cx="4114800" cy="646331"/>
+          </a:xfrm>
+          <a:prstGeom prst="rect">
+            <a:avLst/>
+          </a:prstGeom>
+          <a:noFill/>
+        </p:spPr>
+        <p:txBody>
+          <a:bodyPr wrap="square" rtlCol="0">
+            <a:spAutoFit/>
+          </a:bodyPr>
+          <a:lstStyle/>
+          <a:p>
+            <a:r>
+              <a:rPr lang="en-CA" dirty="0"/>
+              <a:t>You can get these on the logit scale using the inverse logit function, </a:t>
+            </a:r>
+            <a:r>
+              <a:rPr lang="en-CA" dirty="0" err="1"/>
+              <a:t>qlogis</a:t>
+            </a:r>
+            <a:r>
+              <a:rPr lang="en-CA" dirty="0"/>
+              <a:t>()</a:t>
+            </a:r>
+          </a:p>
+        </p:txBody>
+      </p:sp>
+      <p:sp>
+        <p:nvSpPr>
+          <p:cNvPr id="10" name="TextBox 9">
+            <a:extLst>
+              <a:ext uri="{FF2B5EF4-FFF2-40B4-BE49-F238E27FC236}">
+                <a16:creationId xmlns:a16="http://schemas.microsoft.com/office/drawing/2014/main" id="{E6CA3B73-F495-1076-CEDD-0E4642FF43FD}"/>
+              </a:ext>
+            </a:extLst>
+          </p:cNvPr>
+          <p:cNvSpPr txBox="1"/>
+          <p:nvPr/>
+        </p:nvSpPr>
+        <p:spPr>
+          <a:xfrm>
+            <a:off x="533400" y="5638800"/>
+            <a:ext cx="3662905" cy="584775"/>
           </a:xfrm>
           <a:prstGeom prst="rect">
             <a:avLst/>
@@ -16490,76 +16368,58 @@
           <a:lstStyle/>
           <a:p>
             <a:r>
-              <a:rPr lang="en-CA" dirty="0" err="1"/>
-              <a:t>cm.vgam</a:t>
-            </a:r>
-            <a:r>
-              <a:rPr lang="en-CA" dirty="0"/>
-              <a:t> &lt;- </a:t>
-            </a:r>
-            <a:r>
-              <a:rPr lang="en-CA" dirty="0" err="1"/>
-              <a:t>vgam</a:t>
-            </a:r>
-            <a:r>
-              <a:rPr lang="en-CA" dirty="0"/>
-              <a:t>(</a:t>
-            </a:r>
-            <a:r>
-              <a:rPr lang="en-CA" dirty="0" err="1"/>
-              <a:t>cbind</a:t>
-            </a:r>
-            <a:r>
-              <a:rPr lang="en-CA" dirty="0"/>
-              <a:t>(</a:t>
-            </a:r>
-            <a:r>
-              <a:rPr lang="en-CA" dirty="0" err="1"/>
-              <a:t>nBnW</a:t>
-            </a:r>
-            <a:r>
-              <a:rPr lang="en-CA" dirty="0"/>
-              <a:t>, </a:t>
-            </a:r>
-            <a:r>
-              <a:rPr lang="en-CA" dirty="0" err="1"/>
-              <a:t>nBW</a:t>
-            </a:r>
-            <a:r>
-              <a:rPr lang="en-CA" dirty="0"/>
-              <a:t>, </a:t>
-            </a:r>
-            <a:r>
-              <a:rPr lang="en-CA" dirty="0" err="1"/>
-              <a:t>BnW</a:t>
-            </a:r>
-            <a:r>
-              <a:rPr lang="en-CA" dirty="0"/>
-              <a:t>, BW) ~ s(Age, </a:t>
-            </a:r>
-            <a:r>
-              <a:rPr lang="en-CA" dirty="0" err="1"/>
-              <a:t>df</a:t>
-            </a:r>
-            <a:r>
-              <a:rPr lang="en-CA" dirty="0"/>
-              <a:t> = 2),</a:t>
-            </a:r>
-          </a:p>
-          <a:p>
-            <a:r>
-              <a:rPr lang="en-CA" dirty="0"/>
-              <a:t>                 binom2.or(zero = NULL), data = coalminers)</a:t>
-            </a:r>
-          </a:p>
-        </p:txBody>
-      </p:sp>
-      <p:sp>
-        <p:nvSpPr>
-          <p:cNvPr id="6" name="TextBox 5">
-            <a:extLst>
-              <a:ext uri="{FF2B5EF4-FFF2-40B4-BE49-F238E27FC236}">
-                <a16:creationId xmlns:a16="http://schemas.microsoft.com/office/drawing/2014/main" id="{AFB4B82A-BA00-880D-6C39-A26D597B4EF1}"/>
+              <a:rPr lang="en-CA" sz="1600" dirty="0">
+                <a:latin typeface="Courier New" panose="02070309020205020404" pitchFamily="49" charset="0"/>
+                <a:cs typeface="Courier New" panose="02070309020205020404" pitchFamily="49" charset="0"/>
+              </a:rPr>
+              <a:t>LP &lt;- </a:t>
+            </a:r>
+            <a:r>
+              <a:rPr lang="en-CA" sz="1600" dirty="0" err="1">
+                <a:latin typeface="Courier New" panose="02070309020205020404" pitchFamily="49" charset="0"/>
+                <a:cs typeface="Courier New" panose="02070309020205020404" pitchFamily="49" charset="0"/>
+              </a:rPr>
+              <a:t>qlogis</a:t>
+            </a:r>
+            <a:r>
+              <a:rPr lang="en-CA" sz="1600" dirty="0">
+                <a:latin typeface="Courier New" panose="02070309020205020404" pitchFamily="49" charset="0"/>
+                <a:cs typeface="Courier New" panose="02070309020205020404" pitchFamily="49" charset="0"/>
+              </a:rPr>
+              <a:t>(P)</a:t>
+            </a:r>
+          </a:p>
+          <a:p>
+            <a:r>
+              <a:rPr lang="en-CA" sz="1600" dirty="0">
+                <a:latin typeface="Courier New" panose="02070309020205020404" pitchFamily="49" charset="0"/>
+                <a:cs typeface="Courier New" panose="02070309020205020404" pitchFamily="49" charset="0"/>
+              </a:rPr>
+              <a:t>LY &lt;- </a:t>
+            </a:r>
+            <a:r>
+              <a:rPr lang="en-CA" sz="1600" dirty="0" err="1">
+                <a:latin typeface="Courier New" panose="02070309020205020404" pitchFamily="49" charset="0"/>
+                <a:cs typeface="Courier New" panose="02070309020205020404" pitchFamily="49" charset="0"/>
+              </a:rPr>
+              <a:t>qlogis</a:t>
+            </a:r>
+            <a:r>
+              <a:rPr lang="en-CA" sz="1600" dirty="0">
+                <a:latin typeface="Courier New" panose="02070309020205020404" pitchFamily="49" charset="0"/>
+                <a:cs typeface="Courier New" panose="02070309020205020404" pitchFamily="49" charset="0"/>
+              </a:rPr>
+              <a:t>(Y)</a:t>
+            </a:r>
+          </a:p>
+        </p:txBody>
+      </p:sp>
+      <p:sp>
+        <p:nvSpPr>
+          <p:cNvPr id="11" name="TextBox 10">
+            <a:extLst>
+              <a:ext uri="{FF2B5EF4-FFF2-40B4-BE49-F238E27FC236}">
+                <a16:creationId xmlns:a16="http://schemas.microsoft.com/office/drawing/2014/main" id="{2920B6FA-E8E8-413A-6CD8-155EF8FBCFDA}"/>
               </a:ext>
             </a:extLst>
           </p:cNvPr>
@@ -16568,8 +16428,8 @@
         </p:nvSpPr>
         <p:spPr>
           <a:xfrm>
-            <a:off x="457200" y="1143000"/>
-            <a:ext cx="8229600" cy="369332"/>
+            <a:off x="4572000" y="2123768"/>
+            <a:ext cx="3962400" cy="369332"/>
           </a:xfrm>
           <a:prstGeom prst="rect">
             <a:avLst/>
@@ -16584,58 +16444,11 @@
           <a:p>
             <a:r>
               <a:rPr lang="en-CA" dirty="0"/>
-              <a:t>We can also model the relations with age as a quadratic, cubic, …</a:t>
-            </a:r>
-          </a:p>
-        </p:txBody>
-      </p:sp>
-      <p:sp>
-        <p:nvSpPr>
-          <p:cNvPr id="7" name="TextBox 6">
-            <a:extLst>
-              <a:ext uri="{FF2B5EF4-FFF2-40B4-BE49-F238E27FC236}">
-                <a16:creationId xmlns:a16="http://schemas.microsoft.com/office/drawing/2014/main" id="{3EF1C720-A2BB-3348-DBFD-F112102BB9BB}"/>
-              </a:ext>
-            </a:extLst>
-          </p:cNvPr>
-          <p:cNvSpPr txBox="1"/>
-          <p:nvPr/>
-        </p:nvSpPr>
-        <p:spPr>
-          <a:xfrm>
-            <a:off x="533400" y="2743200"/>
-            <a:ext cx="8153400" cy="369332"/>
-          </a:xfrm>
-          <a:prstGeom prst="rect">
-            <a:avLst/>
-          </a:prstGeom>
-          <a:noFill/>
-        </p:spPr>
-        <p:txBody>
-          <a:bodyPr wrap="square" rtlCol="0">
-            <a:spAutoFit/>
-          </a:bodyPr>
-          <a:lstStyle/>
-          <a:p>
-            <a:r>
-              <a:rPr lang="en-CA" dirty="0"/>
-              <a:t>VGAM also implements vector </a:t>
-            </a:r>
-            <a:r>
-              <a:rPr lang="en-CA" dirty="0">
-                <a:solidFill>
-                  <a:srgbClr val="0070C0"/>
-                </a:solidFill>
-              </a:rPr>
-              <a:t>generalized additive </a:t>
-            </a:r>
-            <a:r>
-              <a:rPr lang="en-CA" dirty="0"/>
-              <a:t>models, fit using </a:t>
+              <a:t>The plot is made using </a:t>
             </a:r>
             <a:r>
               <a:rPr lang="en-CA" dirty="0" err="1"/>
-              <a:t>vgam</a:t>
+              <a:t>matplot</a:t>
             </a:r>
             <a:r>
               <a:rPr lang="en-CA" dirty="0"/>
@@ -16647,7 +16460,7 @@
     </p:spTree>
     <p:extLst>
       <p:ext uri="{BB962C8B-B14F-4D97-AF65-F5344CB8AC3E}">
-        <p14:creationId xmlns:p14="http://schemas.microsoft.com/office/powerpoint/2010/main" val="3102492754"/>
+        <p14:creationId xmlns:p14="http://schemas.microsoft.com/office/powerpoint/2010/main" val="590267117"/>
       </p:ext>
     </p:extLst>
   </p:cSld>
@@ -16691,7 +16504,7 @@
           <p:cNvPr id="2" name="Title 1">
             <a:extLst>
               <a:ext uri="{FF2B5EF4-FFF2-40B4-BE49-F238E27FC236}">
-                <a16:creationId xmlns:a16="http://schemas.microsoft.com/office/drawing/2014/main" id="{D0973984-F841-7306-D766-AD2F20C0FF49}"/>
+                <a16:creationId xmlns:a16="http://schemas.microsoft.com/office/drawing/2014/main" id="{6128D1C3-5B64-D13C-6C2C-BBDC0FF9CE35}"/>
               </a:ext>
             </a:extLst>
           </p:cNvPr>
@@ -16705,13 +16518,13 @@
         <p:spPr/>
         <p:txBody>
           <a:bodyPr>
-            <a:noAutofit/>
+            <a:normAutofit fontScale="90000"/>
           </a:bodyPr>
           <a:lstStyle/>
           <a:p>
             <a:r>
-              <a:rPr lang="en-CA" sz="3200" dirty="0"/>
-              <a:t>Example: Attitudes toward corporal punishment</a:t>
+              <a:rPr lang="en-CA" dirty="0"/>
+              <a:t>Other possibilities</a:t>
             </a:r>
           </a:p>
         </p:txBody>
@@ -16721,7 +16534,7 @@
           <p:cNvPr id="3" name="Slide Number Placeholder 2">
             <a:extLst>
               <a:ext uri="{FF2B5EF4-FFF2-40B4-BE49-F238E27FC236}">
-                <a16:creationId xmlns:a16="http://schemas.microsoft.com/office/drawing/2014/main" id="{9C5B575E-999C-8FFE-2F30-AF33BE1BB271}"/>
+                <a16:creationId xmlns:a16="http://schemas.microsoft.com/office/drawing/2014/main" id="{B5584BBA-EA5E-CE0B-6CCE-E18A3BD4F537}"/>
               </a:ext>
             </a:extLst>
           </p:cNvPr>
@@ -16745,40 +16558,286 @@
           </a:p>
         </p:txBody>
       </p:sp>
-      <p:pic>
-        <p:nvPicPr>
-          <p:cNvPr id="5" name="Picture 4">
-            <a:extLst>
-              <a:ext uri="{FF2B5EF4-FFF2-40B4-BE49-F238E27FC236}">
-                <a16:creationId xmlns:a16="http://schemas.microsoft.com/office/drawing/2014/main" id="{318DD070-4B0A-0D18-5CDE-87DC3A1DD6BF}"/>
-              </a:ext>
-            </a:extLst>
-          </p:cNvPr>
-          <p:cNvPicPr>
-            <a:picLocks noChangeAspect="1"/>
-          </p:cNvPicPr>
+      <p:sp>
+        <p:nvSpPr>
+          <p:cNvPr id="4" name="TextBox 3">
+            <a:extLst>
+              <a:ext uri="{FF2B5EF4-FFF2-40B4-BE49-F238E27FC236}">
+                <a16:creationId xmlns:a16="http://schemas.microsoft.com/office/drawing/2014/main" id="{CBB14D2A-09D0-1E4D-35D8-79AE1D92E442}"/>
+              </a:ext>
+            </a:extLst>
+          </p:cNvPr>
+          <p:cNvSpPr txBox="1"/>
           <p:nvPr/>
-        </p:nvPicPr>
-        <p:blipFill>
-          <a:blip r:embed="rId2"/>
-          <a:stretch>
-            <a:fillRect/>
-          </a:stretch>
-        </p:blipFill>
+        </p:nvSpPr>
         <p:spPr>
           <a:xfrm>
-            <a:off x="557714" y="1386143"/>
-            <a:ext cx="8028571" cy="4085714"/>
+            <a:off x="457200" y="1752600"/>
+            <a:ext cx="8229600" cy="646331"/>
           </a:xfrm>
           <a:prstGeom prst="rect">
             <a:avLst/>
           </a:prstGeom>
+          <a:solidFill>
+            <a:schemeClr val="accent6">
+              <a:lumMod val="20000"/>
+              <a:lumOff val="80000"/>
+              <a:alpha val="60000"/>
+            </a:schemeClr>
+          </a:solidFill>
         </p:spPr>
-      </p:pic>
+        <p:txBody>
+          <a:bodyPr wrap="square" rtlCol="0">
+            <a:spAutoFit/>
+          </a:bodyPr>
+          <a:lstStyle/>
+          <a:p>
+            <a:r>
+              <a:rPr lang="en-CA" dirty="0"/>
+              <a:t>cm.vglm2 &lt;- </a:t>
+            </a:r>
+            <a:r>
+              <a:rPr lang="en-CA" dirty="0" err="1"/>
+              <a:t>vglm</a:t>
+            </a:r>
+            <a:r>
+              <a:rPr lang="en-CA" dirty="0"/>
+              <a:t>(</a:t>
+            </a:r>
+            <a:r>
+              <a:rPr lang="en-CA" dirty="0" err="1"/>
+              <a:t>cbind</a:t>
+            </a:r>
+            <a:r>
+              <a:rPr lang="en-CA" dirty="0"/>
+              <a:t>(</a:t>
+            </a:r>
+            <a:r>
+              <a:rPr lang="en-CA" dirty="0" err="1"/>
+              <a:t>nBnW</a:t>
+            </a:r>
+            <a:r>
+              <a:rPr lang="en-CA" dirty="0"/>
+              <a:t>, </a:t>
+            </a:r>
+            <a:r>
+              <a:rPr lang="en-CA" dirty="0" err="1"/>
+              <a:t>nBW</a:t>
+            </a:r>
+            <a:r>
+              <a:rPr lang="en-CA" dirty="0"/>
+              <a:t>, </a:t>
+            </a:r>
+            <a:r>
+              <a:rPr lang="en-CA" dirty="0" err="1"/>
+              <a:t>BnW</a:t>
+            </a:r>
+            <a:r>
+              <a:rPr lang="en-CA" dirty="0"/>
+              <a:t>, BW) ~ poly(Age,2),</a:t>
+            </a:r>
+          </a:p>
+          <a:p>
+            <a:r>
+              <a:rPr lang="en-CA" dirty="0"/>
+              <a:t>                binom2.or(zero = NULL), data = coalminers)</a:t>
+            </a:r>
+          </a:p>
+        </p:txBody>
+      </p:sp>
+      <p:sp>
+        <p:nvSpPr>
+          <p:cNvPr id="5" name="TextBox 4">
+            <a:extLst>
+              <a:ext uri="{FF2B5EF4-FFF2-40B4-BE49-F238E27FC236}">
+                <a16:creationId xmlns:a16="http://schemas.microsoft.com/office/drawing/2014/main" id="{F4610618-20DC-04A6-D903-33FF80EF0FA8}"/>
+              </a:ext>
+            </a:extLst>
+          </p:cNvPr>
+          <p:cNvSpPr txBox="1"/>
+          <p:nvPr/>
+        </p:nvSpPr>
+        <p:spPr>
+          <a:xfrm>
+            <a:off x="533400" y="3316069"/>
+            <a:ext cx="8153400" cy="646331"/>
+          </a:xfrm>
+          <a:prstGeom prst="rect">
+            <a:avLst/>
+          </a:prstGeom>
+          <a:solidFill>
+            <a:schemeClr val="accent6">
+              <a:lumMod val="20000"/>
+              <a:lumOff val="80000"/>
+              <a:alpha val="60000"/>
+            </a:schemeClr>
+          </a:solidFill>
+        </p:spPr>
+        <p:txBody>
+          <a:bodyPr wrap="square" rtlCol="0">
+            <a:spAutoFit/>
+          </a:bodyPr>
+          <a:lstStyle/>
+          <a:p>
+            <a:r>
+              <a:rPr lang="en-CA" dirty="0" err="1"/>
+              <a:t>cm.vgam</a:t>
+            </a:r>
+            <a:r>
+              <a:rPr lang="en-CA" dirty="0"/>
+              <a:t> &lt;- </a:t>
+            </a:r>
+            <a:r>
+              <a:rPr lang="en-CA" dirty="0" err="1"/>
+              <a:t>vgam</a:t>
+            </a:r>
+            <a:r>
+              <a:rPr lang="en-CA" dirty="0"/>
+              <a:t>(</a:t>
+            </a:r>
+            <a:r>
+              <a:rPr lang="en-CA" dirty="0" err="1"/>
+              <a:t>cbind</a:t>
+            </a:r>
+            <a:r>
+              <a:rPr lang="en-CA" dirty="0"/>
+              <a:t>(</a:t>
+            </a:r>
+            <a:r>
+              <a:rPr lang="en-CA" dirty="0" err="1"/>
+              <a:t>nBnW</a:t>
+            </a:r>
+            <a:r>
+              <a:rPr lang="en-CA" dirty="0"/>
+              <a:t>, </a:t>
+            </a:r>
+            <a:r>
+              <a:rPr lang="en-CA" dirty="0" err="1"/>
+              <a:t>nBW</a:t>
+            </a:r>
+            <a:r>
+              <a:rPr lang="en-CA" dirty="0"/>
+              <a:t>, </a:t>
+            </a:r>
+            <a:r>
+              <a:rPr lang="en-CA" dirty="0" err="1"/>
+              <a:t>BnW</a:t>
+            </a:r>
+            <a:r>
+              <a:rPr lang="en-CA" dirty="0"/>
+              <a:t>, BW) ~ s(Age, </a:t>
+            </a:r>
+            <a:r>
+              <a:rPr lang="en-CA" dirty="0" err="1"/>
+              <a:t>df</a:t>
+            </a:r>
+            <a:r>
+              <a:rPr lang="en-CA" dirty="0"/>
+              <a:t> = 2),</a:t>
+            </a:r>
+          </a:p>
+          <a:p>
+            <a:r>
+              <a:rPr lang="en-CA" dirty="0"/>
+              <a:t>                 binom2.or(zero = NULL), data = coalminers)</a:t>
+            </a:r>
+          </a:p>
+        </p:txBody>
+      </p:sp>
+      <p:sp>
+        <p:nvSpPr>
+          <p:cNvPr id="6" name="TextBox 5">
+            <a:extLst>
+              <a:ext uri="{FF2B5EF4-FFF2-40B4-BE49-F238E27FC236}">
+                <a16:creationId xmlns:a16="http://schemas.microsoft.com/office/drawing/2014/main" id="{AFB4B82A-BA00-880D-6C39-A26D597B4EF1}"/>
+              </a:ext>
+            </a:extLst>
+          </p:cNvPr>
+          <p:cNvSpPr txBox="1"/>
+          <p:nvPr/>
+        </p:nvSpPr>
+        <p:spPr>
+          <a:xfrm>
+            <a:off x="457200" y="1143000"/>
+            <a:ext cx="8229600" cy="369332"/>
+          </a:xfrm>
+          <a:prstGeom prst="rect">
+            <a:avLst/>
+          </a:prstGeom>
+          <a:noFill/>
+        </p:spPr>
+        <p:txBody>
+          <a:bodyPr wrap="square" rtlCol="0">
+            <a:spAutoFit/>
+          </a:bodyPr>
+          <a:lstStyle/>
+          <a:p>
+            <a:r>
+              <a:rPr lang="en-CA" dirty="0"/>
+              <a:t>We can also model the relations with age as a quadratic, cubic, …</a:t>
+            </a:r>
+          </a:p>
+        </p:txBody>
+      </p:sp>
+      <p:sp>
+        <p:nvSpPr>
+          <p:cNvPr id="7" name="TextBox 6">
+            <a:extLst>
+              <a:ext uri="{FF2B5EF4-FFF2-40B4-BE49-F238E27FC236}">
+                <a16:creationId xmlns:a16="http://schemas.microsoft.com/office/drawing/2014/main" id="{3EF1C720-A2BB-3348-DBFD-F112102BB9BB}"/>
+              </a:ext>
+            </a:extLst>
+          </p:cNvPr>
+          <p:cNvSpPr txBox="1"/>
+          <p:nvPr/>
+        </p:nvSpPr>
+        <p:spPr>
+          <a:xfrm>
+            <a:off x="533400" y="2743200"/>
+            <a:ext cx="8153400" cy="369332"/>
+          </a:xfrm>
+          <a:prstGeom prst="rect">
+            <a:avLst/>
+          </a:prstGeom>
+          <a:noFill/>
+        </p:spPr>
+        <p:txBody>
+          <a:bodyPr wrap="square" rtlCol="0">
+            <a:spAutoFit/>
+          </a:bodyPr>
+          <a:lstStyle/>
+          <a:p>
+            <a:r>
+              <a:rPr lang="en-CA" dirty="0"/>
+              <a:t>VGAM also implements vector </a:t>
+            </a:r>
+            <a:r>
+              <a:rPr lang="en-CA" dirty="0">
+                <a:solidFill>
+                  <a:srgbClr val="0070C0"/>
+                </a:solidFill>
+              </a:rPr>
+              <a:t>generalized additive </a:t>
+            </a:r>
+            <a:r>
+              <a:rPr lang="en-CA" dirty="0"/>
+              <a:t>models, fit using </a:t>
+            </a:r>
+            <a:r>
+              <a:rPr lang="en-CA" dirty="0" err="1"/>
+              <a:t>vgam</a:t>
+            </a:r>
+            <a:r>
+              <a:rPr lang="en-CA" dirty="0"/>
+              <a:t>()</a:t>
+            </a:r>
+          </a:p>
+        </p:txBody>
+      </p:sp>
     </p:spTree>
     <p:extLst>
       <p:ext uri="{BB962C8B-B14F-4D97-AF65-F5344CB8AC3E}">
-        <p14:creationId xmlns:p14="http://schemas.microsoft.com/office/powerpoint/2010/main" val="3035694652"/>
+        <p14:creationId xmlns:p14="http://schemas.microsoft.com/office/powerpoint/2010/main" val="3102492754"/>
       </p:ext>
     </p:extLst>
   </p:cSld>
@@ -17682,8 +17741,8 @@
         </p:nvSpPr>
         <p:spPr>
           <a:xfrm>
-            <a:off x="4495800" y="5257800"/>
-            <a:ext cx="4114800" cy="923330"/>
+            <a:off x="4495800" y="4944070"/>
+            <a:ext cx="4114800" cy="1200329"/>
           </a:xfrm>
           <a:prstGeom prst="rect">
             <a:avLst/>
@@ -17719,6 +17778,20 @@
             <a:r>
               <a:rPr lang="en-CA" dirty="0"/>
               <a:t> response</a:t>
+            </a:r>
+          </a:p>
+          <a:p>
+            <a:r>
+              <a:rPr lang="en-CA" dirty="0">
+                <a:solidFill>
+                  <a:srgbClr val="00B0F0"/>
+                </a:solidFill>
+              </a:rPr>
+              <a:t>Nested logits </a:t>
+            </a:r>
+            <a:r>
+              <a:rPr lang="en-CA" dirty="0"/>
+              <a:t>might also be useful</a:t>
             </a:r>
           </a:p>
         </p:txBody>
@@ -17890,7 +17963,7 @@
           <p:cNvPr id="2" name="Title 1">
             <a:extLst>
               <a:ext uri="{FF2B5EF4-FFF2-40B4-BE49-F238E27FC236}">
-                <a16:creationId xmlns:a16="http://schemas.microsoft.com/office/drawing/2014/main" id="{8F3DDA7B-A5CB-D814-7CE4-BDF4E04DD613}"/>
+                <a16:creationId xmlns:a16="http://schemas.microsoft.com/office/drawing/2014/main" id="{D0973984-F841-7306-D766-AD2F20C0FF49}"/>
               </a:ext>
             </a:extLst>
           </p:cNvPr>
@@ -17904,13 +17977,13 @@
         <p:spPr/>
         <p:txBody>
           <a:bodyPr>
-            <a:normAutofit fontScale="90000"/>
+            <a:noAutofit/>
           </a:bodyPr>
           <a:lstStyle/>
           <a:p>
             <a:r>
-              <a:rPr lang="en-CA" dirty="0"/>
-              <a:t>Attitudes: Questions</a:t>
+              <a:rPr lang="en-CA" sz="3200" dirty="0"/>
+              <a:t>Example: Attitudes toward corporal punishment</a:t>
             </a:r>
           </a:p>
         </p:txBody>
@@ -17920,7 +17993,7 @@
           <p:cNvPr id="3" name="Slide Number Placeholder 2">
             <a:extLst>
               <a:ext uri="{FF2B5EF4-FFF2-40B4-BE49-F238E27FC236}">
-                <a16:creationId xmlns:a16="http://schemas.microsoft.com/office/drawing/2014/main" id="{541E8907-EF0A-4493-14D7-05D41A8B3570}"/>
+                <a16:creationId xmlns:a16="http://schemas.microsoft.com/office/drawing/2014/main" id="{9C5B575E-999C-8FFE-2F30-AF33BE1BB271}"/>
               </a:ext>
             </a:extLst>
           </p:cNvPr>
@@ -17939,6 +18012,137 @@
             <a:fld id="{621225AB-15B9-4C79-A121-04D1DC7E2307}" type="slidenum">
               <a:rPr lang="en-US" smtClean="0"/>
               <a:t>50</a:t>
+            </a:fld>
+            <a:endParaRPr lang="en-US"/>
+          </a:p>
+        </p:txBody>
+      </p:sp>
+      <p:pic>
+        <p:nvPicPr>
+          <p:cNvPr id="5" name="Picture 4">
+            <a:extLst>
+              <a:ext uri="{FF2B5EF4-FFF2-40B4-BE49-F238E27FC236}">
+                <a16:creationId xmlns:a16="http://schemas.microsoft.com/office/drawing/2014/main" id="{318DD070-4B0A-0D18-5CDE-87DC3A1DD6BF}"/>
+              </a:ext>
+            </a:extLst>
+          </p:cNvPr>
+          <p:cNvPicPr>
+            <a:picLocks noChangeAspect="1"/>
+          </p:cNvPicPr>
+          <p:nvPr/>
+        </p:nvPicPr>
+        <p:blipFill>
+          <a:blip r:embed="rId2"/>
+          <a:stretch>
+            <a:fillRect/>
+          </a:stretch>
+        </p:blipFill>
+        <p:spPr>
+          <a:xfrm>
+            <a:off x="557714" y="1386143"/>
+            <a:ext cx="8028571" cy="4085714"/>
+          </a:xfrm>
+          <a:prstGeom prst="rect">
+            <a:avLst/>
+          </a:prstGeom>
+        </p:spPr>
+      </p:pic>
+    </p:spTree>
+    <p:extLst>
+      <p:ext uri="{BB962C8B-B14F-4D97-AF65-F5344CB8AC3E}">
+        <p14:creationId xmlns:p14="http://schemas.microsoft.com/office/powerpoint/2010/main" val="3035694652"/>
+      </p:ext>
+    </p:extLst>
+  </p:cSld>
+  <p:clrMapOvr>
+    <a:masterClrMapping/>
+  </p:clrMapOvr>
+  <mc:AlternateContent xmlns:mc="http://schemas.openxmlformats.org/markup-compatibility/2006" xmlns:p14="http://schemas.microsoft.com/office/powerpoint/2010/main">
+    <mc:Choice Requires="p14">
+      <p:transition spd="slow" p14:dur="2000">
+        <p14:prism isContent="1"/>
+      </p:transition>
+    </mc:Choice>
+    <mc:Fallback xmlns="">
+      <p:transition spd="slow">
+        <p:fade/>
+      </p:transition>
+    </mc:Fallback>
+  </mc:AlternateContent>
+</p:sld>
+</file>
+
+<file path=ppt/slides/slide51.xml><?xml version="1.0" encoding="utf-8"?>
+<p:sld xmlns:a="http://schemas.openxmlformats.org/drawingml/2006/main" xmlns:r="http://schemas.openxmlformats.org/officeDocument/2006/relationships" xmlns:p="http://schemas.openxmlformats.org/presentationml/2006/main">
+  <p:cSld>
+    <p:spTree>
+      <p:nvGrpSpPr>
+        <p:cNvPr id="1" name=""/>
+        <p:cNvGrpSpPr/>
+        <p:nvPr/>
+      </p:nvGrpSpPr>
+      <p:grpSpPr>
+        <a:xfrm>
+          <a:off x="0" y="0"/>
+          <a:ext cx="0" cy="0"/>
+          <a:chOff x="0" y="0"/>
+          <a:chExt cx="0" cy="0"/>
+        </a:xfrm>
+      </p:grpSpPr>
+      <p:sp>
+        <p:nvSpPr>
+          <p:cNvPr id="2" name="Title 1">
+            <a:extLst>
+              <a:ext uri="{FF2B5EF4-FFF2-40B4-BE49-F238E27FC236}">
+                <a16:creationId xmlns:a16="http://schemas.microsoft.com/office/drawing/2014/main" id="{8F3DDA7B-A5CB-D814-7CE4-BDF4E04DD613}"/>
+              </a:ext>
+            </a:extLst>
+          </p:cNvPr>
+          <p:cNvSpPr>
+            <a:spLocks noGrp="1"/>
+          </p:cNvSpPr>
+          <p:nvPr>
+            <p:ph type="title"/>
+          </p:nvPr>
+        </p:nvSpPr>
+        <p:spPr/>
+        <p:txBody>
+          <a:bodyPr>
+            <a:normAutofit fontScale="90000"/>
+          </a:bodyPr>
+          <a:lstStyle/>
+          <a:p>
+            <a:r>
+              <a:rPr lang="en-CA" dirty="0"/>
+              <a:t>Attitudes: Questions</a:t>
+            </a:r>
+          </a:p>
+        </p:txBody>
+      </p:sp>
+      <p:sp>
+        <p:nvSpPr>
+          <p:cNvPr id="3" name="Slide Number Placeholder 2">
+            <a:extLst>
+              <a:ext uri="{FF2B5EF4-FFF2-40B4-BE49-F238E27FC236}">
+                <a16:creationId xmlns:a16="http://schemas.microsoft.com/office/drawing/2014/main" id="{541E8907-EF0A-4493-14D7-05D41A8B3570}"/>
+              </a:ext>
+            </a:extLst>
+          </p:cNvPr>
+          <p:cNvSpPr>
+            <a:spLocks noGrp="1"/>
+          </p:cNvSpPr>
+          <p:nvPr>
+            <p:ph type="sldNum" sz="quarter" idx="12"/>
+          </p:nvPr>
+        </p:nvSpPr>
+        <p:spPr/>
+        <p:txBody>
+          <a:bodyPr/>
+          <a:lstStyle/>
+          <a:p>
+            <a:fld id="{621225AB-15B9-4C79-A121-04D1DC7E2307}" type="slidenum">
+              <a:rPr lang="en-US" smtClean="0"/>
+              <a:t>51</a:t>
             </a:fld>
             <a:endParaRPr lang="en-US"/>
           </a:p>
@@ -18193,7 +18397,7 @@
 </p:sld>
 </file>
 
-<file path=ppt/slides/slide51.xml><?xml version="1.0" encoding="utf-8"?>
+<file path=ppt/slides/slide52.xml><?xml version="1.0" encoding="utf-8"?>
 <p:sld xmlns:a="http://schemas.openxmlformats.org/drawingml/2006/main" xmlns:r="http://schemas.openxmlformats.org/officeDocument/2006/relationships" xmlns:p="http://schemas.openxmlformats.org/presentationml/2006/main">
   <p:cSld>
     <p:spTree>
@@ -18263,7 +18467,7 @@
           <a:p>
             <a:fld id="{621225AB-15B9-4C79-A121-04D1DC7E2307}" type="slidenum">
               <a:rPr lang="en-US" smtClean="0"/>
-              <a:t>51</a:t>
+              <a:t>52</a:t>
             </a:fld>
             <a:endParaRPr lang="en-US"/>
           </a:p>
@@ -18324,7 +18528,7 @@
 </p:sld>
 </file>
 
-<file path=ppt/slides/slide52.xml><?xml version="1.0" encoding="utf-8"?>
+<file path=ppt/slides/slide53.xml><?xml version="1.0" encoding="utf-8"?>
 <p:sld xmlns:a="http://schemas.openxmlformats.org/drawingml/2006/main" xmlns:r="http://schemas.openxmlformats.org/officeDocument/2006/relationships" xmlns:p="http://schemas.openxmlformats.org/presentationml/2006/main">
   <p:cSld>
     <p:spTree>
@@ -18394,7 +18598,7 @@
           <a:p>
             <a:fld id="{621225AB-15B9-4C79-A121-04D1DC7E2307}" type="slidenum">
               <a:rPr lang="en-US" smtClean="0"/>
-              <a:t>52</a:t>
+              <a:t>53</a:t>
             </a:fld>
             <a:endParaRPr lang="en-US"/>
           </a:p>
@@ -18455,7 +18659,7 @@
 </p:sld>
 </file>
 
-<file path=ppt/slides/slide53.xml><?xml version="1.0" encoding="utf-8"?>
+<file path=ppt/slides/slide54.xml><?xml version="1.0" encoding="utf-8"?>
 <p:sld xmlns:a="http://schemas.openxmlformats.org/drawingml/2006/main" xmlns:r="http://schemas.openxmlformats.org/officeDocument/2006/relationships" xmlns:p="http://schemas.openxmlformats.org/presentationml/2006/main">
   <p:cSld>
     <p:spTree>
@@ -18525,7 +18729,7 @@
           <a:p>
             <a:fld id="{621225AB-15B9-4C79-A121-04D1DC7E2307}" type="slidenum">
               <a:rPr lang="en-US" smtClean="0"/>
-              <a:t>53</a:t>
+              <a:t>54</a:t>
             </a:fld>
             <a:endParaRPr lang="en-US"/>
           </a:p>
@@ -18639,7 +18843,7 @@
 </p:sld>
 </file>
 
-<file path=ppt/slides/slide54.xml><?xml version="1.0" encoding="utf-8"?>
+<file path=ppt/slides/slide55.xml><?xml version="1.0" encoding="utf-8"?>
 <p:sld xmlns:a="http://schemas.openxmlformats.org/drawingml/2006/main" xmlns:r="http://schemas.openxmlformats.org/officeDocument/2006/relationships" xmlns:p="http://schemas.openxmlformats.org/presentationml/2006/main">
   <p:cSld>
     <p:spTree>
@@ -18709,7 +18913,7 @@
           <a:p>
             <a:fld id="{621225AB-15B9-4C79-A121-04D1DC7E2307}" type="slidenum">
               <a:rPr lang="en-US" smtClean="0"/>
-              <a:t>54</a:t>
+              <a:t>55</a:t>
             </a:fld>
             <a:endParaRPr lang="en-US"/>
           </a:p>
@@ -18770,7 +18974,7 @@
 </p:sld>
 </file>
 
-<file path=ppt/slides/slide55.xml><?xml version="1.0" encoding="utf-8"?>
+<file path=ppt/slides/slide56.xml><?xml version="1.0" encoding="utf-8"?>
 <p:sld xmlns:a="http://schemas.openxmlformats.org/drawingml/2006/main" xmlns:r="http://schemas.openxmlformats.org/officeDocument/2006/relationships" xmlns:p="http://schemas.openxmlformats.org/presentationml/2006/main">
   <p:cSld>
     <p:spTree>
@@ -18922,7 +19126,7 @@
           <a:p>
             <a:fld id="{621225AB-15B9-4C79-A121-04D1DC7E2307}" type="slidenum">
               <a:rPr lang="en-US" smtClean="0"/>
-              <a:t>55</a:t>
+              <a:t>56</a:t>
             </a:fld>
             <a:endParaRPr lang="en-US"/>
           </a:p>
